--- a/teaching/ECOL592-007-Species_Listing/resources/IUCN_GBF_intro.pptx
+++ b/teaching/ECOL592-007-Species_Listing/resources/IUCN_GBF_intro.pptx
@@ -5,17 +5,24 @@
     <p:sldMasterId id="2147483660" r:id="rId1"/>
   </p:sldMasterIdLst>
   <p:notesMasterIdLst>
-    <p:notesMasterId r:id="rId10"/>
+    <p:notesMasterId r:id="rId17"/>
   </p:notesMasterIdLst>
   <p:sldIdLst>
     <p:sldId id="256" r:id="rId2"/>
-    <p:sldId id="257" r:id="rId3"/>
-    <p:sldId id="259" r:id="rId4"/>
-    <p:sldId id="261" r:id="rId5"/>
-    <p:sldId id="262" r:id="rId6"/>
-    <p:sldId id="265" r:id="rId7"/>
-    <p:sldId id="264" r:id="rId8"/>
-    <p:sldId id="266" r:id="rId9"/>
+    <p:sldId id="264" r:id="rId3"/>
+    <p:sldId id="265" r:id="rId4"/>
+    <p:sldId id="268" r:id="rId5"/>
+    <p:sldId id="266" r:id="rId6"/>
+    <p:sldId id="257" r:id="rId7"/>
+    <p:sldId id="259" r:id="rId8"/>
+    <p:sldId id="261" r:id="rId9"/>
+    <p:sldId id="262" r:id="rId10"/>
+    <p:sldId id="269" r:id="rId11"/>
+    <p:sldId id="260" r:id="rId12"/>
+    <p:sldId id="270" r:id="rId13"/>
+    <p:sldId id="281" r:id="rId14"/>
+    <p:sldId id="282" r:id="rId15"/>
+    <p:sldId id="283" r:id="rId16"/>
   </p:sldIdLst>
   <p:sldSz cx="12192000" cy="6858000"/>
   <p:notesSz cx="6858000" cy="9144000"/>
@@ -114,6 +121,11 @@
       </a:defRPr>
     </a:lvl9pPr>
   </p:defaultTextStyle>
+  <p:extLst>
+    <p:ext uri="{EFAFB233-063F-42B5-8137-9DF3F51BA10A}">
+      <p15:sldGuideLst xmlns:p15="http://schemas.microsoft.com/office/powerpoint/2012/main"/>
+    </p:ext>
+  </p:extLst>
 </p:presentation>
 </file>
 
@@ -199,7 +211,7 @@
           <a:p>
             <a:fld id="{643F6A40-99C4-6544-905A-A025936DBC02}" type="datetimeFigureOut">
               <a:rPr lang="en-US" smtClean="0"/>
-              <a:t>9/21/26</a:t>
+              <a:t>9/23/26</a:t>
             </a:fld>
             <a:endParaRPr lang="en-US"/>
           </a:p>
@@ -511,23 +523,16 @@
           <a:lstStyle/>
           <a:p>
             <a:r>
+              <a:rPr lang="en-US" b="1" dirty="0"/>
+              <a:t>A.3 looks primarily at species-level extinction risk.</a:t>
+            </a:r>
+            <a:br>
               <a:rPr lang="en-US" dirty="0"/>
-              <a:t>CITES: Convention on International Trade in Endangered Species of Wild Fauna and Flora</a:t>
-            </a:r>
-          </a:p>
-          <a:p>
-            <a:r>
-              <a:rPr lang="en-US" dirty="0"/>
-              <a:t>CMS: Convention on Migratory Species</a:t>
-            </a:r>
-          </a:p>
-          <a:p>
-            <a:r>
-              <a:rPr lang="en-US" dirty="0"/>
-              <a:t>GBF: Global Biodiversity Framework</a:t>
-            </a:r>
-          </a:p>
-          <a:p>
+            </a:br>
+            <a:r>
+              <a:rPr lang="en-US" b="1" dirty="0"/>
+              <a:t>A.4 looks below the species level at population genetic vulnerability.</a:t>
+            </a:r>
             <a:endParaRPr lang="en-US" dirty="0"/>
           </a:p>
         </p:txBody>
@@ -558,7 +563,7 @@
     </p:spTree>
     <p:extLst>
       <p:ext uri="{BB962C8B-B14F-4D97-AF65-F5344CB8AC3E}">
-        <p14:creationId xmlns:p14="http://schemas.microsoft.com/office/powerpoint/2010/main" val="1878265793"/>
+        <p14:creationId xmlns:p14="http://schemas.microsoft.com/office/powerpoint/2010/main" val="1750729475"/>
       </p:ext>
     </p:extLst>
   </p:cSld>
@@ -613,6 +618,126 @@
           <a:lstStyle/>
           <a:p>
             <a:r>
+              <a:rPr lang="en-US" dirty="0"/>
+              <a:t>CITES: Convention on International Trade in Endangered Species of Wild Fauna and Flora</a:t>
+            </a:r>
+          </a:p>
+          <a:p>
+            <a:r>
+              <a:rPr lang="en-US" dirty="0"/>
+              <a:t>CMS: Convention on Migratory Species</a:t>
+            </a:r>
+          </a:p>
+          <a:p>
+            <a:r>
+              <a:rPr lang="en-US" dirty="0"/>
+              <a:t>GBF: Global Biodiversity Framework</a:t>
+            </a:r>
+          </a:p>
+          <a:p>
+            <a:endParaRPr lang="en-US" dirty="0"/>
+          </a:p>
+        </p:txBody>
+      </p:sp>
+      <p:sp>
+        <p:nvSpPr>
+          <p:cNvPr id="4" name="Slide Number Placeholder 3"/>
+          <p:cNvSpPr>
+            <a:spLocks noGrp="1"/>
+          </p:cNvSpPr>
+          <p:nvPr>
+            <p:ph type="sldNum" sz="quarter" idx="5"/>
+          </p:nvPr>
+        </p:nvSpPr>
+        <p:spPr/>
+        <p:txBody>
+          <a:bodyPr/>
+          <a:lstStyle/>
+          <a:p>
+            <a:fld id="{971840B8-E582-6E44-9E68-439566DD72E5}" type="slidenum">
+              <a:rPr lang="en-US" smtClean="0"/>
+              <a:t>9</a:t>
+            </a:fld>
+            <a:endParaRPr lang="en-US"/>
+          </a:p>
+        </p:txBody>
+      </p:sp>
+    </p:spTree>
+    <p:extLst>
+      <p:ext uri="{BB962C8B-B14F-4D97-AF65-F5344CB8AC3E}">
+        <p14:creationId xmlns:p14="http://schemas.microsoft.com/office/powerpoint/2010/main" val="1878265793"/>
+      </p:ext>
+    </p:extLst>
+  </p:cSld>
+  <p:clrMapOvr>
+    <a:masterClrMapping/>
+  </p:clrMapOvr>
+</p:notes>
+</file>
+
+<file path=ppt/notesSlides/notesSlide3.xml><?xml version="1.0" encoding="utf-8"?>
+<p:notes xmlns:a="http://schemas.openxmlformats.org/drawingml/2006/main" xmlns:r="http://schemas.openxmlformats.org/officeDocument/2006/relationships" xmlns:p="http://schemas.openxmlformats.org/presentationml/2006/main">
+  <p:cSld>
+    <p:spTree>
+      <p:nvGrpSpPr>
+        <p:cNvPr id="1" name="">
+          <a:extLst>
+            <a:ext uri="{FF2B5EF4-FFF2-40B4-BE49-F238E27FC236}">
+              <a16:creationId xmlns:a16="http://schemas.microsoft.com/office/drawing/2014/main" id="{DF71BC81-92F9-DC0D-BFD3-0984DB157354}"/>
+            </a:ext>
+          </a:extLst>
+        </p:cNvPr>
+        <p:cNvGrpSpPr/>
+        <p:nvPr/>
+      </p:nvGrpSpPr>
+      <p:grpSpPr>
+        <a:xfrm>
+          <a:off x="0" y="0"/>
+          <a:ext cx="0" cy="0"/>
+          <a:chOff x="0" y="0"/>
+          <a:chExt cx="0" cy="0"/>
+        </a:xfrm>
+      </p:grpSpPr>
+      <p:sp>
+        <p:nvSpPr>
+          <p:cNvPr id="2" name="Slide Image Placeholder 1">
+            <a:extLst>
+              <a:ext uri="{FF2B5EF4-FFF2-40B4-BE49-F238E27FC236}">
+                <a16:creationId xmlns:a16="http://schemas.microsoft.com/office/drawing/2014/main" id="{6AFF47FF-E932-F104-83AC-9BA0BDC8916F}"/>
+              </a:ext>
+            </a:extLst>
+          </p:cNvPr>
+          <p:cNvSpPr>
+            <a:spLocks noGrp="1" noRot="1" noChangeAspect="1"/>
+          </p:cNvSpPr>
+          <p:nvPr>
+            <p:ph type="sldImg"/>
+          </p:nvPr>
+        </p:nvSpPr>
+        <p:spPr/>
+      </p:sp>
+      <p:sp>
+        <p:nvSpPr>
+          <p:cNvPr id="3" name="Notes Placeholder 2">
+            <a:extLst>
+              <a:ext uri="{FF2B5EF4-FFF2-40B4-BE49-F238E27FC236}">
+                <a16:creationId xmlns:a16="http://schemas.microsoft.com/office/drawing/2014/main" id="{5894EF48-0BE8-DE43-9A9C-2D6301DC7A54}"/>
+              </a:ext>
+            </a:extLst>
+          </p:cNvPr>
+          <p:cNvSpPr>
+            <a:spLocks noGrp="1"/>
+          </p:cNvSpPr>
+          <p:nvPr>
+            <p:ph type="body" idx="1"/>
+          </p:nvPr>
+        </p:nvSpPr>
+        <p:spPr/>
+        <p:txBody>
+          <a:bodyPr/>
+          <a:lstStyle/>
+          <a:p>
+            <a:r>
               <a:rPr lang="en-US" b="1" dirty="0"/>
               <a:t>A.3 looks primarily at species-level extinction risk.</a:t>
             </a:r>
@@ -629,7 +754,13 @@
       </p:sp>
       <p:sp>
         <p:nvSpPr>
-          <p:cNvPr id="4" name="Slide Number Placeholder 3"/>
+          <p:cNvPr id="4" name="Slide Number Placeholder 3">
+            <a:extLst>
+              <a:ext uri="{FF2B5EF4-FFF2-40B4-BE49-F238E27FC236}">
+                <a16:creationId xmlns:a16="http://schemas.microsoft.com/office/drawing/2014/main" id="{B5643990-FD92-E754-689D-B8705E331BDB}"/>
+              </a:ext>
+            </a:extLst>
+          </p:cNvPr>
           <p:cNvSpPr>
             <a:spLocks noGrp="1"/>
           </p:cNvSpPr>
@@ -644,7 +775,7 @@
           <a:p>
             <a:fld id="{971840B8-E582-6E44-9E68-439566DD72E5}" type="slidenum">
               <a:rPr lang="en-US" smtClean="0"/>
-              <a:t>8</a:t>
+              <a:t>10</a:t>
             </a:fld>
             <a:endParaRPr lang="en-US"/>
           </a:p>
@@ -653,7 +784,7 @@
     </p:spTree>
     <p:extLst>
       <p:ext uri="{BB962C8B-B14F-4D97-AF65-F5344CB8AC3E}">
-        <p14:creationId xmlns:p14="http://schemas.microsoft.com/office/powerpoint/2010/main" val="3983023600"/>
+        <p14:creationId xmlns:p14="http://schemas.microsoft.com/office/powerpoint/2010/main" val="17869722"/>
       </p:ext>
     </p:extLst>
   </p:cSld>
@@ -794,7 +925,7 @@
           <a:p>
             <a:fld id="{F81AEFEA-BAB7-704F-9805-739D7747D87B}" type="datetimeFigureOut">
               <a:rPr lang="en-US" smtClean="0"/>
-              <a:t>9/21/26</a:t>
+              <a:t>9/23/26</a:t>
             </a:fld>
             <a:endParaRPr lang="en-US"/>
           </a:p>
@@ -964,7 +1095,7 @@
           <a:p>
             <a:fld id="{F81AEFEA-BAB7-704F-9805-739D7747D87B}" type="datetimeFigureOut">
               <a:rPr lang="en-US" smtClean="0"/>
-              <a:t>9/21/26</a:t>
+              <a:t>9/23/26</a:t>
             </a:fld>
             <a:endParaRPr lang="en-US"/>
           </a:p>
@@ -1144,7 +1275,7 @@
           <a:p>
             <a:fld id="{F81AEFEA-BAB7-704F-9805-739D7747D87B}" type="datetimeFigureOut">
               <a:rPr lang="en-US" smtClean="0"/>
-              <a:t>9/21/26</a:t>
+              <a:t>9/23/26</a:t>
             </a:fld>
             <a:endParaRPr lang="en-US"/>
           </a:p>
@@ -1314,7 +1445,7 @@
           <a:p>
             <a:fld id="{F81AEFEA-BAB7-704F-9805-739D7747D87B}" type="datetimeFigureOut">
               <a:rPr lang="en-US" smtClean="0"/>
-              <a:t>9/21/26</a:t>
+              <a:t>9/23/26</a:t>
             </a:fld>
             <a:endParaRPr lang="en-US"/>
           </a:p>
@@ -1560,7 +1691,7 @@
           <a:p>
             <a:fld id="{F81AEFEA-BAB7-704F-9805-739D7747D87B}" type="datetimeFigureOut">
               <a:rPr lang="en-US" smtClean="0"/>
-              <a:t>9/21/26</a:t>
+              <a:t>9/23/26</a:t>
             </a:fld>
             <a:endParaRPr lang="en-US"/>
           </a:p>
@@ -1792,7 +1923,7 @@
           <a:p>
             <a:fld id="{F81AEFEA-BAB7-704F-9805-739D7747D87B}" type="datetimeFigureOut">
               <a:rPr lang="en-US" smtClean="0"/>
-              <a:t>9/21/26</a:t>
+              <a:t>9/23/26</a:t>
             </a:fld>
             <a:endParaRPr lang="en-US"/>
           </a:p>
@@ -2159,7 +2290,7 @@
           <a:p>
             <a:fld id="{F81AEFEA-BAB7-704F-9805-739D7747D87B}" type="datetimeFigureOut">
               <a:rPr lang="en-US" smtClean="0"/>
-              <a:t>9/21/26</a:t>
+              <a:t>9/23/26</a:t>
             </a:fld>
             <a:endParaRPr lang="en-US"/>
           </a:p>
@@ -2277,7 +2408,7 @@
           <a:p>
             <a:fld id="{F81AEFEA-BAB7-704F-9805-739D7747D87B}" type="datetimeFigureOut">
               <a:rPr lang="en-US" smtClean="0"/>
-              <a:t>9/21/26</a:t>
+              <a:t>9/23/26</a:t>
             </a:fld>
             <a:endParaRPr lang="en-US"/>
           </a:p>
@@ -2372,7 +2503,7 @@
           <a:p>
             <a:fld id="{F81AEFEA-BAB7-704F-9805-739D7747D87B}" type="datetimeFigureOut">
               <a:rPr lang="en-US" smtClean="0"/>
-              <a:t>9/21/26</a:t>
+              <a:t>9/23/26</a:t>
             </a:fld>
             <a:endParaRPr lang="en-US"/>
           </a:p>
@@ -2649,7 +2780,7 @@
           <a:p>
             <a:fld id="{F81AEFEA-BAB7-704F-9805-739D7747D87B}" type="datetimeFigureOut">
               <a:rPr lang="en-US" smtClean="0"/>
-              <a:t>9/21/26</a:t>
+              <a:t>9/23/26</a:t>
             </a:fld>
             <a:endParaRPr lang="en-US"/>
           </a:p>
@@ -2906,7 +3037,7 @@
           <a:p>
             <a:fld id="{F81AEFEA-BAB7-704F-9805-739D7747D87B}" type="datetimeFigureOut">
               <a:rPr lang="en-US" smtClean="0"/>
-              <a:t>9/21/26</a:t>
+              <a:t>9/23/26</a:t>
             </a:fld>
             <a:endParaRPr lang="en-US"/>
           </a:p>
@@ -3119,7 +3250,7 @@
           <a:p>
             <a:fld id="{F81AEFEA-BAB7-704F-9805-739D7747D87B}" type="datetimeFigureOut">
               <a:rPr lang="en-US" smtClean="0"/>
-              <a:t>9/21/26</a:t>
+              <a:t>9/23/26</a:t>
             </a:fld>
             <a:endParaRPr lang="en-US"/>
           </a:p>
@@ -3545,7 +3676,10 @@
           <a:bodyPr/>
           <a:lstStyle/>
           <a:p>
-            <a:endParaRPr lang="en-US"/>
+            <a:r>
+              <a:rPr lang="en-US"/>
+              <a:t>Global Policy</a:t>
+            </a:r>
           </a:p>
         </p:txBody>
       </p:sp>
@@ -3587,7 +3721,3377 @@
 </p:sld>
 </file>
 
+<file path=ppt/slides/slide10.xml><?xml version="1.0" encoding="utf-8"?>
+<p:sld xmlns:a="http://schemas.openxmlformats.org/drawingml/2006/main" xmlns:r="http://schemas.openxmlformats.org/officeDocument/2006/relationships" xmlns:p="http://schemas.openxmlformats.org/presentationml/2006/main">
+  <p:cSld>
+    <p:spTree>
+      <p:nvGrpSpPr>
+        <p:cNvPr id="1" name="">
+          <a:extLst>
+            <a:ext uri="{FF2B5EF4-FFF2-40B4-BE49-F238E27FC236}">
+              <a16:creationId xmlns:a16="http://schemas.microsoft.com/office/drawing/2014/main" id="{8C8A8E4C-AE8F-E507-10B6-54124984CB39}"/>
+            </a:ext>
+          </a:extLst>
+        </p:cNvPr>
+        <p:cNvGrpSpPr/>
+        <p:nvPr/>
+      </p:nvGrpSpPr>
+      <p:grpSpPr>
+        <a:xfrm>
+          <a:off x="0" y="0"/>
+          <a:ext cx="0" cy="0"/>
+          <a:chOff x="0" y="0"/>
+          <a:chExt cx="0" cy="0"/>
+        </a:xfrm>
+      </p:grpSpPr>
+      <p:sp>
+        <p:nvSpPr>
+          <p:cNvPr id="2" name="Title 1">
+            <a:extLst>
+              <a:ext uri="{FF2B5EF4-FFF2-40B4-BE49-F238E27FC236}">
+                <a16:creationId xmlns:a16="http://schemas.microsoft.com/office/drawing/2014/main" id="{B8B2CB43-5534-34F6-5771-4C1C35F48E5F}"/>
+              </a:ext>
+            </a:extLst>
+          </p:cNvPr>
+          <p:cNvSpPr>
+            <a:spLocks noGrp="1"/>
+          </p:cNvSpPr>
+          <p:nvPr>
+            <p:ph type="title"/>
+          </p:nvPr>
+        </p:nvSpPr>
+        <p:spPr/>
+        <p:txBody>
+          <a:bodyPr/>
+          <a:lstStyle/>
+          <a:p>
+            <a:r>
+              <a:rPr lang="en-US" dirty="0"/>
+              <a:t>How do genetic indicator fit in?</a:t>
+            </a:r>
+          </a:p>
+        </p:txBody>
+      </p:sp>
+      <p:sp>
+        <p:nvSpPr>
+          <p:cNvPr id="3" name="Content Placeholder 2">
+            <a:extLst>
+              <a:ext uri="{FF2B5EF4-FFF2-40B4-BE49-F238E27FC236}">
+                <a16:creationId xmlns:a16="http://schemas.microsoft.com/office/drawing/2014/main" id="{91F2BD4D-7B77-ADC0-9A19-29ADC2FC0F34}"/>
+              </a:ext>
+            </a:extLst>
+          </p:cNvPr>
+          <p:cNvSpPr>
+            <a:spLocks noGrp="1"/>
+          </p:cNvSpPr>
+          <p:nvPr>
+            <p:ph idx="1"/>
+          </p:nvPr>
+        </p:nvSpPr>
+        <p:spPr>
+          <a:xfrm>
+            <a:off x="838200" y="1573833"/>
+            <a:ext cx="10515600" cy="1421158"/>
+          </a:xfrm>
+        </p:spPr>
+        <p:style>
+          <a:lnRef idx="3">
+            <a:schemeClr val="lt1"/>
+          </a:lnRef>
+          <a:fillRef idx="1">
+            <a:schemeClr val="accent4"/>
+          </a:fillRef>
+          <a:effectRef idx="1">
+            <a:schemeClr val="accent4"/>
+          </a:effectRef>
+          <a:fontRef idx="minor">
+            <a:schemeClr val="lt1"/>
+          </a:fontRef>
+        </p:style>
+        <p:txBody>
+          <a:bodyPr/>
+          <a:lstStyle/>
+          <a:p>
+            <a:pPr marL="0" indent="0">
+              <a:buNone/>
+            </a:pPr>
+            <a:r>
+              <a:rPr lang="en-US" b="1" dirty="0">
+                <a:solidFill>
+                  <a:sysClr val="windowText" lastClr="000000"/>
+                </a:solidFill>
+              </a:rPr>
+              <a:t>Goal A</a:t>
+            </a:r>
+          </a:p>
+          <a:p>
+            <a:pPr marL="0" indent="0">
+              <a:buNone/>
+            </a:pPr>
+            <a:r>
+              <a:rPr lang="en-US" dirty="0">
+                <a:solidFill>
+                  <a:sysClr val="windowText" lastClr="000000"/>
+                </a:solidFill>
+              </a:rPr>
+              <a:t>Maintain ecosystem integrity, reduce extinction risk, increase abundance of native species, and maintain genetic diversity.</a:t>
+            </a:r>
+          </a:p>
+          <a:p>
+            <a:pPr marL="0" indent="0">
+              <a:buNone/>
+            </a:pPr>
+            <a:endParaRPr lang="en-US" dirty="0">
+              <a:solidFill>
+                <a:sysClr val="windowText" lastClr="000000"/>
+              </a:solidFill>
+            </a:endParaRPr>
+          </a:p>
+        </p:txBody>
+      </p:sp>
+      <p:sp>
+        <p:nvSpPr>
+          <p:cNvPr id="4" name="Content Placeholder 2">
+            <a:extLst>
+              <a:ext uri="{FF2B5EF4-FFF2-40B4-BE49-F238E27FC236}">
+                <a16:creationId xmlns:a16="http://schemas.microsoft.com/office/drawing/2014/main" id="{05CEC2B8-D97F-6D08-F791-7FDC8CEED0B9}"/>
+              </a:ext>
+            </a:extLst>
+          </p:cNvPr>
+          <p:cNvSpPr txBox="1">
+            <a:spLocks/>
+          </p:cNvSpPr>
+          <p:nvPr/>
+        </p:nvSpPr>
+        <p:spPr>
+          <a:xfrm>
+            <a:off x="838200" y="3152431"/>
+            <a:ext cx="10515600" cy="1421158"/>
+          </a:xfrm>
+          <a:prstGeom prst="rect">
+            <a:avLst/>
+          </a:prstGeom>
+        </p:spPr>
+        <p:style>
+          <a:lnRef idx="3">
+            <a:schemeClr val="lt1"/>
+          </a:lnRef>
+          <a:fillRef idx="1">
+            <a:schemeClr val="accent5"/>
+          </a:fillRef>
+          <a:effectRef idx="1">
+            <a:schemeClr val="accent5"/>
+          </a:effectRef>
+          <a:fontRef idx="minor">
+            <a:schemeClr val="lt1"/>
+          </a:fontRef>
+        </p:style>
+        <p:txBody>
+          <a:bodyPr vert="horz" lIns="91440" tIns="45720" rIns="91440" bIns="45720" rtlCol="0">
+            <a:normAutofit/>
+          </a:bodyPr>
+          <a:lstStyle>
+            <a:lvl1pPr marL="228600" indent="-228600" algn="l" defTabSz="914400" rtl="0" eaLnBrk="1" latinLnBrk="0" hangingPunct="1">
+              <a:lnSpc>
+                <a:spcPct val="90000"/>
+              </a:lnSpc>
+              <a:spcBef>
+                <a:spcPts val="1000"/>
+              </a:spcBef>
+              <a:buFont typeface="Arial" panose="020B0604020202020204" pitchFamily="34" charset="0"/>
+              <a:buChar char="•"/>
+              <a:defRPr sz="2800" kern="1200">
+                <a:solidFill>
+                  <a:schemeClr val="tx1"/>
+                </a:solidFill>
+                <a:latin typeface="+mn-lt"/>
+                <a:ea typeface="+mn-ea"/>
+                <a:cs typeface="+mn-cs"/>
+              </a:defRPr>
+            </a:lvl1pPr>
+            <a:lvl2pPr marL="685800" indent="-228600" algn="l" defTabSz="914400" rtl="0" eaLnBrk="1" latinLnBrk="0" hangingPunct="1">
+              <a:lnSpc>
+                <a:spcPct val="90000"/>
+              </a:lnSpc>
+              <a:spcBef>
+                <a:spcPts val="500"/>
+              </a:spcBef>
+              <a:buFont typeface="Arial" panose="020B0604020202020204" pitchFamily="34" charset="0"/>
+              <a:buChar char="•"/>
+              <a:defRPr sz="2400" kern="1200">
+                <a:solidFill>
+                  <a:schemeClr val="tx1"/>
+                </a:solidFill>
+                <a:latin typeface="+mn-lt"/>
+                <a:ea typeface="+mn-ea"/>
+                <a:cs typeface="+mn-cs"/>
+              </a:defRPr>
+            </a:lvl2pPr>
+            <a:lvl3pPr marL="1143000" indent="-228600" algn="l" defTabSz="914400" rtl="0" eaLnBrk="1" latinLnBrk="0" hangingPunct="1">
+              <a:lnSpc>
+                <a:spcPct val="90000"/>
+              </a:lnSpc>
+              <a:spcBef>
+                <a:spcPts val="500"/>
+              </a:spcBef>
+              <a:buFont typeface="Arial" panose="020B0604020202020204" pitchFamily="34" charset="0"/>
+              <a:buChar char="•"/>
+              <a:defRPr sz="2000" kern="1200">
+                <a:solidFill>
+                  <a:schemeClr val="tx1"/>
+                </a:solidFill>
+                <a:latin typeface="+mn-lt"/>
+                <a:ea typeface="+mn-ea"/>
+                <a:cs typeface="+mn-cs"/>
+              </a:defRPr>
+            </a:lvl3pPr>
+            <a:lvl4pPr marL="1600200" indent="-228600" algn="l" defTabSz="914400" rtl="0" eaLnBrk="1" latinLnBrk="0" hangingPunct="1">
+              <a:lnSpc>
+                <a:spcPct val="90000"/>
+              </a:lnSpc>
+              <a:spcBef>
+                <a:spcPts val="500"/>
+              </a:spcBef>
+              <a:buFont typeface="Arial" panose="020B0604020202020204" pitchFamily="34" charset="0"/>
+              <a:buChar char="•"/>
+              <a:defRPr sz="1800" kern="1200">
+                <a:solidFill>
+                  <a:schemeClr val="tx1"/>
+                </a:solidFill>
+                <a:latin typeface="+mn-lt"/>
+                <a:ea typeface="+mn-ea"/>
+                <a:cs typeface="+mn-cs"/>
+              </a:defRPr>
+            </a:lvl4pPr>
+            <a:lvl5pPr marL="2057400" indent="-228600" algn="l" defTabSz="914400" rtl="0" eaLnBrk="1" latinLnBrk="0" hangingPunct="1">
+              <a:lnSpc>
+                <a:spcPct val="90000"/>
+              </a:lnSpc>
+              <a:spcBef>
+                <a:spcPts val="500"/>
+              </a:spcBef>
+              <a:buFont typeface="Arial" panose="020B0604020202020204" pitchFamily="34" charset="0"/>
+              <a:buChar char="•"/>
+              <a:defRPr sz="1800" kern="1200">
+                <a:solidFill>
+                  <a:schemeClr val="tx1"/>
+                </a:solidFill>
+                <a:latin typeface="+mn-lt"/>
+                <a:ea typeface="+mn-ea"/>
+                <a:cs typeface="+mn-cs"/>
+              </a:defRPr>
+            </a:lvl5pPr>
+            <a:lvl6pPr marL="2514600" indent="-228600" algn="l" defTabSz="914400" rtl="0" eaLnBrk="1" latinLnBrk="0" hangingPunct="1">
+              <a:lnSpc>
+                <a:spcPct val="90000"/>
+              </a:lnSpc>
+              <a:spcBef>
+                <a:spcPts val="500"/>
+              </a:spcBef>
+              <a:buFont typeface="Arial" panose="020B0604020202020204" pitchFamily="34" charset="0"/>
+              <a:buChar char="•"/>
+              <a:defRPr sz="1800" kern="1200">
+                <a:solidFill>
+                  <a:schemeClr val="tx1"/>
+                </a:solidFill>
+                <a:latin typeface="+mn-lt"/>
+                <a:ea typeface="+mn-ea"/>
+                <a:cs typeface="+mn-cs"/>
+              </a:defRPr>
+            </a:lvl6pPr>
+            <a:lvl7pPr marL="2971800" indent="-228600" algn="l" defTabSz="914400" rtl="0" eaLnBrk="1" latinLnBrk="0" hangingPunct="1">
+              <a:lnSpc>
+                <a:spcPct val="90000"/>
+              </a:lnSpc>
+              <a:spcBef>
+                <a:spcPts val="500"/>
+              </a:spcBef>
+              <a:buFont typeface="Arial" panose="020B0604020202020204" pitchFamily="34" charset="0"/>
+              <a:buChar char="•"/>
+              <a:defRPr sz="1800" kern="1200">
+                <a:solidFill>
+                  <a:schemeClr val="tx1"/>
+                </a:solidFill>
+                <a:latin typeface="+mn-lt"/>
+                <a:ea typeface="+mn-ea"/>
+                <a:cs typeface="+mn-cs"/>
+              </a:defRPr>
+            </a:lvl7pPr>
+            <a:lvl8pPr marL="3429000" indent="-228600" algn="l" defTabSz="914400" rtl="0" eaLnBrk="1" latinLnBrk="0" hangingPunct="1">
+              <a:lnSpc>
+                <a:spcPct val="90000"/>
+              </a:lnSpc>
+              <a:spcBef>
+                <a:spcPts val="500"/>
+              </a:spcBef>
+              <a:buFont typeface="Arial" panose="020B0604020202020204" pitchFamily="34" charset="0"/>
+              <a:buChar char="•"/>
+              <a:defRPr sz="1800" kern="1200">
+                <a:solidFill>
+                  <a:schemeClr val="tx1"/>
+                </a:solidFill>
+                <a:latin typeface="+mn-lt"/>
+                <a:ea typeface="+mn-ea"/>
+                <a:cs typeface="+mn-cs"/>
+              </a:defRPr>
+            </a:lvl8pPr>
+            <a:lvl9pPr marL="3886200" indent="-228600" algn="l" defTabSz="914400" rtl="0" eaLnBrk="1" latinLnBrk="0" hangingPunct="1">
+              <a:lnSpc>
+                <a:spcPct val="90000"/>
+              </a:lnSpc>
+              <a:spcBef>
+                <a:spcPts val="500"/>
+              </a:spcBef>
+              <a:buFont typeface="Arial" panose="020B0604020202020204" pitchFamily="34" charset="0"/>
+              <a:buChar char="•"/>
+              <a:defRPr sz="1800" kern="1200">
+                <a:solidFill>
+                  <a:schemeClr val="tx1"/>
+                </a:solidFill>
+                <a:latin typeface="+mn-lt"/>
+                <a:ea typeface="+mn-ea"/>
+                <a:cs typeface="+mn-cs"/>
+              </a:defRPr>
+            </a:lvl9pPr>
+          </a:lstStyle>
+          <a:p>
+            <a:pPr marL="0" indent="0">
+              <a:buNone/>
+            </a:pPr>
+            <a:r>
+              <a:rPr lang="en-US" b="1" dirty="0"/>
+              <a:t>Target 4</a:t>
+            </a:r>
+          </a:p>
+          <a:p>
+            <a:pPr marL="0" indent="0">
+              <a:buNone/>
+            </a:pPr>
+            <a:r>
+              <a:rPr lang="en-US" dirty="0"/>
+              <a:t>Halt species extinction, protect genetic diversity, and manage human–wildlife conflicts.</a:t>
+            </a:r>
+          </a:p>
+        </p:txBody>
+      </p:sp>
+      <p:sp>
+        <p:nvSpPr>
+          <p:cNvPr id="6" name="Content Placeholder 2">
+            <a:extLst>
+              <a:ext uri="{FF2B5EF4-FFF2-40B4-BE49-F238E27FC236}">
+                <a16:creationId xmlns:a16="http://schemas.microsoft.com/office/drawing/2014/main" id="{6E47A588-E7AD-928E-C360-EC5C9D322EEB}"/>
+              </a:ext>
+            </a:extLst>
+          </p:cNvPr>
+          <p:cNvSpPr txBox="1">
+            <a:spLocks/>
+          </p:cNvSpPr>
+          <p:nvPr/>
+        </p:nvSpPr>
+        <p:spPr>
+          <a:xfrm>
+            <a:off x="6281530" y="4763536"/>
+            <a:ext cx="5257800" cy="1421158"/>
+          </a:xfrm>
+          <a:prstGeom prst="rect">
+            <a:avLst/>
+          </a:prstGeom>
+        </p:spPr>
+        <p:style>
+          <a:lnRef idx="1">
+            <a:schemeClr val="accent2"/>
+          </a:lnRef>
+          <a:fillRef idx="2">
+            <a:schemeClr val="accent2"/>
+          </a:fillRef>
+          <a:effectRef idx="1">
+            <a:schemeClr val="accent2"/>
+          </a:effectRef>
+          <a:fontRef idx="minor">
+            <a:schemeClr val="dk1"/>
+          </a:fontRef>
+        </p:style>
+        <p:txBody>
+          <a:bodyPr vert="horz" lIns="91440" tIns="45720" rIns="91440" bIns="45720" rtlCol="0">
+            <a:normAutofit fontScale="92500" lnSpcReduction="10000"/>
+          </a:bodyPr>
+          <a:lstStyle>
+            <a:lvl1pPr marL="228600" indent="-228600" algn="l" defTabSz="914400" rtl="0" eaLnBrk="1" latinLnBrk="0" hangingPunct="1">
+              <a:lnSpc>
+                <a:spcPct val="90000"/>
+              </a:lnSpc>
+              <a:spcBef>
+                <a:spcPts val="1000"/>
+              </a:spcBef>
+              <a:buFont typeface="Arial" panose="020B0604020202020204" pitchFamily="34" charset="0"/>
+              <a:buChar char="•"/>
+              <a:defRPr sz="2800" kern="1200">
+                <a:solidFill>
+                  <a:schemeClr val="tx1"/>
+                </a:solidFill>
+                <a:latin typeface="+mn-lt"/>
+                <a:ea typeface="+mn-ea"/>
+                <a:cs typeface="+mn-cs"/>
+              </a:defRPr>
+            </a:lvl1pPr>
+            <a:lvl2pPr marL="685800" indent="-228600" algn="l" defTabSz="914400" rtl="0" eaLnBrk="1" latinLnBrk="0" hangingPunct="1">
+              <a:lnSpc>
+                <a:spcPct val="90000"/>
+              </a:lnSpc>
+              <a:spcBef>
+                <a:spcPts val="500"/>
+              </a:spcBef>
+              <a:buFont typeface="Arial" panose="020B0604020202020204" pitchFamily="34" charset="0"/>
+              <a:buChar char="•"/>
+              <a:defRPr sz="2400" kern="1200">
+                <a:solidFill>
+                  <a:schemeClr val="tx1"/>
+                </a:solidFill>
+                <a:latin typeface="+mn-lt"/>
+                <a:ea typeface="+mn-ea"/>
+                <a:cs typeface="+mn-cs"/>
+              </a:defRPr>
+            </a:lvl2pPr>
+            <a:lvl3pPr marL="1143000" indent="-228600" algn="l" defTabSz="914400" rtl="0" eaLnBrk="1" latinLnBrk="0" hangingPunct="1">
+              <a:lnSpc>
+                <a:spcPct val="90000"/>
+              </a:lnSpc>
+              <a:spcBef>
+                <a:spcPts val="500"/>
+              </a:spcBef>
+              <a:buFont typeface="Arial" panose="020B0604020202020204" pitchFamily="34" charset="0"/>
+              <a:buChar char="•"/>
+              <a:defRPr sz="2000" kern="1200">
+                <a:solidFill>
+                  <a:schemeClr val="tx1"/>
+                </a:solidFill>
+                <a:latin typeface="+mn-lt"/>
+                <a:ea typeface="+mn-ea"/>
+                <a:cs typeface="+mn-cs"/>
+              </a:defRPr>
+            </a:lvl3pPr>
+            <a:lvl4pPr marL="1600200" indent="-228600" algn="l" defTabSz="914400" rtl="0" eaLnBrk="1" latinLnBrk="0" hangingPunct="1">
+              <a:lnSpc>
+                <a:spcPct val="90000"/>
+              </a:lnSpc>
+              <a:spcBef>
+                <a:spcPts val="500"/>
+              </a:spcBef>
+              <a:buFont typeface="Arial" panose="020B0604020202020204" pitchFamily="34" charset="0"/>
+              <a:buChar char="•"/>
+              <a:defRPr sz="1800" kern="1200">
+                <a:solidFill>
+                  <a:schemeClr val="tx1"/>
+                </a:solidFill>
+                <a:latin typeface="+mn-lt"/>
+                <a:ea typeface="+mn-ea"/>
+                <a:cs typeface="+mn-cs"/>
+              </a:defRPr>
+            </a:lvl4pPr>
+            <a:lvl5pPr marL="2057400" indent="-228600" algn="l" defTabSz="914400" rtl="0" eaLnBrk="1" latinLnBrk="0" hangingPunct="1">
+              <a:lnSpc>
+                <a:spcPct val="90000"/>
+              </a:lnSpc>
+              <a:spcBef>
+                <a:spcPts val="500"/>
+              </a:spcBef>
+              <a:buFont typeface="Arial" panose="020B0604020202020204" pitchFamily="34" charset="0"/>
+              <a:buChar char="•"/>
+              <a:defRPr sz="1800" kern="1200">
+                <a:solidFill>
+                  <a:schemeClr val="tx1"/>
+                </a:solidFill>
+                <a:latin typeface="+mn-lt"/>
+                <a:ea typeface="+mn-ea"/>
+                <a:cs typeface="+mn-cs"/>
+              </a:defRPr>
+            </a:lvl5pPr>
+            <a:lvl6pPr marL="2514600" indent="-228600" algn="l" defTabSz="914400" rtl="0" eaLnBrk="1" latinLnBrk="0" hangingPunct="1">
+              <a:lnSpc>
+                <a:spcPct val="90000"/>
+              </a:lnSpc>
+              <a:spcBef>
+                <a:spcPts val="500"/>
+              </a:spcBef>
+              <a:buFont typeface="Arial" panose="020B0604020202020204" pitchFamily="34" charset="0"/>
+              <a:buChar char="•"/>
+              <a:defRPr sz="1800" kern="1200">
+                <a:solidFill>
+                  <a:schemeClr val="tx1"/>
+                </a:solidFill>
+                <a:latin typeface="+mn-lt"/>
+                <a:ea typeface="+mn-ea"/>
+                <a:cs typeface="+mn-cs"/>
+              </a:defRPr>
+            </a:lvl6pPr>
+            <a:lvl7pPr marL="2971800" indent="-228600" algn="l" defTabSz="914400" rtl="0" eaLnBrk="1" latinLnBrk="0" hangingPunct="1">
+              <a:lnSpc>
+                <a:spcPct val="90000"/>
+              </a:lnSpc>
+              <a:spcBef>
+                <a:spcPts val="500"/>
+              </a:spcBef>
+              <a:buFont typeface="Arial" panose="020B0604020202020204" pitchFamily="34" charset="0"/>
+              <a:buChar char="•"/>
+              <a:defRPr sz="1800" kern="1200">
+                <a:solidFill>
+                  <a:schemeClr val="tx1"/>
+                </a:solidFill>
+                <a:latin typeface="+mn-lt"/>
+                <a:ea typeface="+mn-ea"/>
+                <a:cs typeface="+mn-cs"/>
+              </a:defRPr>
+            </a:lvl7pPr>
+            <a:lvl8pPr marL="3429000" indent="-228600" algn="l" defTabSz="914400" rtl="0" eaLnBrk="1" latinLnBrk="0" hangingPunct="1">
+              <a:lnSpc>
+                <a:spcPct val="90000"/>
+              </a:lnSpc>
+              <a:spcBef>
+                <a:spcPts val="500"/>
+              </a:spcBef>
+              <a:buFont typeface="Arial" panose="020B0604020202020204" pitchFamily="34" charset="0"/>
+              <a:buChar char="•"/>
+              <a:defRPr sz="1800" kern="1200">
+                <a:solidFill>
+                  <a:schemeClr val="tx1"/>
+                </a:solidFill>
+                <a:latin typeface="+mn-lt"/>
+                <a:ea typeface="+mn-ea"/>
+                <a:cs typeface="+mn-cs"/>
+              </a:defRPr>
+            </a:lvl8pPr>
+            <a:lvl9pPr marL="3886200" indent="-228600" algn="l" defTabSz="914400" rtl="0" eaLnBrk="1" latinLnBrk="0" hangingPunct="1">
+              <a:lnSpc>
+                <a:spcPct val="90000"/>
+              </a:lnSpc>
+              <a:spcBef>
+                <a:spcPts val="500"/>
+              </a:spcBef>
+              <a:buFont typeface="Arial" panose="020B0604020202020204" pitchFamily="34" charset="0"/>
+              <a:buChar char="•"/>
+              <a:defRPr sz="1800" kern="1200">
+                <a:solidFill>
+                  <a:schemeClr val="tx1"/>
+                </a:solidFill>
+                <a:latin typeface="+mn-lt"/>
+                <a:ea typeface="+mn-ea"/>
+                <a:cs typeface="+mn-cs"/>
+              </a:defRPr>
+            </a:lvl9pPr>
+          </a:lstStyle>
+          <a:p>
+            <a:pPr marL="0" indent="0">
+              <a:buNone/>
+            </a:pPr>
+            <a:r>
+              <a:rPr lang="en-US" b="1" dirty="0"/>
+              <a:t>A.4 — Proportion of populations with Ne &gt; 500</a:t>
+            </a:r>
+            <a:br>
+              <a:rPr lang="en-US" dirty="0"/>
+            </a:br>
+            <a:r>
+              <a:rPr lang="en-US" i="1" dirty="0"/>
+              <a:t>Are populations maintaining sufficient effective population sizes?</a:t>
+            </a:r>
+            <a:endParaRPr lang="en-US" dirty="0"/>
+          </a:p>
+        </p:txBody>
+      </p:sp>
+      <p:sp>
+        <p:nvSpPr>
+          <p:cNvPr id="5" name="Content Placeholder 2">
+            <a:extLst>
+              <a:ext uri="{FF2B5EF4-FFF2-40B4-BE49-F238E27FC236}">
+                <a16:creationId xmlns:a16="http://schemas.microsoft.com/office/drawing/2014/main" id="{1A357C04-04BE-C6CD-4940-7A7D772465B7}"/>
+              </a:ext>
+            </a:extLst>
+          </p:cNvPr>
+          <p:cNvSpPr txBox="1">
+            <a:spLocks/>
+          </p:cNvSpPr>
+          <p:nvPr/>
+        </p:nvSpPr>
+        <p:spPr>
+          <a:xfrm>
+            <a:off x="838200" y="4768644"/>
+            <a:ext cx="5257800" cy="1421158"/>
+          </a:xfrm>
+          <a:prstGeom prst="rect">
+            <a:avLst/>
+          </a:prstGeom>
+        </p:spPr>
+        <p:style>
+          <a:lnRef idx="3">
+            <a:schemeClr val="lt1"/>
+          </a:lnRef>
+          <a:fillRef idx="1">
+            <a:schemeClr val="accent6"/>
+          </a:fillRef>
+          <a:effectRef idx="1">
+            <a:schemeClr val="accent6"/>
+          </a:effectRef>
+          <a:fontRef idx="minor">
+            <a:schemeClr val="lt1"/>
+          </a:fontRef>
+        </p:style>
+        <p:txBody>
+          <a:bodyPr vert="horz" lIns="91440" tIns="45720" rIns="91440" bIns="45720" rtlCol="0">
+            <a:normAutofit/>
+          </a:bodyPr>
+          <a:lstStyle>
+            <a:lvl1pPr marL="228600" indent="-228600" algn="l" defTabSz="914400" rtl="0" eaLnBrk="1" latinLnBrk="0" hangingPunct="1">
+              <a:lnSpc>
+                <a:spcPct val="90000"/>
+              </a:lnSpc>
+              <a:spcBef>
+                <a:spcPts val="1000"/>
+              </a:spcBef>
+              <a:buFont typeface="Arial" panose="020B0604020202020204" pitchFamily="34" charset="0"/>
+              <a:buChar char="•"/>
+              <a:defRPr sz="2800" kern="1200">
+                <a:solidFill>
+                  <a:schemeClr val="tx1"/>
+                </a:solidFill>
+                <a:latin typeface="+mn-lt"/>
+                <a:ea typeface="+mn-ea"/>
+                <a:cs typeface="+mn-cs"/>
+              </a:defRPr>
+            </a:lvl1pPr>
+            <a:lvl2pPr marL="685800" indent="-228600" algn="l" defTabSz="914400" rtl="0" eaLnBrk="1" latinLnBrk="0" hangingPunct="1">
+              <a:lnSpc>
+                <a:spcPct val="90000"/>
+              </a:lnSpc>
+              <a:spcBef>
+                <a:spcPts val="500"/>
+              </a:spcBef>
+              <a:buFont typeface="Arial" panose="020B0604020202020204" pitchFamily="34" charset="0"/>
+              <a:buChar char="•"/>
+              <a:defRPr sz="2400" kern="1200">
+                <a:solidFill>
+                  <a:schemeClr val="tx1"/>
+                </a:solidFill>
+                <a:latin typeface="+mn-lt"/>
+                <a:ea typeface="+mn-ea"/>
+                <a:cs typeface="+mn-cs"/>
+              </a:defRPr>
+            </a:lvl2pPr>
+            <a:lvl3pPr marL="1143000" indent="-228600" algn="l" defTabSz="914400" rtl="0" eaLnBrk="1" latinLnBrk="0" hangingPunct="1">
+              <a:lnSpc>
+                <a:spcPct val="90000"/>
+              </a:lnSpc>
+              <a:spcBef>
+                <a:spcPts val="500"/>
+              </a:spcBef>
+              <a:buFont typeface="Arial" panose="020B0604020202020204" pitchFamily="34" charset="0"/>
+              <a:buChar char="•"/>
+              <a:defRPr sz="2000" kern="1200">
+                <a:solidFill>
+                  <a:schemeClr val="tx1"/>
+                </a:solidFill>
+                <a:latin typeface="+mn-lt"/>
+                <a:ea typeface="+mn-ea"/>
+                <a:cs typeface="+mn-cs"/>
+              </a:defRPr>
+            </a:lvl3pPr>
+            <a:lvl4pPr marL="1600200" indent="-228600" algn="l" defTabSz="914400" rtl="0" eaLnBrk="1" latinLnBrk="0" hangingPunct="1">
+              <a:lnSpc>
+                <a:spcPct val="90000"/>
+              </a:lnSpc>
+              <a:spcBef>
+                <a:spcPts val="500"/>
+              </a:spcBef>
+              <a:buFont typeface="Arial" panose="020B0604020202020204" pitchFamily="34" charset="0"/>
+              <a:buChar char="•"/>
+              <a:defRPr sz="1800" kern="1200">
+                <a:solidFill>
+                  <a:schemeClr val="tx1"/>
+                </a:solidFill>
+                <a:latin typeface="+mn-lt"/>
+                <a:ea typeface="+mn-ea"/>
+                <a:cs typeface="+mn-cs"/>
+              </a:defRPr>
+            </a:lvl4pPr>
+            <a:lvl5pPr marL="2057400" indent="-228600" algn="l" defTabSz="914400" rtl="0" eaLnBrk="1" latinLnBrk="0" hangingPunct="1">
+              <a:lnSpc>
+                <a:spcPct val="90000"/>
+              </a:lnSpc>
+              <a:spcBef>
+                <a:spcPts val="500"/>
+              </a:spcBef>
+              <a:buFont typeface="Arial" panose="020B0604020202020204" pitchFamily="34" charset="0"/>
+              <a:buChar char="•"/>
+              <a:defRPr sz="1800" kern="1200">
+                <a:solidFill>
+                  <a:schemeClr val="tx1"/>
+                </a:solidFill>
+                <a:latin typeface="+mn-lt"/>
+                <a:ea typeface="+mn-ea"/>
+                <a:cs typeface="+mn-cs"/>
+              </a:defRPr>
+            </a:lvl5pPr>
+            <a:lvl6pPr marL="2514600" indent="-228600" algn="l" defTabSz="914400" rtl="0" eaLnBrk="1" latinLnBrk="0" hangingPunct="1">
+              <a:lnSpc>
+                <a:spcPct val="90000"/>
+              </a:lnSpc>
+              <a:spcBef>
+                <a:spcPts val="500"/>
+              </a:spcBef>
+              <a:buFont typeface="Arial" panose="020B0604020202020204" pitchFamily="34" charset="0"/>
+              <a:buChar char="•"/>
+              <a:defRPr sz="1800" kern="1200">
+                <a:solidFill>
+                  <a:schemeClr val="tx1"/>
+                </a:solidFill>
+                <a:latin typeface="+mn-lt"/>
+                <a:ea typeface="+mn-ea"/>
+                <a:cs typeface="+mn-cs"/>
+              </a:defRPr>
+            </a:lvl6pPr>
+            <a:lvl7pPr marL="2971800" indent="-228600" algn="l" defTabSz="914400" rtl="0" eaLnBrk="1" latinLnBrk="0" hangingPunct="1">
+              <a:lnSpc>
+                <a:spcPct val="90000"/>
+              </a:lnSpc>
+              <a:spcBef>
+                <a:spcPts val="500"/>
+              </a:spcBef>
+              <a:buFont typeface="Arial" panose="020B0604020202020204" pitchFamily="34" charset="0"/>
+              <a:buChar char="•"/>
+              <a:defRPr sz="1800" kern="1200">
+                <a:solidFill>
+                  <a:schemeClr val="tx1"/>
+                </a:solidFill>
+                <a:latin typeface="+mn-lt"/>
+                <a:ea typeface="+mn-ea"/>
+                <a:cs typeface="+mn-cs"/>
+              </a:defRPr>
+            </a:lvl7pPr>
+            <a:lvl8pPr marL="3429000" indent="-228600" algn="l" defTabSz="914400" rtl="0" eaLnBrk="1" latinLnBrk="0" hangingPunct="1">
+              <a:lnSpc>
+                <a:spcPct val="90000"/>
+              </a:lnSpc>
+              <a:spcBef>
+                <a:spcPts val="500"/>
+              </a:spcBef>
+              <a:buFont typeface="Arial" panose="020B0604020202020204" pitchFamily="34" charset="0"/>
+              <a:buChar char="•"/>
+              <a:defRPr sz="1800" kern="1200">
+                <a:solidFill>
+                  <a:schemeClr val="tx1"/>
+                </a:solidFill>
+                <a:latin typeface="+mn-lt"/>
+                <a:ea typeface="+mn-ea"/>
+                <a:cs typeface="+mn-cs"/>
+              </a:defRPr>
+            </a:lvl8pPr>
+            <a:lvl9pPr marL="3886200" indent="-228600" algn="l" defTabSz="914400" rtl="0" eaLnBrk="1" latinLnBrk="0" hangingPunct="1">
+              <a:lnSpc>
+                <a:spcPct val="90000"/>
+              </a:lnSpc>
+              <a:spcBef>
+                <a:spcPts val="500"/>
+              </a:spcBef>
+              <a:buFont typeface="Arial" panose="020B0604020202020204" pitchFamily="34" charset="0"/>
+              <a:buChar char="•"/>
+              <a:defRPr sz="1800" kern="1200">
+                <a:solidFill>
+                  <a:schemeClr val="tx1"/>
+                </a:solidFill>
+                <a:latin typeface="+mn-lt"/>
+                <a:ea typeface="+mn-ea"/>
+                <a:cs typeface="+mn-cs"/>
+              </a:defRPr>
+            </a:lvl9pPr>
+          </a:lstStyle>
+          <a:p>
+            <a:pPr marL="0" indent="0">
+              <a:buNone/>
+            </a:pPr>
+            <a:r>
+              <a:rPr lang="en-US" b="1" dirty="0"/>
+              <a:t>A.3 — Red List Index</a:t>
+            </a:r>
+            <a:br>
+              <a:rPr lang="en-US" dirty="0"/>
+            </a:br>
+            <a:r>
+              <a:rPr lang="en-US" i="1" dirty="0"/>
+              <a:t>Are extinction risks across species improving or worsening?</a:t>
+            </a:r>
+            <a:endParaRPr lang="en-US" dirty="0"/>
+          </a:p>
+        </p:txBody>
+      </p:sp>
+    </p:spTree>
+    <p:extLst>
+      <p:ext uri="{BB962C8B-B14F-4D97-AF65-F5344CB8AC3E}">
+        <p14:creationId xmlns:p14="http://schemas.microsoft.com/office/powerpoint/2010/main" val="72448459"/>
+      </p:ext>
+    </p:extLst>
+  </p:cSld>
+  <p:clrMapOvr>
+    <a:masterClrMapping/>
+  </p:clrMapOvr>
+  <p:timing>
+    <p:tnLst>
+      <p:par>
+        <p:cTn id="1" dur="indefinite" restart="never" nodeType="tmRoot">
+          <p:childTnLst>
+            <p:seq concurrent="1" nextAc="seek">
+              <p:cTn id="2" dur="indefinite" nodeType="mainSeq">
+                <p:childTnLst>
+                  <p:par>
+                    <p:cTn id="3" fill="hold">
+                      <p:stCondLst>
+                        <p:cond delay="indefinite"/>
+                      </p:stCondLst>
+                      <p:childTnLst>
+                        <p:par>
+                          <p:cTn id="4" fill="hold">
+                            <p:stCondLst>
+                              <p:cond delay="0"/>
+                            </p:stCondLst>
+                            <p:childTnLst>
+                              <p:par>
+                                <p:cTn id="5" presetID="1" presetClass="entr" presetSubtype="0" fill="hold" grpId="0" nodeType="clickEffect">
+                                  <p:stCondLst>
+                                    <p:cond delay="0"/>
+                                  </p:stCondLst>
+                                  <p:childTnLst>
+                                    <p:set>
+                                      <p:cBhvr>
+                                        <p:cTn id="6" dur="1" fill="hold">
+                                          <p:stCondLst>
+                                            <p:cond delay="0"/>
+                                          </p:stCondLst>
+                                        </p:cTn>
+                                        <p:tgtEl>
+                                          <p:spTgt spid="6"/>
+                                        </p:tgtEl>
+                                        <p:attrNameLst>
+                                          <p:attrName>style.visibility</p:attrName>
+                                        </p:attrNameLst>
+                                      </p:cBhvr>
+                                      <p:to>
+                                        <p:strVal val="visible"/>
+                                      </p:to>
+                                    </p:set>
+                                  </p:childTnLst>
+                                </p:cTn>
+                              </p:par>
+                            </p:childTnLst>
+                          </p:cTn>
+                        </p:par>
+                      </p:childTnLst>
+                    </p:cTn>
+                  </p:par>
+                </p:childTnLst>
+              </p:cTn>
+              <p:prevCondLst>
+                <p:cond evt="onPrev" delay="0">
+                  <p:tgtEl>
+                    <p:sldTgt/>
+                  </p:tgtEl>
+                </p:cond>
+              </p:prevCondLst>
+              <p:nextCondLst>
+                <p:cond evt="onNext" delay="0">
+                  <p:tgtEl>
+                    <p:sldTgt/>
+                  </p:tgtEl>
+                </p:cond>
+              </p:nextCondLst>
+            </p:seq>
+          </p:childTnLst>
+        </p:cTn>
+      </p:par>
+    </p:tnLst>
+    <p:bldLst>
+      <p:bldP spid="6" grpId="0" animBg="1"/>
+    </p:bldLst>
+  </p:timing>
+</p:sld>
+</file>
+
+<file path=ppt/slides/slide11.xml><?xml version="1.0" encoding="utf-8"?>
+<p:sld xmlns:a="http://schemas.openxmlformats.org/drawingml/2006/main" xmlns:r="http://schemas.openxmlformats.org/officeDocument/2006/relationships" xmlns:p="http://schemas.openxmlformats.org/presentationml/2006/main">
+  <p:cSld>
+    <p:spTree>
+      <p:nvGrpSpPr>
+        <p:cNvPr id="1" name=""/>
+        <p:cNvGrpSpPr/>
+        <p:nvPr/>
+      </p:nvGrpSpPr>
+      <p:grpSpPr>
+        <a:xfrm>
+          <a:off x="0" y="0"/>
+          <a:ext cx="0" cy="0"/>
+          <a:chOff x="0" y="0"/>
+          <a:chExt cx="0" cy="0"/>
+        </a:xfrm>
+      </p:grpSpPr>
+      <p:sp>
+        <p:nvSpPr>
+          <p:cNvPr id="2" name="Title 1">
+            <a:extLst>
+              <a:ext uri="{FF2B5EF4-FFF2-40B4-BE49-F238E27FC236}">
+                <a16:creationId xmlns:a16="http://schemas.microsoft.com/office/drawing/2014/main" id="{471D9FC5-8A1A-750F-A498-8C0A1D52C818}"/>
+              </a:ext>
+            </a:extLst>
+          </p:cNvPr>
+          <p:cNvSpPr>
+            <a:spLocks noGrp="1"/>
+          </p:cNvSpPr>
+          <p:nvPr>
+            <p:ph type="title"/>
+          </p:nvPr>
+        </p:nvSpPr>
+        <p:spPr/>
+        <p:txBody>
+          <a:bodyPr/>
+          <a:lstStyle/>
+          <a:p>
+            <a:r>
+              <a:rPr lang="en-US" dirty="0"/>
+              <a:t>Genetic Diversity in the Global Biodiversity Framework</a:t>
+            </a:r>
+          </a:p>
+        </p:txBody>
+      </p:sp>
+      <p:sp>
+        <p:nvSpPr>
+          <p:cNvPr id="3" name="Content Placeholder 2">
+            <a:extLst>
+              <a:ext uri="{FF2B5EF4-FFF2-40B4-BE49-F238E27FC236}">
+                <a16:creationId xmlns:a16="http://schemas.microsoft.com/office/drawing/2014/main" id="{A25B25F4-E52F-4EB5-826A-89D5D988372E}"/>
+              </a:ext>
+            </a:extLst>
+          </p:cNvPr>
+          <p:cNvSpPr>
+            <a:spLocks noGrp="1"/>
+          </p:cNvSpPr>
+          <p:nvPr>
+            <p:ph idx="1"/>
+          </p:nvPr>
+        </p:nvSpPr>
+        <p:spPr>
+          <a:xfrm>
+            <a:off x="838200" y="1966201"/>
+            <a:ext cx="4532826" cy="2647840"/>
+          </a:xfrm>
+        </p:spPr>
+        <p:txBody>
+          <a:bodyPr/>
+          <a:lstStyle/>
+          <a:p>
+            <a:pPr marL="0" indent="0">
+              <a:buNone/>
+            </a:pPr>
+            <a:r>
+              <a:rPr lang="en-US" sz="3200" b="1" dirty="0">
+                <a:solidFill>
+                  <a:schemeClr val="accent1"/>
+                </a:solidFill>
+              </a:rPr>
+              <a:t>Goal A</a:t>
+            </a:r>
+            <a:endParaRPr lang="en-US" b="1" dirty="0">
+              <a:solidFill>
+                <a:schemeClr val="accent1"/>
+              </a:solidFill>
+            </a:endParaRPr>
+          </a:p>
+          <a:p>
+            <a:pPr marL="0" indent="0">
+              <a:buNone/>
+            </a:pPr>
+            <a:r>
+              <a:rPr lang="en-US" dirty="0"/>
+              <a:t>The genetic diversity </a:t>
+            </a:r>
+            <a:r>
+              <a:rPr lang="en-US" b="1" dirty="0">
+                <a:solidFill>
+                  <a:schemeClr val="accent1"/>
+                </a:solidFill>
+              </a:rPr>
+              <a:t>within populations</a:t>
+            </a:r>
+            <a:r>
+              <a:rPr lang="en-US" dirty="0"/>
+              <a:t> of </a:t>
+            </a:r>
+            <a:r>
+              <a:rPr lang="en-US" b="1" dirty="0">
+                <a:solidFill>
+                  <a:schemeClr val="accent1"/>
+                </a:solidFill>
+              </a:rPr>
+              <a:t>wild</a:t>
+            </a:r>
+            <a:r>
+              <a:rPr lang="en-US" dirty="0"/>
+              <a:t> and </a:t>
+            </a:r>
+            <a:r>
+              <a:rPr lang="en-US" b="1" dirty="0">
+                <a:solidFill>
+                  <a:schemeClr val="accent1"/>
+                </a:solidFill>
+              </a:rPr>
+              <a:t>domesticated</a:t>
+            </a:r>
+            <a:r>
+              <a:rPr lang="en-US" dirty="0"/>
+              <a:t> species, is maintained, safeguarding their adaptive potential.</a:t>
+            </a:r>
+          </a:p>
+        </p:txBody>
+      </p:sp>
+      <p:sp>
+        <p:nvSpPr>
+          <p:cNvPr id="4" name="Content Placeholder 2">
+            <a:extLst>
+              <a:ext uri="{FF2B5EF4-FFF2-40B4-BE49-F238E27FC236}">
+                <a16:creationId xmlns:a16="http://schemas.microsoft.com/office/drawing/2014/main" id="{7815C719-FF17-0BAE-6CFF-C97C16B69D33}"/>
+              </a:ext>
+            </a:extLst>
+          </p:cNvPr>
+          <p:cNvSpPr txBox="1">
+            <a:spLocks/>
+          </p:cNvSpPr>
+          <p:nvPr/>
+        </p:nvSpPr>
+        <p:spPr>
+          <a:xfrm>
+            <a:off x="6820975" y="1966201"/>
+            <a:ext cx="4532824" cy="3404585"/>
+          </a:xfrm>
+          <a:prstGeom prst="rect">
+            <a:avLst/>
+          </a:prstGeom>
+        </p:spPr>
+        <p:txBody>
+          <a:bodyPr vert="horz" lIns="91440" tIns="45720" rIns="91440" bIns="45720" rtlCol="0">
+            <a:normAutofit/>
+          </a:bodyPr>
+          <a:lstStyle>
+            <a:lvl1pPr marL="228600" indent="-228600" algn="l" defTabSz="914400" rtl="0" eaLnBrk="1" latinLnBrk="0" hangingPunct="1">
+              <a:lnSpc>
+                <a:spcPct val="90000"/>
+              </a:lnSpc>
+              <a:spcBef>
+                <a:spcPts val="1000"/>
+              </a:spcBef>
+              <a:buFont typeface="Arial" panose="020B0604020202020204" pitchFamily="34" charset="0"/>
+              <a:buChar char="•"/>
+              <a:defRPr sz="2800" kern="1200">
+                <a:solidFill>
+                  <a:schemeClr val="tx1"/>
+                </a:solidFill>
+                <a:latin typeface="+mn-lt"/>
+                <a:ea typeface="+mn-ea"/>
+                <a:cs typeface="+mn-cs"/>
+              </a:defRPr>
+            </a:lvl1pPr>
+            <a:lvl2pPr marL="685800" indent="-228600" algn="l" defTabSz="914400" rtl="0" eaLnBrk="1" latinLnBrk="0" hangingPunct="1">
+              <a:lnSpc>
+                <a:spcPct val="90000"/>
+              </a:lnSpc>
+              <a:spcBef>
+                <a:spcPts val="500"/>
+              </a:spcBef>
+              <a:buFont typeface="Arial" panose="020B0604020202020204" pitchFamily="34" charset="0"/>
+              <a:buChar char="•"/>
+              <a:defRPr sz="2400" kern="1200">
+                <a:solidFill>
+                  <a:schemeClr val="tx1"/>
+                </a:solidFill>
+                <a:latin typeface="+mn-lt"/>
+                <a:ea typeface="+mn-ea"/>
+                <a:cs typeface="+mn-cs"/>
+              </a:defRPr>
+            </a:lvl2pPr>
+            <a:lvl3pPr marL="1143000" indent="-228600" algn="l" defTabSz="914400" rtl="0" eaLnBrk="1" latinLnBrk="0" hangingPunct="1">
+              <a:lnSpc>
+                <a:spcPct val="90000"/>
+              </a:lnSpc>
+              <a:spcBef>
+                <a:spcPts val="500"/>
+              </a:spcBef>
+              <a:buFont typeface="Arial" panose="020B0604020202020204" pitchFamily="34" charset="0"/>
+              <a:buChar char="•"/>
+              <a:defRPr sz="2000" kern="1200">
+                <a:solidFill>
+                  <a:schemeClr val="tx1"/>
+                </a:solidFill>
+                <a:latin typeface="+mn-lt"/>
+                <a:ea typeface="+mn-ea"/>
+                <a:cs typeface="+mn-cs"/>
+              </a:defRPr>
+            </a:lvl3pPr>
+            <a:lvl4pPr marL="1600200" indent="-228600" algn="l" defTabSz="914400" rtl="0" eaLnBrk="1" latinLnBrk="0" hangingPunct="1">
+              <a:lnSpc>
+                <a:spcPct val="90000"/>
+              </a:lnSpc>
+              <a:spcBef>
+                <a:spcPts val="500"/>
+              </a:spcBef>
+              <a:buFont typeface="Arial" panose="020B0604020202020204" pitchFamily="34" charset="0"/>
+              <a:buChar char="•"/>
+              <a:defRPr sz="1800" kern="1200">
+                <a:solidFill>
+                  <a:schemeClr val="tx1"/>
+                </a:solidFill>
+                <a:latin typeface="+mn-lt"/>
+                <a:ea typeface="+mn-ea"/>
+                <a:cs typeface="+mn-cs"/>
+              </a:defRPr>
+            </a:lvl4pPr>
+            <a:lvl5pPr marL="2057400" indent="-228600" algn="l" defTabSz="914400" rtl="0" eaLnBrk="1" latinLnBrk="0" hangingPunct="1">
+              <a:lnSpc>
+                <a:spcPct val="90000"/>
+              </a:lnSpc>
+              <a:spcBef>
+                <a:spcPts val="500"/>
+              </a:spcBef>
+              <a:buFont typeface="Arial" panose="020B0604020202020204" pitchFamily="34" charset="0"/>
+              <a:buChar char="•"/>
+              <a:defRPr sz="1800" kern="1200">
+                <a:solidFill>
+                  <a:schemeClr val="tx1"/>
+                </a:solidFill>
+                <a:latin typeface="+mn-lt"/>
+                <a:ea typeface="+mn-ea"/>
+                <a:cs typeface="+mn-cs"/>
+              </a:defRPr>
+            </a:lvl5pPr>
+            <a:lvl6pPr marL="2514600" indent="-228600" algn="l" defTabSz="914400" rtl="0" eaLnBrk="1" latinLnBrk="0" hangingPunct="1">
+              <a:lnSpc>
+                <a:spcPct val="90000"/>
+              </a:lnSpc>
+              <a:spcBef>
+                <a:spcPts val="500"/>
+              </a:spcBef>
+              <a:buFont typeface="Arial" panose="020B0604020202020204" pitchFamily="34" charset="0"/>
+              <a:buChar char="•"/>
+              <a:defRPr sz="1800" kern="1200">
+                <a:solidFill>
+                  <a:schemeClr val="tx1"/>
+                </a:solidFill>
+                <a:latin typeface="+mn-lt"/>
+                <a:ea typeface="+mn-ea"/>
+                <a:cs typeface="+mn-cs"/>
+              </a:defRPr>
+            </a:lvl6pPr>
+            <a:lvl7pPr marL="2971800" indent="-228600" algn="l" defTabSz="914400" rtl="0" eaLnBrk="1" latinLnBrk="0" hangingPunct="1">
+              <a:lnSpc>
+                <a:spcPct val="90000"/>
+              </a:lnSpc>
+              <a:spcBef>
+                <a:spcPts val="500"/>
+              </a:spcBef>
+              <a:buFont typeface="Arial" panose="020B0604020202020204" pitchFamily="34" charset="0"/>
+              <a:buChar char="•"/>
+              <a:defRPr sz="1800" kern="1200">
+                <a:solidFill>
+                  <a:schemeClr val="tx1"/>
+                </a:solidFill>
+                <a:latin typeface="+mn-lt"/>
+                <a:ea typeface="+mn-ea"/>
+                <a:cs typeface="+mn-cs"/>
+              </a:defRPr>
+            </a:lvl7pPr>
+            <a:lvl8pPr marL="3429000" indent="-228600" algn="l" defTabSz="914400" rtl="0" eaLnBrk="1" latinLnBrk="0" hangingPunct="1">
+              <a:lnSpc>
+                <a:spcPct val="90000"/>
+              </a:lnSpc>
+              <a:spcBef>
+                <a:spcPts val="500"/>
+              </a:spcBef>
+              <a:buFont typeface="Arial" panose="020B0604020202020204" pitchFamily="34" charset="0"/>
+              <a:buChar char="•"/>
+              <a:defRPr sz="1800" kern="1200">
+                <a:solidFill>
+                  <a:schemeClr val="tx1"/>
+                </a:solidFill>
+                <a:latin typeface="+mn-lt"/>
+                <a:ea typeface="+mn-ea"/>
+                <a:cs typeface="+mn-cs"/>
+              </a:defRPr>
+            </a:lvl8pPr>
+            <a:lvl9pPr marL="3886200" indent="-228600" algn="l" defTabSz="914400" rtl="0" eaLnBrk="1" latinLnBrk="0" hangingPunct="1">
+              <a:lnSpc>
+                <a:spcPct val="90000"/>
+              </a:lnSpc>
+              <a:spcBef>
+                <a:spcPts val="500"/>
+              </a:spcBef>
+              <a:buFont typeface="Arial" panose="020B0604020202020204" pitchFamily="34" charset="0"/>
+              <a:buChar char="•"/>
+              <a:defRPr sz="1800" kern="1200">
+                <a:solidFill>
+                  <a:schemeClr val="tx1"/>
+                </a:solidFill>
+                <a:latin typeface="+mn-lt"/>
+                <a:ea typeface="+mn-ea"/>
+                <a:cs typeface="+mn-cs"/>
+              </a:defRPr>
+            </a:lvl9pPr>
+          </a:lstStyle>
+          <a:p>
+            <a:pPr marL="0" indent="0">
+              <a:buFont typeface="Arial" panose="020B0604020202020204" pitchFamily="34" charset="0"/>
+              <a:buNone/>
+            </a:pPr>
+            <a:r>
+              <a:rPr lang="en-US" sz="3200" b="1" dirty="0">
+                <a:solidFill>
+                  <a:schemeClr val="accent3"/>
+                </a:solidFill>
+              </a:rPr>
+              <a:t>Target 4</a:t>
+            </a:r>
+          </a:p>
+          <a:p>
+            <a:pPr marL="0" indent="0">
+              <a:buFont typeface="Arial" panose="020B0604020202020204" pitchFamily="34" charset="0"/>
+              <a:buNone/>
+            </a:pPr>
+            <a:r>
+              <a:rPr lang="en-US" dirty="0"/>
+              <a:t>…maintain and restore the genetic diversity </a:t>
+            </a:r>
+            <a:r>
+              <a:rPr lang="en-US" b="1" u="sng" dirty="0">
+                <a:solidFill>
+                  <a:schemeClr val="accent3"/>
+                </a:solidFill>
+              </a:rPr>
+              <a:t>within</a:t>
+            </a:r>
+            <a:r>
+              <a:rPr lang="en-US" b="1" dirty="0">
+                <a:solidFill>
+                  <a:schemeClr val="accent3"/>
+                </a:solidFill>
+              </a:rPr>
+              <a:t> and </a:t>
+            </a:r>
+            <a:r>
+              <a:rPr lang="en-US" b="1" u="sng" dirty="0">
+                <a:solidFill>
+                  <a:schemeClr val="accent3"/>
+                </a:solidFill>
+              </a:rPr>
+              <a:t>between</a:t>
+            </a:r>
+            <a:r>
+              <a:rPr lang="en-US" b="1" dirty="0">
+                <a:solidFill>
+                  <a:schemeClr val="accent3"/>
+                </a:solidFill>
+              </a:rPr>
+              <a:t> populations</a:t>
+            </a:r>
+            <a:r>
+              <a:rPr lang="en-US" dirty="0"/>
+              <a:t> of native, </a:t>
+            </a:r>
+            <a:r>
+              <a:rPr lang="en-US" b="1" dirty="0">
+                <a:solidFill>
+                  <a:schemeClr val="accent3"/>
+                </a:solidFill>
+              </a:rPr>
+              <a:t>wild</a:t>
+            </a:r>
+            <a:r>
+              <a:rPr lang="en-US" dirty="0"/>
+              <a:t> and </a:t>
+            </a:r>
+            <a:r>
+              <a:rPr lang="en-US" b="1" dirty="0">
+                <a:solidFill>
+                  <a:schemeClr val="accent3"/>
+                </a:solidFill>
+              </a:rPr>
+              <a:t>domesticated</a:t>
+            </a:r>
+            <a:r>
+              <a:rPr lang="en-US" dirty="0"/>
+              <a:t> species to maintain their adaptive potential.</a:t>
+            </a:r>
+          </a:p>
+        </p:txBody>
+      </p:sp>
+      <p:pic>
+        <p:nvPicPr>
+          <p:cNvPr id="3074" name="Picture 2" descr="e-Learning Catalogue: The Kunming Montreal Global Biodiversity Framework –  Learning for Nature">
+            <a:extLst>
+              <a:ext uri="{FF2B5EF4-FFF2-40B4-BE49-F238E27FC236}">
+                <a16:creationId xmlns:a16="http://schemas.microsoft.com/office/drawing/2014/main" id="{2B34FC35-7A6B-1781-D582-2630EA0272EA}"/>
+              </a:ext>
+            </a:extLst>
+          </p:cNvPr>
+          <p:cNvPicPr>
+            <a:picLocks noChangeAspect="1" noChangeArrowheads="1"/>
+          </p:cNvPicPr>
+          <p:nvPr/>
+        </p:nvPicPr>
+        <p:blipFill>
+          <a:blip r:embed="rId2">
+            <a:extLst>
+              <a:ext uri="{28A0092B-C50C-407E-A947-70E740481C1C}">
+                <a14:useLocalDpi xmlns:a14="http://schemas.microsoft.com/office/drawing/2010/main" val="0"/>
+              </a:ext>
+            </a:extLst>
+          </a:blip>
+          <a:srcRect/>
+          <a:stretch>
+            <a:fillRect/>
+          </a:stretch>
+        </p:blipFill>
+        <p:spPr bwMode="auto">
+          <a:xfrm>
+            <a:off x="2727434" y="5233793"/>
+            <a:ext cx="6737132" cy="1512735"/>
+          </a:xfrm>
+          <a:prstGeom prst="rect">
+            <a:avLst/>
+          </a:prstGeom>
+          <a:noFill/>
+          <a:extLst>
+            <a:ext uri="{909E8E84-426E-40DD-AFC4-6F175D3DCCD1}">
+              <a14:hiddenFill xmlns:a14="http://schemas.microsoft.com/office/drawing/2010/main">
+                <a:solidFill>
+                  <a:srgbClr val="FFFFFF"/>
+                </a:solidFill>
+              </a14:hiddenFill>
+            </a:ext>
+          </a:extLst>
+        </p:spPr>
+      </p:pic>
+    </p:spTree>
+    <p:extLst>
+      <p:ext uri="{BB962C8B-B14F-4D97-AF65-F5344CB8AC3E}">
+        <p14:creationId xmlns:p14="http://schemas.microsoft.com/office/powerpoint/2010/main" val="3416923847"/>
+      </p:ext>
+    </p:extLst>
+  </p:cSld>
+  <p:clrMapOvr>
+    <a:masterClrMapping/>
+  </p:clrMapOvr>
+  <p:timing>
+    <p:tnLst>
+      <p:par>
+        <p:cTn id="1" dur="indefinite" restart="never" nodeType="tmRoot">
+          <p:childTnLst>
+            <p:seq concurrent="1" nextAc="seek">
+              <p:cTn id="2" dur="indefinite" nodeType="mainSeq">
+                <p:childTnLst>
+                  <p:par>
+                    <p:cTn id="3" fill="hold">
+                      <p:stCondLst>
+                        <p:cond delay="indefinite"/>
+                      </p:stCondLst>
+                      <p:childTnLst>
+                        <p:par>
+                          <p:cTn id="4" fill="hold">
+                            <p:stCondLst>
+                              <p:cond delay="0"/>
+                            </p:stCondLst>
+                            <p:childTnLst>
+                              <p:par>
+                                <p:cTn id="5" presetID="1" presetClass="entr" presetSubtype="0" fill="hold" nodeType="clickEffect">
+                                  <p:stCondLst>
+                                    <p:cond delay="0"/>
+                                  </p:stCondLst>
+                                  <p:childTnLst>
+                                    <p:set>
+                                      <p:cBhvr>
+                                        <p:cTn id="6" dur="1" fill="hold">
+                                          <p:stCondLst>
+                                            <p:cond delay="0"/>
+                                          </p:stCondLst>
+                                        </p:cTn>
+                                        <p:tgtEl>
+                                          <p:spTgt spid="3">
+                                            <p:txEl>
+                                              <p:pRg st="0" end="0"/>
+                                            </p:txEl>
+                                          </p:spTgt>
+                                        </p:tgtEl>
+                                        <p:attrNameLst>
+                                          <p:attrName>style.visibility</p:attrName>
+                                        </p:attrNameLst>
+                                      </p:cBhvr>
+                                      <p:to>
+                                        <p:strVal val="visible"/>
+                                      </p:to>
+                                    </p:set>
+                                  </p:childTnLst>
+                                </p:cTn>
+                              </p:par>
+                              <p:par>
+                                <p:cTn id="7" presetID="1" presetClass="entr" presetSubtype="0" fill="hold" nodeType="withEffect">
+                                  <p:stCondLst>
+                                    <p:cond delay="0"/>
+                                  </p:stCondLst>
+                                  <p:childTnLst>
+                                    <p:set>
+                                      <p:cBhvr>
+                                        <p:cTn id="8" dur="1" fill="hold">
+                                          <p:stCondLst>
+                                            <p:cond delay="0"/>
+                                          </p:stCondLst>
+                                        </p:cTn>
+                                        <p:tgtEl>
+                                          <p:spTgt spid="3">
+                                            <p:txEl>
+                                              <p:pRg st="1" end="1"/>
+                                            </p:txEl>
+                                          </p:spTgt>
+                                        </p:tgtEl>
+                                        <p:attrNameLst>
+                                          <p:attrName>style.visibility</p:attrName>
+                                        </p:attrNameLst>
+                                      </p:cBhvr>
+                                      <p:to>
+                                        <p:strVal val="visible"/>
+                                      </p:to>
+                                    </p:set>
+                                  </p:childTnLst>
+                                </p:cTn>
+                              </p:par>
+                            </p:childTnLst>
+                          </p:cTn>
+                        </p:par>
+                      </p:childTnLst>
+                    </p:cTn>
+                  </p:par>
+                  <p:par>
+                    <p:cTn id="9" fill="hold">
+                      <p:stCondLst>
+                        <p:cond delay="indefinite"/>
+                      </p:stCondLst>
+                      <p:childTnLst>
+                        <p:par>
+                          <p:cTn id="10" fill="hold">
+                            <p:stCondLst>
+                              <p:cond delay="0"/>
+                            </p:stCondLst>
+                            <p:childTnLst>
+                              <p:par>
+                                <p:cTn id="11" presetID="1" presetClass="entr" presetSubtype="0" fill="hold" nodeType="clickEffect">
+                                  <p:stCondLst>
+                                    <p:cond delay="0"/>
+                                  </p:stCondLst>
+                                  <p:childTnLst>
+                                    <p:set>
+                                      <p:cBhvr>
+                                        <p:cTn id="12" dur="1" fill="hold">
+                                          <p:stCondLst>
+                                            <p:cond delay="0"/>
+                                          </p:stCondLst>
+                                        </p:cTn>
+                                        <p:tgtEl>
+                                          <p:spTgt spid="4">
+                                            <p:txEl>
+                                              <p:pRg st="0" end="0"/>
+                                            </p:txEl>
+                                          </p:spTgt>
+                                        </p:tgtEl>
+                                        <p:attrNameLst>
+                                          <p:attrName>style.visibility</p:attrName>
+                                        </p:attrNameLst>
+                                      </p:cBhvr>
+                                      <p:to>
+                                        <p:strVal val="visible"/>
+                                      </p:to>
+                                    </p:set>
+                                  </p:childTnLst>
+                                </p:cTn>
+                              </p:par>
+                              <p:par>
+                                <p:cTn id="13" presetID="1" presetClass="entr" presetSubtype="0" fill="hold" nodeType="withEffect">
+                                  <p:stCondLst>
+                                    <p:cond delay="0"/>
+                                  </p:stCondLst>
+                                  <p:childTnLst>
+                                    <p:set>
+                                      <p:cBhvr>
+                                        <p:cTn id="14" dur="1" fill="hold">
+                                          <p:stCondLst>
+                                            <p:cond delay="0"/>
+                                          </p:stCondLst>
+                                        </p:cTn>
+                                        <p:tgtEl>
+                                          <p:spTgt spid="4">
+                                            <p:txEl>
+                                              <p:pRg st="1" end="1"/>
+                                            </p:txEl>
+                                          </p:spTgt>
+                                        </p:tgtEl>
+                                        <p:attrNameLst>
+                                          <p:attrName>style.visibility</p:attrName>
+                                        </p:attrNameLst>
+                                      </p:cBhvr>
+                                      <p:to>
+                                        <p:strVal val="visible"/>
+                                      </p:to>
+                                    </p:set>
+                                  </p:childTnLst>
+                                </p:cTn>
+                              </p:par>
+                            </p:childTnLst>
+                          </p:cTn>
+                        </p:par>
+                      </p:childTnLst>
+                    </p:cTn>
+                  </p:par>
+                </p:childTnLst>
+              </p:cTn>
+              <p:prevCondLst>
+                <p:cond evt="onPrev" delay="0">
+                  <p:tgtEl>
+                    <p:sldTgt/>
+                  </p:tgtEl>
+                </p:cond>
+              </p:prevCondLst>
+              <p:nextCondLst>
+                <p:cond evt="onNext" delay="0">
+                  <p:tgtEl>
+                    <p:sldTgt/>
+                  </p:tgtEl>
+                </p:cond>
+              </p:nextCondLst>
+            </p:seq>
+          </p:childTnLst>
+        </p:cTn>
+      </p:par>
+    </p:tnLst>
+  </p:timing>
+</p:sld>
+</file>
+
+<file path=ppt/slides/slide12.xml><?xml version="1.0" encoding="utf-8"?>
+<p:sld xmlns:a="http://schemas.openxmlformats.org/drawingml/2006/main" xmlns:r="http://schemas.openxmlformats.org/officeDocument/2006/relationships" xmlns:p="http://schemas.openxmlformats.org/presentationml/2006/main">
+  <p:cSld>
+    <p:spTree>
+      <p:nvGrpSpPr>
+        <p:cNvPr id="1" name=""/>
+        <p:cNvGrpSpPr/>
+        <p:nvPr/>
+      </p:nvGrpSpPr>
+      <p:grpSpPr>
+        <a:xfrm>
+          <a:off x="0" y="0"/>
+          <a:ext cx="0" cy="0"/>
+          <a:chOff x="0" y="0"/>
+          <a:chExt cx="0" cy="0"/>
+        </a:xfrm>
+      </p:grpSpPr>
+      <p:sp>
+        <p:nvSpPr>
+          <p:cNvPr id="2" name="Title 1">
+            <a:extLst>
+              <a:ext uri="{FF2B5EF4-FFF2-40B4-BE49-F238E27FC236}">
+                <a16:creationId xmlns:a16="http://schemas.microsoft.com/office/drawing/2014/main" id="{11765070-BE24-6A5C-78A2-340768EC7276}"/>
+              </a:ext>
+            </a:extLst>
+          </p:cNvPr>
+          <p:cNvSpPr>
+            <a:spLocks noGrp="1"/>
+          </p:cNvSpPr>
+          <p:nvPr>
+            <p:ph type="title"/>
+          </p:nvPr>
+        </p:nvSpPr>
+        <p:spPr/>
+        <p:txBody>
+          <a:bodyPr/>
+          <a:lstStyle/>
+          <a:p>
+            <a:r>
+              <a:rPr lang="en-US" dirty="0"/>
+              <a:t>What are the genetic indicators?</a:t>
+            </a:r>
+          </a:p>
+        </p:txBody>
+      </p:sp>
+      <p:pic>
+        <p:nvPicPr>
+          <p:cNvPr id="1026" name="Picture 2" descr="Overview | Genetic Diversity Indicators">
+            <a:extLst>
+              <a:ext uri="{FF2B5EF4-FFF2-40B4-BE49-F238E27FC236}">
+                <a16:creationId xmlns:a16="http://schemas.microsoft.com/office/drawing/2014/main" id="{7740B4BF-9D55-6B7E-449F-7E828CDE92C6}"/>
+              </a:ext>
+            </a:extLst>
+          </p:cNvPr>
+          <p:cNvPicPr>
+            <a:picLocks noChangeAspect="1" noChangeArrowheads="1"/>
+          </p:cNvPicPr>
+          <p:nvPr/>
+        </p:nvPicPr>
+        <p:blipFill>
+          <a:blip r:embed="rId2">
+            <a:extLst>
+              <a:ext uri="{28A0092B-C50C-407E-A947-70E740481C1C}">
+                <a14:useLocalDpi xmlns:a14="http://schemas.microsoft.com/office/drawing/2010/main" val="0"/>
+              </a:ext>
+            </a:extLst>
+          </a:blip>
+          <a:srcRect/>
+          <a:stretch>
+            <a:fillRect/>
+          </a:stretch>
+        </p:blipFill>
+        <p:spPr bwMode="auto">
+          <a:xfrm>
+            <a:off x="2034208" y="1621198"/>
+            <a:ext cx="8123583" cy="4555765"/>
+          </a:xfrm>
+          <a:prstGeom prst="rect">
+            <a:avLst/>
+          </a:prstGeom>
+          <a:noFill/>
+          <a:extLst>
+            <a:ext uri="{909E8E84-426E-40DD-AFC4-6F175D3DCCD1}">
+              <a14:hiddenFill xmlns:a14="http://schemas.microsoft.com/office/drawing/2010/main">
+                <a:solidFill>
+                  <a:srgbClr val="FFFFFF"/>
+                </a:solidFill>
+              </a14:hiddenFill>
+            </a:ext>
+          </a:extLst>
+        </p:spPr>
+      </p:pic>
+    </p:spTree>
+    <p:extLst>
+      <p:ext uri="{BB962C8B-B14F-4D97-AF65-F5344CB8AC3E}">
+        <p14:creationId xmlns:p14="http://schemas.microsoft.com/office/powerpoint/2010/main" val="2205518052"/>
+      </p:ext>
+    </p:extLst>
+  </p:cSld>
+  <p:clrMapOvr>
+    <a:masterClrMapping/>
+  </p:clrMapOvr>
+</p:sld>
+</file>
+
+<file path=ppt/slides/slide13.xml><?xml version="1.0" encoding="utf-8"?>
+<p:sld xmlns:a="http://schemas.openxmlformats.org/drawingml/2006/main" xmlns:r="http://schemas.openxmlformats.org/officeDocument/2006/relationships" xmlns:p="http://schemas.openxmlformats.org/presentationml/2006/main">
+  <p:cSld>
+    <p:spTree>
+      <p:nvGrpSpPr>
+        <p:cNvPr id="1" name=""/>
+        <p:cNvGrpSpPr/>
+        <p:nvPr/>
+      </p:nvGrpSpPr>
+      <p:grpSpPr>
+        <a:xfrm>
+          <a:off x="0" y="0"/>
+          <a:ext cx="0" cy="0"/>
+          <a:chOff x="0" y="0"/>
+          <a:chExt cx="0" cy="0"/>
+        </a:xfrm>
+      </p:grpSpPr>
+      <p:sp>
+        <p:nvSpPr>
+          <p:cNvPr id="2" name="Title 1">
+            <a:extLst>
+              <a:ext uri="{FF2B5EF4-FFF2-40B4-BE49-F238E27FC236}">
+                <a16:creationId xmlns:a16="http://schemas.microsoft.com/office/drawing/2014/main" id="{E20E6B44-6778-ACCF-611D-FD00097B69AA}"/>
+              </a:ext>
+            </a:extLst>
+          </p:cNvPr>
+          <p:cNvSpPr>
+            <a:spLocks noGrp="1"/>
+          </p:cNvSpPr>
+          <p:nvPr>
+            <p:ph type="title"/>
+          </p:nvPr>
+        </p:nvSpPr>
+        <p:spPr/>
+        <p:txBody>
+          <a:bodyPr/>
+          <a:lstStyle/>
+          <a:p>
+            <a:r>
+              <a:rPr lang="en-US" dirty="0"/>
+              <a:t>How we’ve used the indicators</a:t>
+            </a:r>
+          </a:p>
+        </p:txBody>
+      </p:sp>
+      <p:pic>
+        <p:nvPicPr>
+          <p:cNvPr id="5" name="Content Placeholder 4" descr="A green and white rectangular sign&#10;&#10;Description automatically generated">
+            <a:extLst>
+              <a:ext uri="{FF2B5EF4-FFF2-40B4-BE49-F238E27FC236}">
+                <a16:creationId xmlns:a16="http://schemas.microsoft.com/office/drawing/2014/main" id="{8A2CF217-4943-632F-1F29-2FDA1BEDCAEE}"/>
+              </a:ext>
+            </a:extLst>
+          </p:cNvPr>
+          <p:cNvPicPr>
+            <a:picLocks noGrp="1" noChangeAspect="1"/>
+          </p:cNvPicPr>
+          <p:nvPr>
+            <p:ph idx="1"/>
+          </p:nvPr>
+        </p:nvPicPr>
+        <p:blipFill rotWithShape="1">
+          <a:blip r:embed="rId2"/>
+          <a:srcRect r="1950" b="55864"/>
+          <a:stretch/>
+        </p:blipFill>
+        <p:spPr>
+          <a:xfrm>
+            <a:off x="1651000" y="1690688"/>
+            <a:ext cx="8716662" cy="1126653"/>
+          </a:xfrm>
+        </p:spPr>
+      </p:pic>
+      <p:pic>
+        <p:nvPicPr>
+          <p:cNvPr id="7" name="Picture 6" descr="A green and white rectangular sign&#10;&#10;Description automatically generated">
+            <a:extLst>
+              <a:ext uri="{FF2B5EF4-FFF2-40B4-BE49-F238E27FC236}">
+                <a16:creationId xmlns:a16="http://schemas.microsoft.com/office/drawing/2014/main" id="{4735AEA7-7AED-3D1C-4DEF-9611AB3A3DC9}"/>
+              </a:ext>
+            </a:extLst>
+          </p:cNvPr>
+          <p:cNvPicPr>
+            <a:picLocks noChangeAspect="1"/>
+          </p:cNvPicPr>
+          <p:nvPr/>
+        </p:nvPicPr>
+        <p:blipFill rotWithShape="1">
+          <a:blip r:embed="rId2"/>
+          <a:srcRect t="64110"/>
+          <a:stretch/>
+        </p:blipFill>
+        <p:spPr>
+          <a:xfrm>
+            <a:off x="1824338" y="2817341"/>
+            <a:ext cx="8320560" cy="877330"/>
+          </a:xfrm>
+          <a:prstGeom prst="rect">
+            <a:avLst/>
+          </a:prstGeom>
+        </p:spPr>
+      </p:pic>
+      <p:pic>
+        <p:nvPicPr>
+          <p:cNvPr id="8" name="Picture 7">
+            <a:extLst>
+              <a:ext uri="{FF2B5EF4-FFF2-40B4-BE49-F238E27FC236}">
+                <a16:creationId xmlns:a16="http://schemas.microsoft.com/office/drawing/2014/main" id="{C3CAB4EF-7A63-98B4-CFC3-07F0D1768930}"/>
+              </a:ext>
+            </a:extLst>
+          </p:cNvPr>
+          <p:cNvPicPr>
+            <a:picLocks noChangeAspect="1"/>
+          </p:cNvPicPr>
+          <p:nvPr/>
+        </p:nvPicPr>
+        <p:blipFill>
+          <a:blip r:embed="rId3"/>
+          <a:stretch>
+            <a:fillRect/>
+          </a:stretch>
+        </p:blipFill>
+        <p:spPr>
+          <a:xfrm>
+            <a:off x="2808228" y="3796595"/>
+            <a:ext cx="1803399" cy="1133664"/>
+          </a:xfrm>
+          <a:prstGeom prst="rect">
+            <a:avLst/>
+          </a:prstGeom>
+        </p:spPr>
+      </p:pic>
+      <p:pic>
+        <p:nvPicPr>
+          <p:cNvPr id="9" name="Picture 8">
+            <a:extLst>
+              <a:ext uri="{FF2B5EF4-FFF2-40B4-BE49-F238E27FC236}">
+                <a16:creationId xmlns:a16="http://schemas.microsoft.com/office/drawing/2014/main" id="{993B4310-0087-5274-ECEF-1FE9C56EECBF}"/>
+              </a:ext>
+            </a:extLst>
+          </p:cNvPr>
+          <p:cNvPicPr>
+            <a:picLocks noChangeAspect="1"/>
+          </p:cNvPicPr>
+          <p:nvPr/>
+        </p:nvPicPr>
+        <p:blipFill>
+          <a:blip r:embed="rId4"/>
+          <a:stretch>
+            <a:fillRect/>
+          </a:stretch>
+        </p:blipFill>
+        <p:spPr>
+          <a:xfrm>
+            <a:off x="5776976" y="3796595"/>
+            <a:ext cx="1803399" cy="1117600"/>
+          </a:xfrm>
+          <a:prstGeom prst="rect">
+            <a:avLst/>
+          </a:prstGeom>
+        </p:spPr>
+      </p:pic>
+      <p:pic>
+        <p:nvPicPr>
+          <p:cNvPr id="10" name="Picture 9">
+            <a:extLst>
+              <a:ext uri="{FF2B5EF4-FFF2-40B4-BE49-F238E27FC236}">
+                <a16:creationId xmlns:a16="http://schemas.microsoft.com/office/drawing/2014/main" id="{7DB603FD-E4AC-AB47-F534-B366E2DF4BD0}"/>
+              </a:ext>
+            </a:extLst>
+          </p:cNvPr>
+          <p:cNvPicPr>
+            <a:picLocks noChangeAspect="1"/>
+          </p:cNvPicPr>
+          <p:nvPr/>
+        </p:nvPicPr>
+        <p:blipFill>
+          <a:blip r:embed="rId5"/>
+          <a:stretch>
+            <a:fillRect/>
+          </a:stretch>
+        </p:blipFill>
+        <p:spPr>
+          <a:xfrm>
+            <a:off x="10132444" y="5214714"/>
+            <a:ext cx="1801003" cy="1117600"/>
+          </a:xfrm>
+          <a:prstGeom prst="rect">
+            <a:avLst/>
+          </a:prstGeom>
+        </p:spPr>
+      </p:pic>
+      <p:pic>
+        <p:nvPicPr>
+          <p:cNvPr id="12" name="Picture 11">
+            <a:extLst>
+              <a:ext uri="{FF2B5EF4-FFF2-40B4-BE49-F238E27FC236}">
+                <a16:creationId xmlns:a16="http://schemas.microsoft.com/office/drawing/2014/main" id="{A2D3A2BA-ACA3-7B3A-B99C-1872BC45775C}"/>
+              </a:ext>
+            </a:extLst>
+          </p:cNvPr>
+          <p:cNvPicPr>
+            <a:picLocks noChangeAspect="1"/>
+          </p:cNvPicPr>
+          <p:nvPr/>
+        </p:nvPicPr>
+        <p:blipFill>
+          <a:blip r:embed="rId6"/>
+          <a:stretch>
+            <a:fillRect/>
+          </a:stretch>
+        </p:blipFill>
+        <p:spPr>
+          <a:xfrm>
+            <a:off x="8762976" y="3837698"/>
+            <a:ext cx="1803399" cy="1117598"/>
+          </a:xfrm>
+          <a:prstGeom prst="rect">
+            <a:avLst/>
+          </a:prstGeom>
+        </p:spPr>
+      </p:pic>
+      <p:pic>
+        <p:nvPicPr>
+          <p:cNvPr id="13" name="Picture 12">
+            <a:extLst>
+              <a:ext uri="{FF2B5EF4-FFF2-40B4-BE49-F238E27FC236}">
+                <a16:creationId xmlns:a16="http://schemas.microsoft.com/office/drawing/2014/main" id="{068C7C1B-1478-E95F-F690-9762A93B5E8D}"/>
+              </a:ext>
+            </a:extLst>
+          </p:cNvPr>
+          <p:cNvPicPr>
+            <a:picLocks noChangeAspect="1"/>
+          </p:cNvPicPr>
+          <p:nvPr/>
+        </p:nvPicPr>
+        <p:blipFill>
+          <a:blip r:embed="rId7"/>
+          <a:stretch>
+            <a:fillRect/>
+          </a:stretch>
+        </p:blipFill>
+        <p:spPr>
+          <a:xfrm>
+            <a:off x="7212522" y="5237253"/>
+            <a:ext cx="1803400" cy="1117599"/>
+          </a:xfrm>
+          <a:prstGeom prst="rect">
+            <a:avLst/>
+          </a:prstGeom>
+        </p:spPr>
+      </p:pic>
+      <p:pic>
+        <p:nvPicPr>
+          <p:cNvPr id="14" name="Picture 13">
+            <a:extLst>
+              <a:ext uri="{FF2B5EF4-FFF2-40B4-BE49-F238E27FC236}">
+                <a16:creationId xmlns:a16="http://schemas.microsoft.com/office/drawing/2014/main" id="{5099AF5F-9C2C-A782-2250-110D2EBA1CAA}"/>
+              </a:ext>
+            </a:extLst>
+          </p:cNvPr>
+          <p:cNvPicPr>
+            <a:picLocks noChangeAspect="1"/>
+          </p:cNvPicPr>
+          <p:nvPr/>
+        </p:nvPicPr>
+        <p:blipFill>
+          <a:blip r:embed="rId8"/>
+          <a:stretch>
+            <a:fillRect/>
+          </a:stretch>
+        </p:blipFill>
+        <p:spPr>
+          <a:xfrm>
+            <a:off x="1004828" y="5237252"/>
+            <a:ext cx="1803400" cy="1117600"/>
+          </a:xfrm>
+          <a:prstGeom prst="rect">
+            <a:avLst/>
+          </a:prstGeom>
+        </p:spPr>
+      </p:pic>
+      <p:pic>
+        <p:nvPicPr>
+          <p:cNvPr id="15" name="Picture 14">
+            <a:extLst>
+              <a:ext uri="{FF2B5EF4-FFF2-40B4-BE49-F238E27FC236}">
+                <a16:creationId xmlns:a16="http://schemas.microsoft.com/office/drawing/2014/main" id="{AA973AB6-5C6C-D52C-57F3-22F00061639C}"/>
+              </a:ext>
+            </a:extLst>
+          </p:cNvPr>
+          <p:cNvPicPr>
+            <a:picLocks noChangeAspect="1"/>
+          </p:cNvPicPr>
+          <p:nvPr/>
+        </p:nvPicPr>
+        <p:blipFill>
+          <a:blip r:embed="rId9"/>
+          <a:stretch>
+            <a:fillRect/>
+          </a:stretch>
+        </p:blipFill>
+        <p:spPr>
+          <a:xfrm>
+            <a:off x="4292600" y="5237252"/>
+            <a:ext cx="1803400" cy="1117600"/>
+          </a:xfrm>
+          <a:prstGeom prst="rect">
+            <a:avLst/>
+          </a:prstGeom>
+        </p:spPr>
+      </p:pic>
+      <p:pic>
+        <p:nvPicPr>
+          <p:cNvPr id="16" name="Picture 15">
+            <a:extLst>
+              <a:ext uri="{FF2B5EF4-FFF2-40B4-BE49-F238E27FC236}">
+                <a16:creationId xmlns:a16="http://schemas.microsoft.com/office/drawing/2014/main" id="{53B10DDE-B072-193E-CD39-E38DB748974C}"/>
+              </a:ext>
+            </a:extLst>
+          </p:cNvPr>
+          <p:cNvPicPr>
+            <a:picLocks noChangeAspect="1"/>
+          </p:cNvPicPr>
+          <p:nvPr/>
+        </p:nvPicPr>
+        <p:blipFill>
+          <a:blip r:embed="rId10"/>
+          <a:stretch>
+            <a:fillRect/>
+          </a:stretch>
+        </p:blipFill>
+        <p:spPr>
+          <a:xfrm>
+            <a:off x="251634" y="3796595"/>
+            <a:ext cx="1803400" cy="1126653"/>
+          </a:xfrm>
+          <a:prstGeom prst="rect">
+            <a:avLst/>
+          </a:prstGeom>
+        </p:spPr>
+      </p:pic>
+    </p:spTree>
+    <p:extLst>
+      <p:ext uri="{BB962C8B-B14F-4D97-AF65-F5344CB8AC3E}">
+        <p14:creationId xmlns:p14="http://schemas.microsoft.com/office/powerpoint/2010/main" val="3011552291"/>
+      </p:ext>
+    </p:extLst>
+  </p:cSld>
+  <p:clrMapOvr>
+    <a:masterClrMapping/>
+  </p:clrMapOvr>
+</p:sld>
+</file>
+
+<file path=ppt/slides/slide14.xml><?xml version="1.0" encoding="utf-8"?>
+<p:sld xmlns:a="http://schemas.openxmlformats.org/drawingml/2006/main" xmlns:r="http://schemas.openxmlformats.org/officeDocument/2006/relationships" xmlns:p="http://schemas.openxmlformats.org/presentationml/2006/main">
+  <p:cSld>
+    <p:spTree>
+      <p:nvGrpSpPr>
+        <p:cNvPr id="1" name=""/>
+        <p:cNvGrpSpPr/>
+        <p:nvPr/>
+      </p:nvGrpSpPr>
+      <p:grpSpPr>
+        <a:xfrm>
+          <a:off x="0" y="0"/>
+          <a:ext cx="0" cy="0"/>
+          <a:chOff x="0" y="0"/>
+          <a:chExt cx="0" cy="0"/>
+        </a:xfrm>
+      </p:grpSpPr>
+      <p:sp>
+        <p:nvSpPr>
+          <p:cNvPr id="2" name="Title 1">
+            <a:extLst>
+              <a:ext uri="{FF2B5EF4-FFF2-40B4-BE49-F238E27FC236}">
+                <a16:creationId xmlns:a16="http://schemas.microsoft.com/office/drawing/2014/main" id="{E20E6B44-6778-ACCF-611D-FD00097B69AA}"/>
+              </a:ext>
+            </a:extLst>
+          </p:cNvPr>
+          <p:cNvSpPr>
+            <a:spLocks noGrp="1"/>
+          </p:cNvSpPr>
+          <p:nvPr>
+            <p:ph type="title"/>
+          </p:nvPr>
+        </p:nvSpPr>
+        <p:spPr/>
+        <p:txBody>
+          <a:bodyPr/>
+          <a:lstStyle/>
+          <a:p>
+            <a:r>
+              <a:rPr lang="en-US" dirty="0"/>
+              <a:t>How we’ve used the indicators</a:t>
+            </a:r>
+          </a:p>
+        </p:txBody>
+      </p:sp>
+      <p:pic>
+        <p:nvPicPr>
+          <p:cNvPr id="16" name="Picture 15">
+            <a:extLst>
+              <a:ext uri="{FF2B5EF4-FFF2-40B4-BE49-F238E27FC236}">
+                <a16:creationId xmlns:a16="http://schemas.microsoft.com/office/drawing/2014/main" id="{53B10DDE-B072-193E-CD39-E38DB748974C}"/>
+              </a:ext>
+            </a:extLst>
+          </p:cNvPr>
+          <p:cNvPicPr>
+            <a:picLocks noChangeAspect="1"/>
+          </p:cNvPicPr>
+          <p:nvPr/>
+        </p:nvPicPr>
+        <p:blipFill>
+          <a:blip r:embed="rId2"/>
+          <a:stretch>
+            <a:fillRect/>
+          </a:stretch>
+        </p:blipFill>
+        <p:spPr>
+          <a:xfrm>
+            <a:off x="277514" y="1690688"/>
+            <a:ext cx="1803400" cy="1126653"/>
+          </a:xfrm>
+          <a:prstGeom prst="rect">
+            <a:avLst/>
+          </a:prstGeom>
+        </p:spPr>
+      </p:pic>
+      <p:pic>
+        <p:nvPicPr>
+          <p:cNvPr id="4" name="Picture 3" descr="A diagram of different types of species&#10;&#10;AI-generated content may be incorrect.">
+            <a:extLst>
+              <a:ext uri="{FF2B5EF4-FFF2-40B4-BE49-F238E27FC236}">
+                <a16:creationId xmlns:a16="http://schemas.microsoft.com/office/drawing/2014/main" id="{8465FE57-8DF5-F883-13A3-74B2B7F5D43C}"/>
+              </a:ext>
+            </a:extLst>
+          </p:cNvPr>
+          <p:cNvPicPr>
+            <a:picLocks noChangeAspect="1"/>
+          </p:cNvPicPr>
+          <p:nvPr/>
+        </p:nvPicPr>
+        <p:blipFill>
+          <a:blip r:embed="rId3"/>
+          <a:stretch>
+            <a:fillRect/>
+          </a:stretch>
+        </p:blipFill>
+        <p:spPr>
+          <a:xfrm>
+            <a:off x="2209800" y="1215762"/>
+            <a:ext cx="7772400" cy="5277113"/>
+          </a:xfrm>
+          <a:prstGeom prst="rect">
+            <a:avLst/>
+          </a:prstGeom>
+        </p:spPr>
+      </p:pic>
+    </p:spTree>
+    <p:extLst>
+      <p:ext uri="{BB962C8B-B14F-4D97-AF65-F5344CB8AC3E}">
+        <p14:creationId xmlns:p14="http://schemas.microsoft.com/office/powerpoint/2010/main" val="4080570312"/>
+      </p:ext>
+    </p:extLst>
+  </p:cSld>
+  <p:clrMapOvr>
+    <a:masterClrMapping/>
+  </p:clrMapOvr>
+  <mc:AlternateContent xmlns:mc="http://schemas.openxmlformats.org/markup-compatibility/2006" xmlns:p159="http://schemas.microsoft.com/office/powerpoint/2015/09/main">
+    <mc:Choice Requires="p159">
+      <p:transition xmlns:p14="http://schemas.microsoft.com/office/powerpoint/2010/main" spd="slow" p14:dur="2000">
+        <p159:morph option="byObject"/>
+      </p:transition>
+    </mc:Choice>
+    <mc:Fallback xmlns="">
+      <p:transition spd="slow">
+        <p:fade/>
+      </p:transition>
+    </mc:Fallback>
+  </mc:AlternateContent>
+</p:sld>
+</file>
+
+<file path=ppt/slides/slide15.xml><?xml version="1.0" encoding="utf-8"?>
+<p:sld xmlns:a="http://schemas.openxmlformats.org/drawingml/2006/main" xmlns:r="http://schemas.openxmlformats.org/officeDocument/2006/relationships" xmlns:p="http://schemas.openxmlformats.org/presentationml/2006/main">
+  <p:cSld>
+    <p:spTree>
+      <p:nvGrpSpPr>
+        <p:cNvPr id="1" name=""/>
+        <p:cNvGrpSpPr/>
+        <p:nvPr/>
+      </p:nvGrpSpPr>
+      <p:grpSpPr>
+        <a:xfrm>
+          <a:off x="0" y="0"/>
+          <a:ext cx="0" cy="0"/>
+          <a:chOff x="0" y="0"/>
+          <a:chExt cx="0" cy="0"/>
+        </a:xfrm>
+      </p:grpSpPr>
+      <p:sp>
+        <p:nvSpPr>
+          <p:cNvPr id="2" name="Title 1">
+            <a:extLst>
+              <a:ext uri="{FF2B5EF4-FFF2-40B4-BE49-F238E27FC236}">
+                <a16:creationId xmlns:a16="http://schemas.microsoft.com/office/drawing/2014/main" id="{E20E6B44-6778-ACCF-611D-FD00097B69AA}"/>
+              </a:ext>
+            </a:extLst>
+          </p:cNvPr>
+          <p:cNvSpPr>
+            <a:spLocks noGrp="1"/>
+          </p:cNvSpPr>
+          <p:nvPr>
+            <p:ph type="title"/>
+          </p:nvPr>
+        </p:nvSpPr>
+        <p:spPr/>
+        <p:txBody>
+          <a:bodyPr/>
+          <a:lstStyle/>
+          <a:p>
+            <a:r>
+              <a:rPr lang="en-US" dirty="0"/>
+              <a:t>How we’ve used the indicators</a:t>
+            </a:r>
+          </a:p>
+        </p:txBody>
+      </p:sp>
+      <p:pic>
+        <p:nvPicPr>
+          <p:cNvPr id="16" name="Picture 15">
+            <a:extLst>
+              <a:ext uri="{FF2B5EF4-FFF2-40B4-BE49-F238E27FC236}">
+                <a16:creationId xmlns:a16="http://schemas.microsoft.com/office/drawing/2014/main" id="{53B10DDE-B072-193E-CD39-E38DB748974C}"/>
+              </a:ext>
+            </a:extLst>
+          </p:cNvPr>
+          <p:cNvPicPr>
+            <a:picLocks noChangeAspect="1"/>
+          </p:cNvPicPr>
+          <p:nvPr/>
+        </p:nvPicPr>
+        <p:blipFill>
+          <a:blip r:embed="rId2"/>
+          <a:stretch>
+            <a:fillRect/>
+          </a:stretch>
+        </p:blipFill>
+        <p:spPr>
+          <a:xfrm>
+            <a:off x="277514" y="1690688"/>
+            <a:ext cx="1803400" cy="1126653"/>
+          </a:xfrm>
+          <a:prstGeom prst="rect">
+            <a:avLst/>
+          </a:prstGeom>
+        </p:spPr>
+      </p:pic>
+      <p:pic>
+        <p:nvPicPr>
+          <p:cNvPr id="5" name="Picture 4" descr="A screenshot of a diagram&#10;&#10;AI-generated content may be incorrect.">
+            <a:extLst>
+              <a:ext uri="{FF2B5EF4-FFF2-40B4-BE49-F238E27FC236}">
+                <a16:creationId xmlns:a16="http://schemas.microsoft.com/office/drawing/2014/main" id="{08C248D2-B12F-3F64-0082-2CFFAA8FB756}"/>
+              </a:ext>
+            </a:extLst>
+          </p:cNvPr>
+          <p:cNvPicPr>
+            <a:picLocks noChangeAspect="1"/>
+          </p:cNvPicPr>
+          <p:nvPr/>
+        </p:nvPicPr>
+        <p:blipFill>
+          <a:blip r:embed="rId3"/>
+          <a:stretch>
+            <a:fillRect/>
+          </a:stretch>
+        </p:blipFill>
+        <p:spPr>
+          <a:xfrm>
+            <a:off x="3321228" y="1380901"/>
+            <a:ext cx="5549543" cy="5364558"/>
+          </a:xfrm>
+          <a:prstGeom prst="rect">
+            <a:avLst/>
+          </a:prstGeom>
+        </p:spPr>
+      </p:pic>
+    </p:spTree>
+    <p:extLst>
+      <p:ext uri="{BB962C8B-B14F-4D97-AF65-F5344CB8AC3E}">
+        <p14:creationId xmlns:p14="http://schemas.microsoft.com/office/powerpoint/2010/main" val="2941003497"/>
+      </p:ext>
+    </p:extLst>
+  </p:cSld>
+  <p:clrMapOvr>
+    <a:masterClrMapping/>
+  </p:clrMapOvr>
+  <mc:AlternateContent xmlns:mc="http://schemas.openxmlformats.org/markup-compatibility/2006" xmlns:p159="http://schemas.microsoft.com/office/powerpoint/2015/09/main">
+    <mc:Choice Requires="p159">
+      <p:transition xmlns:p14="http://schemas.microsoft.com/office/powerpoint/2010/main" spd="slow" p14:dur="2000">
+        <p159:morph option="byObject"/>
+      </p:transition>
+    </mc:Choice>
+    <mc:Fallback xmlns="">
+      <p:transition spd="slow">
+        <p:fade/>
+      </p:transition>
+    </mc:Fallback>
+  </mc:AlternateContent>
+</p:sld>
+</file>
+
 <file path=ppt/slides/slide2.xml><?xml version="1.0" encoding="utf-8"?>
+<p:sld xmlns:a="http://schemas.openxmlformats.org/drawingml/2006/main" xmlns:r="http://schemas.openxmlformats.org/officeDocument/2006/relationships" xmlns:p="http://schemas.openxmlformats.org/presentationml/2006/main">
+  <p:cSld>
+    <p:spTree>
+      <p:nvGrpSpPr>
+        <p:cNvPr id="1" name=""/>
+        <p:cNvGrpSpPr/>
+        <p:nvPr/>
+      </p:nvGrpSpPr>
+      <p:grpSpPr>
+        <a:xfrm>
+          <a:off x="0" y="0"/>
+          <a:ext cx="0" cy="0"/>
+          <a:chOff x="0" y="0"/>
+          <a:chExt cx="0" cy="0"/>
+        </a:xfrm>
+      </p:grpSpPr>
+      <p:sp>
+        <p:nvSpPr>
+          <p:cNvPr id="2" name="Title 1">
+            <a:extLst>
+              <a:ext uri="{FF2B5EF4-FFF2-40B4-BE49-F238E27FC236}">
+                <a16:creationId xmlns:a16="http://schemas.microsoft.com/office/drawing/2014/main" id="{E936D5E1-1388-D964-7350-20AC58B4E97B}"/>
+              </a:ext>
+            </a:extLst>
+          </p:cNvPr>
+          <p:cNvSpPr>
+            <a:spLocks noGrp="1"/>
+          </p:cNvSpPr>
+          <p:nvPr>
+            <p:ph type="title"/>
+          </p:nvPr>
+        </p:nvSpPr>
+        <p:spPr/>
+        <p:txBody>
+          <a:bodyPr/>
+          <a:lstStyle/>
+          <a:p>
+            <a:r>
+              <a:rPr lang="en-US" dirty="0"/>
+              <a:t>Global Biodiversity Framework</a:t>
+            </a:r>
+          </a:p>
+        </p:txBody>
+      </p:sp>
+      <p:pic>
+        <p:nvPicPr>
+          <p:cNvPr id="5122" name="Picture 2" descr="Cheat sheet to the Kunming-Montréal Global Biodiversity Framework | Centre  for Sustainable Area Management (CeSAM) | UiB">
+            <a:extLst>
+              <a:ext uri="{FF2B5EF4-FFF2-40B4-BE49-F238E27FC236}">
+                <a16:creationId xmlns:a16="http://schemas.microsoft.com/office/drawing/2014/main" id="{EFC6FBDC-C025-0197-1688-BA6A1C655CFE}"/>
+              </a:ext>
+            </a:extLst>
+          </p:cNvPr>
+          <p:cNvPicPr>
+            <a:picLocks noChangeAspect="1" noChangeArrowheads="1"/>
+          </p:cNvPicPr>
+          <p:nvPr/>
+        </p:nvPicPr>
+        <p:blipFill>
+          <a:blip r:embed="rId2">
+            <a:extLst>
+              <a:ext uri="{28A0092B-C50C-407E-A947-70E740481C1C}">
+                <a14:useLocalDpi xmlns:a14="http://schemas.microsoft.com/office/drawing/2010/main" val="0"/>
+              </a:ext>
+            </a:extLst>
+          </a:blip>
+          <a:srcRect/>
+          <a:stretch>
+            <a:fillRect/>
+          </a:stretch>
+        </p:blipFill>
+        <p:spPr bwMode="auto">
+          <a:xfrm>
+            <a:off x="0" y="0"/>
+            <a:ext cx="12192000" cy="6858000"/>
+          </a:xfrm>
+          <a:prstGeom prst="rect">
+            <a:avLst/>
+          </a:prstGeom>
+          <a:noFill/>
+          <a:extLst>
+            <a:ext uri="{909E8E84-426E-40DD-AFC4-6F175D3DCCD1}">
+              <a14:hiddenFill xmlns:a14="http://schemas.microsoft.com/office/drawing/2010/main">
+                <a:solidFill>
+                  <a:srgbClr val="FFFFFF"/>
+                </a:solidFill>
+              </a14:hiddenFill>
+            </a:ext>
+          </a:extLst>
+        </p:spPr>
+      </p:pic>
+    </p:spTree>
+    <p:extLst>
+      <p:ext uri="{BB962C8B-B14F-4D97-AF65-F5344CB8AC3E}">
+        <p14:creationId xmlns:p14="http://schemas.microsoft.com/office/powerpoint/2010/main" val="618016608"/>
+      </p:ext>
+    </p:extLst>
+  </p:cSld>
+  <p:clrMapOvr>
+    <a:masterClrMapping/>
+  </p:clrMapOvr>
+</p:sld>
+</file>
+
+<file path=ppt/slides/slide3.xml><?xml version="1.0" encoding="utf-8"?>
+<p:sld xmlns:a="http://schemas.openxmlformats.org/drawingml/2006/main" xmlns:r="http://schemas.openxmlformats.org/officeDocument/2006/relationships" xmlns:p="http://schemas.openxmlformats.org/presentationml/2006/main">
+  <p:cSld>
+    <p:spTree>
+      <p:nvGrpSpPr>
+        <p:cNvPr id="1" name=""/>
+        <p:cNvGrpSpPr/>
+        <p:nvPr/>
+      </p:nvGrpSpPr>
+      <p:grpSpPr>
+        <a:xfrm>
+          <a:off x="0" y="0"/>
+          <a:ext cx="0" cy="0"/>
+          <a:chOff x="0" y="0"/>
+          <a:chExt cx="0" cy="0"/>
+        </a:xfrm>
+      </p:grpSpPr>
+      <p:sp>
+        <p:nvSpPr>
+          <p:cNvPr id="2" name="Title 1">
+            <a:extLst>
+              <a:ext uri="{FF2B5EF4-FFF2-40B4-BE49-F238E27FC236}">
+                <a16:creationId xmlns:a16="http://schemas.microsoft.com/office/drawing/2014/main" id="{29296119-A7C4-99A7-A152-8D6A852E5A23}"/>
+              </a:ext>
+            </a:extLst>
+          </p:cNvPr>
+          <p:cNvSpPr>
+            <a:spLocks noGrp="1"/>
+          </p:cNvSpPr>
+          <p:nvPr>
+            <p:ph type="title"/>
+          </p:nvPr>
+        </p:nvSpPr>
+        <p:spPr/>
+        <p:txBody>
+          <a:bodyPr/>
+          <a:lstStyle/>
+          <a:p>
+            <a:r>
+              <a:rPr lang="en-US" dirty="0"/>
+              <a:t>Global Biodiversity Framework</a:t>
+            </a:r>
+          </a:p>
+        </p:txBody>
+      </p:sp>
+      <p:sp>
+        <p:nvSpPr>
+          <p:cNvPr id="3" name="Content Placeholder 2">
+            <a:extLst>
+              <a:ext uri="{FF2B5EF4-FFF2-40B4-BE49-F238E27FC236}">
+                <a16:creationId xmlns:a16="http://schemas.microsoft.com/office/drawing/2014/main" id="{19ECED6E-AD0F-183C-8713-5228DA99E921}"/>
+              </a:ext>
+            </a:extLst>
+          </p:cNvPr>
+          <p:cNvSpPr>
+            <a:spLocks noGrp="1"/>
+          </p:cNvSpPr>
+          <p:nvPr>
+            <p:ph idx="1"/>
+          </p:nvPr>
+        </p:nvSpPr>
+        <p:spPr>
+          <a:xfrm>
+            <a:off x="5817704" y="2675544"/>
+            <a:ext cx="5536096" cy="2259605"/>
+          </a:xfrm>
+        </p:spPr>
+        <p:txBody>
+          <a:bodyPr/>
+          <a:lstStyle/>
+          <a:p>
+            <a:pPr marL="0" indent="0">
+              <a:buNone/>
+            </a:pPr>
+            <a:r>
+              <a:rPr lang="en-US" dirty="0"/>
+              <a:t>The GBF needs measurable indicators to determine whether countries and the international community are actually making progress toward these goals.</a:t>
+            </a:r>
+          </a:p>
+        </p:txBody>
+      </p:sp>
+      <p:sp>
+        <p:nvSpPr>
+          <p:cNvPr id="4" name="Rectangle 3">
+            <a:extLst>
+              <a:ext uri="{FF2B5EF4-FFF2-40B4-BE49-F238E27FC236}">
+                <a16:creationId xmlns:a16="http://schemas.microsoft.com/office/drawing/2014/main" id="{C4D5E6A6-E12B-4AAB-68AD-507B05FA6AC0}"/>
+              </a:ext>
+            </a:extLst>
+          </p:cNvPr>
+          <p:cNvSpPr/>
+          <p:nvPr/>
+        </p:nvSpPr>
+        <p:spPr>
+          <a:xfrm>
+            <a:off x="1262273" y="2655196"/>
+            <a:ext cx="3482009" cy="559766"/>
+          </a:xfrm>
+          <a:prstGeom prst="rect">
+            <a:avLst/>
+          </a:prstGeom>
+        </p:spPr>
+        <p:style>
+          <a:lnRef idx="2">
+            <a:schemeClr val="accent5">
+              <a:shade val="15000"/>
+            </a:schemeClr>
+          </a:lnRef>
+          <a:fillRef idx="1">
+            <a:schemeClr val="accent5"/>
+          </a:fillRef>
+          <a:effectRef idx="0">
+            <a:schemeClr val="accent5"/>
+          </a:effectRef>
+          <a:fontRef idx="minor">
+            <a:schemeClr val="lt1"/>
+          </a:fontRef>
+        </p:style>
+        <p:txBody>
+          <a:bodyPr rtlCol="0" anchor="ctr"/>
+          <a:lstStyle/>
+          <a:p>
+            <a:pPr algn="ctr"/>
+            <a:r>
+              <a:rPr lang="en-US" dirty="0"/>
+              <a:t>4 Goals for 2025</a:t>
+            </a:r>
+          </a:p>
+        </p:txBody>
+      </p:sp>
+      <p:sp>
+        <p:nvSpPr>
+          <p:cNvPr id="5" name="Rectangle 4">
+            <a:extLst>
+              <a:ext uri="{FF2B5EF4-FFF2-40B4-BE49-F238E27FC236}">
+                <a16:creationId xmlns:a16="http://schemas.microsoft.com/office/drawing/2014/main" id="{DBF6A0F0-5481-336C-E849-0345305FC5CA}"/>
+              </a:ext>
+            </a:extLst>
+          </p:cNvPr>
+          <p:cNvSpPr/>
+          <p:nvPr/>
+        </p:nvSpPr>
+        <p:spPr>
+          <a:xfrm>
+            <a:off x="1262273" y="3525464"/>
+            <a:ext cx="3482009" cy="559766"/>
+          </a:xfrm>
+          <a:prstGeom prst="rect">
+            <a:avLst/>
+          </a:prstGeom>
+        </p:spPr>
+        <p:style>
+          <a:lnRef idx="2">
+            <a:schemeClr val="accent5">
+              <a:shade val="15000"/>
+            </a:schemeClr>
+          </a:lnRef>
+          <a:fillRef idx="1">
+            <a:schemeClr val="accent5"/>
+          </a:fillRef>
+          <a:effectRef idx="0">
+            <a:schemeClr val="accent5"/>
+          </a:effectRef>
+          <a:fontRef idx="minor">
+            <a:schemeClr val="lt1"/>
+          </a:fontRef>
+        </p:style>
+        <p:txBody>
+          <a:bodyPr rtlCol="0" anchor="ctr"/>
+          <a:lstStyle/>
+          <a:p>
+            <a:pPr algn="ctr"/>
+            <a:r>
+              <a:rPr lang="en-US" dirty="0"/>
+              <a:t>23 Targets for 2030</a:t>
+            </a:r>
+          </a:p>
+        </p:txBody>
+      </p:sp>
+      <p:sp>
+        <p:nvSpPr>
+          <p:cNvPr id="6" name="Rectangle 5">
+            <a:extLst>
+              <a:ext uri="{FF2B5EF4-FFF2-40B4-BE49-F238E27FC236}">
+                <a16:creationId xmlns:a16="http://schemas.microsoft.com/office/drawing/2014/main" id="{5EDA11CE-0E44-F912-F486-FC90FF195966}"/>
+              </a:ext>
+            </a:extLst>
+          </p:cNvPr>
+          <p:cNvSpPr/>
+          <p:nvPr/>
+        </p:nvSpPr>
+        <p:spPr>
+          <a:xfrm>
+            <a:off x="1262272" y="4395732"/>
+            <a:ext cx="3482009" cy="559766"/>
+          </a:xfrm>
+          <a:prstGeom prst="rect">
+            <a:avLst/>
+          </a:prstGeom>
+        </p:spPr>
+        <p:style>
+          <a:lnRef idx="2">
+            <a:schemeClr val="accent5">
+              <a:shade val="15000"/>
+            </a:schemeClr>
+          </a:lnRef>
+          <a:fillRef idx="1">
+            <a:schemeClr val="accent5"/>
+          </a:fillRef>
+          <a:effectRef idx="0">
+            <a:schemeClr val="accent5"/>
+          </a:effectRef>
+          <a:fontRef idx="minor">
+            <a:schemeClr val="lt1"/>
+          </a:fontRef>
+        </p:style>
+        <p:txBody>
+          <a:bodyPr rtlCol="0" anchor="ctr"/>
+          <a:lstStyle/>
+          <a:p>
+            <a:pPr algn="ctr"/>
+            <a:r>
+              <a:rPr lang="en-US" dirty="0"/>
+              <a:t>Headline + component + complementary indicators</a:t>
+            </a:r>
+          </a:p>
+        </p:txBody>
+      </p:sp>
+      <p:cxnSp>
+        <p:nvCxnSpPr>
+          <p:cNvPr id="8" name="Straight Arrow Connector 7">
+            <a:extLst>
+              <a:ext uri="{FF2B5EF4-FFF2-40B4-BE49-F238E27FC236}">
+                <a16:creationId xmlns:a16="http://schemas.microsoft.com/office/drawing/2014/main" id="{7CDAC8E0-3D1B-4915-26A8-7501566BB8D3}"/>
+              </a:ext>
+            </a:extLst>
+          </p:cNvPr>
+          <p:cNvCxnSpPr>
+            <a:stCxn id="4" idx="2"/>
+            <a:endCxn id="5" idx="0"/>
+          </p:cNvCxnSpPr>
+          <p:nvPr/>
+        </p:nvCxnSpPr>
+        <p:spPr>
+          <a:xfrm>
+            <a:off x="3003278" y="3214962"/>
+            <a:ext cx="0" cy="310502"/>
+          </a:xfrm>
+          <a:prstGeom prst="straightConnector1">
+            <a:avLst/>
+          </a:prstGeom>
+          <a:ln w="57150">
+            <a:tailEnd type="triangle"/>
+          </a:ln>
+        </p:spPr>
+        <p:style>
+          <a:lnRef idx="1">
+            <a:schemeClr val="accent1"/>
+          </a:lnRef>
+          <a:fillRef idx="0">
+            <a:schemeClr val="accent1"/>
+          </a:fillRef>
+          <a:effectRef idx="0">
+            <a:schemeClr val="accent1"/>
+          </a:effectRef>
+          <a:fontRef idx="minor">
+            <a:schemeClr val="tx1"/>
+          </a:fontRef>
+        </p:style>
+      </p:cxnSp>
+      <p:cxnSp>
+        <p:nvCxnSpPr>
+          <p:cNvPr id="9" name="Straight Arrow Connector 8">
+            <a:extLst>
+              <a:ext uri="{FF2B5EF4-FFF2-40B4-BE49-F238E27FC236}">
+                <a16:creationId xmlns:a16="http://schemas.microsoft.com/office/drawing/2014/main" id="{A4CDEBC1-6BC4-885B-E60F-C3C0300EB7EF}"/>
+              </a:ext>
+            </a:extLst>
+          </p:cNvPr>
+          <p:cNvCxnSpPr>
+            <a:cxnSpLocks/>
+          </p:cNvCxnSpPr>
+          <p:nvPr/>
+        </p:nvCxnSpPr>
+        <p:spPr>
+          <a:xfrm>
+            <a:off x="3003275" y="4085230"/>
+            <a:ext cx="0" cy="310502"/>
+          </a:xfrm>
+          <a:prstGeom prst="straightConnector1">
+            <a:avLst/>
+          </a:prstGeom>
+          <a:ln w="57150">
+            <a:tailEnd type="triangle"/>
+          </a:ln>
+        </p:spPr>
+        <p:style>
+          <a:lnRef idx="1">
+            <a:schemeClr val="accent1"/>
+          </a:lnRef>
+          <a:fillRef idx="0">
+            <a:schemeClr val="accent1"/>
+          </a:fillRef>
+          <a:effectRef idx="0">
+            <a:schemeClr val="accent1"/>
+          </a:effectRef>
+          <a:fontRef idx="minor">
+            <a:schemeClr val="tx1"/>
+          </a:fontRef>
+        </p:style>
+      </p:cxnSp>
+    </p:spTree>
+    <p:extLst>
+      <p:ext uri="{BB962C8B-B14F-4D97-AF65-F5344CB8AC3E}">
+        <p14:creationId xmlns:p14="http://schemas.microsoft.com/office/powerpoint/2010/main" val="2756595952"/>
+      </p:ext>
+    </p:extLst>
+  </p:cSld>
+  <p:clrMapOvr>
+    <a:masterClrMapping/>
+  </p:clrMapOvr>
+</p:sld>
+</file>
+
+<file path=ppt/slides/slide4.xml><?xml version="1.0" encoding="utf-8"?>
+<p:sld xmlns:a="http://schemas.openxmlformats.org/drawingml/2006/main" xmlns:r="http://schemas.openxmlformats.org/officeDocument/2006/relationships" xmlns:p="http://schemas.openxmlformats.org/presentationml/2006/main">
+  <p:cSld>
+    <p:spTree>
+      <p:nvGrpSpPr>
+        <p:cNvPr id="1" name=""/>
+        <p:cNvGrpSpPr/>
+        <p:nvPr/>
+      </p:nvGrpSpPr>
+      <p:grpSpPr>
+        <a:xfrm>
+          <a:off x="0" y="0"/>
+          <a:ext cx="0" cy="0"/>
+          <a:chOff x="0" y="0"/>
+          <a:chExt cx="0" cy="0"/>
+        </a:xfrm>
+      </p:grpSpPr>
+      <p:sp>
+        <p:nvSpPr>
+          <p:cNvPr id="2" name="Title 1">
+            <a:extLst>
+              <a:ext uri="{FF2B5EF4-FFF2-40B4-BE49-F238E27FC236}">
+                <a16:creationId xmlns:a16="http://schemas.microsoft.com/office/drawing/2014/main" id="{6DA5D331-29FE-0DA2-B647-4F725B2C23DC}"/>
+              </a:ext>
+            </a:extLst>
+          </p:cNvPr>
+          <p:cNvSpPr>
+            <a:spLocks noGrp="1"/>
+          </p:cNvSpPr>
+          <p:nvPr>
+            <p:ph type="title"/>
+          </p:nvPr>
+        </p:nvSpPr>
+        <p:spPr/>
+        <p:txBody>
+          <a:bodyPr/>
+          <a:lstStyle/>
+          <a:p>
+            <a:r>
+              <a:rPr lang="en-US" dirty="0"/>
+              <a:t>How does the IUCN Red List fit into the GBF?</a:t>
+            </a:r>
+          </a:p>
+        </p:txBody>
+      </p:sp>
+      <p:sp>
+        <p:nvSpPr>
+          <p:cNvPr id="3" name="Text Placeholder 2">
+            <a:extLst>
+              <a:ext uri="{FF2B5EF4-FFF2-40B4-BE49-F238E27FC236}">
+                <a16:creationId xmlns:a16="http://schemas.microsoft.com/office/drawing/2014/main" id="{799DB10D-941E-B604-3E71-D1B302FC6FBD}"/>
+              </a:ext>
+            </a:extLst>
+          </p:cNvPr>
+          <p:cNvSpPr>
+            <a:spLocks noGrp="1"/>
+          </p:cNvSpPr>
+          <p:nvPr>
+            <p:ph type="body" idx="1"/>
+          </p:nvPr>
+        </p:nvSpPr>
+        <p:spPr/>
+        <p:txBody>
+          <a:bodyPr/>
+          <a:lstStyle/>
+          <a:p>
+            <a:endParaRPr lang="en-US"/>
+          </a:p>
+        </p:txBody>
+      </p:sp>
+    </p:spTree>
+    <p:extLst>
+      <p:ext uri="{BB962C8B-B14F-4D97-AF65-F5344CB8AC3E}">
+        <p14:creationId xmlns:p14="http://schemas.microsoft.com/office/powerpoint/2010/main" val="945039909"/>
+      </p:ext>
+    </p:extLst>
+  </p:cSld>
+  <p:clrMapOvr>
+    <a:masterClrMapping/>
+  </p:clrMapOvr>
+</p:sld>
+</file>
+
+<file path=ppt/slides/slide5.xml><?xml version="1.0" encoding="utf-8"?>
+<p:sld xmlns:a="http://schemas.openxmlformats.org/drawingml/2006/main" xmlns:r="http://schemas.openxmlformats.org/officeDocument/2006/relationships" xmlns:p="http://schemas.openxmlformats.org/presentationml/2006/main">
+  <p:cSld>
+    <p:spTree>
+      <p:nvGrpSpPr>
+        <p:cNvPr id="1" name=""/>
+        <p:cNvGrpSpPr/>
+        <p:nvPr/>
+      </p:nvGrpSpPr>
+      <p:grpSpPr>
+        <a:xfrm>
+          <a:off x="0" y="0"/>
+          <a:ext cx="0" cy="0"/>
+          <a:chOff x="0" y="0"/>
+          <a:chExt cx="0" cy="0"/>
+        </a:xfrm>
+      </p:grpSpPr>
+      <p:sp>
+        <p:nvSpPr>
+          <p:cNvPr id="2" name="Title 1">
+            <a:extLst>
+              <a:ext uri="{FF2B5EF4-FFF2-40B4-BE49-F238E27FC236}">
+                <a16:creationId xmlns:a16="http://schemas.microsoft.com/office/drawing/2014/main" id="{5B19DED2-2A9D-5D00-1C7B-27CD1D5EF0BD}"/>
+              </a:ext>
+            </a:extLst>
+          </p:cNvPr>
+          <p:cNvSpPr>
+            <a:spLocks noGrp="1"/>
+          </p:cNvSpPr>
+          <p:nvPr>
+            <p:ph type="title"/>
+          </p:nvPr>
+        </p:nvSpPr>
+        <p:spPr/>
+        <p:txBody>
+          <a:bodyPr/>
+          <a:lstStyle/>
+          <a:p>
+            <a:r>
+              <a:rPr lang="en-US" dirty="0"/>
+              <a:t>Where the Red List fits</a:t>
+            </a:r>
+          </a:p>
+        </p:txBody>
+      </p:sp>
+      <p:sp>
+        <p:nvSpPr>
+          <p:cNvPr id="3" name="Content Placeholder 2">
+            <a:extLst>
+              <a:ext uri="{FF2B5EF4-FFF2-40B4-BE49-F238E27FC236}">
+                <a16:creationId xmlns:a16="http://schemas.microsoft.com/office/drawing/2014/main" id="{2D682009-65F0-E849-0BC8-CD0C12929B44}"/>
+              </a:ext>
+            </a:extLst>
+          </p:cNvPr>
+          <p:cNvSpPr>
+            <a:spLocks noGrp="1"/>
+          </p:cNvSpPr>
+          <p:nvPr>
+            <p:ph idx="1"/>
+          </p:nvPr>
+        </p:nvSpPr>
+        <p:spPr>
+          <a:xfrm>
+            <a:off x="838200" y="1573833"/>
+            <a:ext cx="10515600" cy="1421158"/>
+          </a:xfrm>
+        </p:spPr>
+        <p:style>
+          <a:lnRef idx="3">
+            <a:schemeClr val="lt1"/>
+          </a:lnRef>
+          <a:fillRef idx="1">
+            <a:schemeClr val="accent4"/>
+          </a:fillRef>
+          <a:effectRef idx="1">
+            <a:schemeClr val="accent4"/>
+          </a:effectRef>
+          <a:fontRef idx="minor">
+            <a:schemeClr val="lt1"/>
+          </a:fontRef>
+        </p:style>
+        <p:txBody>
+          <a:bodyPr/>
+          <a:lstStyle/>
+          <a:p>
+            <a:pPr marL="0" indent="0">
+              <a:buNone/>
+            </a:pPr>
+            <a:r>
+              <a:rPr lang="en-US" b="1" dirty="0">
+                <a:solidFill>
+                  <a:sysClr val="windowText" lastClr="000000"/>
+                </a:solidFill>
+              </a:rPr>
+              <a:t>Goal A</a:t>
+            </a:r>
+          </a:p>
+          <a:p>
+            <a:pPr marL="0" indent="0">
+              <a:buNone/>
+            </a:pPr>
+            <a:r>
+              <a:rPr lang="en-US" dirty="0">
+                <a:solidFill>
+                  <a:sysClr val="windowText" lastClr="000000"/>
+                </a:solidFill>
+              </a:rPr>
+              <a:t>Maintain ecosystem integrity, reduce extinction risk, increase abundance of native species, and maintain genetic diversity.</a:t>
+            </a:r>
+          </a:p>
+          <a:p>
+            <a:pPr marL="0" indent="0">
+              <a:buNone/>
+            </a:pPr>
+            <a:endParaRPr lang="en-US" dirty="0">
+              <a:solidFill>
+                <a:sysClr val="windowText" lastClr="000000"/>
+              </a:solidFill>
+            </a:endParaRPr>
+          </a:p>
+        </p:txBody>
+      </p:sp>
+      <p:sp>
+        <p:nvSpPr>
+          <p:cNvPr id="4" name="Content Placeholder 2">
+            <a:extLst>
+              <a:ext uri="{FF2B5EF4-FFF2-40B4-BE49-F238E27FC236}">
+                <a16:creationId xmlns:a16="http://schemas.microsoft.com/office/drawing/2014/main" id="{17DF8EEC-22E8-91C4-B909-A72B95C6EBDA}"/>
+              </a:ext>
+            </a:extLst>
+          </p:cNvPr>
+          <p:cNvSpPr txBox="1">
+            <a:spLocks/>
+          </p:cNvSpPr>
+          <p:nvPr/>
+        </p:nvSpPr>
+        <p:spPr>
+          <a:xfrm>
+            <a:off x="838200" y="3152431"/>
+            <a:ext cx="10515600" cy="1421158"/>
+          </a:xfrm>
+          <a:prstGeom prst="rect">
+            <a:avLst/>
+          </a:prstGeom>
+        </p:spPr>
+        <p:style>
+          <a:lnRef idx="3">
+            <a:schemeClr val="lt1"/>
+          </a:lnRef>
+          <a:fillRef idx="1">
+            <a:schemeClr val="accent5"/>
+          </a:fillRef>
+          <a:effectRef idx="1">
+            <a:schemeClr val="accent5"/>
+          </a:effectRef>
+          <a:fontRef idx="minor">
+            <a:schemeClr val="lt1"/>
+          </a:fontRef>
+        </p:style>
+        <p:txBody>
+          <a:bodyPr vert="horz" lIns="91440" tIns="45720" rIns="91440" bIns="45720" rtlCol="0">
+            <a:normAutofit/>
+          </a:bodyPr>
+          <a:lstStyle>
+            <a:lvl1pPr marL="228600" indent="-228600" algn="l" defTabSz="914400" rtl="0" eaLnBrk="1" latinLnBrk="0" hangingPunct="1">
+              <a:lnSpc>
+                <a:spcPct val="90000"/>
+              </a:lnSpc>
+              <a:spcBef>
+                <a:spcPts val="1000"/>
+              </a:spcBef>
+              <a:buFont typeface="Arial" panose="020B0604020202020204" pitchFamily="34" charset="0"/>
+              <a:buChar char="•"/>
+              <a:defRPr sz="2800" kern="1200">
+                <a:solidFill>
+                  <a:schemeClr val="tx1"/>
+                </a:solidFill>
+                <a:latin typeface="+mn-lt"/>
+                <a:ea typeface="+mn-ea"/>
+                <a:cs typeface="+mn-cs"/>
+              </a:defRPr>
+            </a:lvl1pPr>
+            <a:lvl2pPr marL="685800" indent="-228600" algn="l" defTabSz="914400" rtl="0" eaLnBrk="1" latinLnBrk="0" hangingPunct="1">
+              <a:lnSpc>
+                <a:spcPct val="90000"/>
+              </a:lnSpc>
+              <a:spcBef>
+                <a:spcPts val="500"/>
+              </a:spcBef>
+              <a:buFont typeface="Arial" panose="020B0604020202020204" pitchFamily="34" charset="0"/>
+              <a:buChar char="•"/>
+              <a:defRPr sz="2400" kern="1200">
+                <a:solidFill>
+                  <a:schemeClr val="tx1"/>
+                </a:solidFill>
+                <a:latin typeface="+mn-lt"/>
+                <a:ea typeface="+mn-ea"/>
+                <a:cs typeface="+mn-cs"/>
+              </a:defRPr>
+            </a:lvl2pPr>
+            <a:lvl3pPr marL="1143000" indent="-228600" algn="l" defTabSz="914400" rtl="0" eaLnBrk="1" latinLnBrk="0" hangingPunct="1">
+              <a:lnSpc>
+                <a:spcPct val="90000"/>
+              </a:lnSpc>
+              <a:spcBef>
+                <a:spcPts val="500"/>
+              </a:spcBef>
+              <a:buFont typeface="Arial" panose="020B0604020202020204" pitchFamily="34" charset="0"/>
+              <a:buChar char="•"/>
+              <a:defRPr sz="2000" kern="1200">
+                <a:solidFill>
+                  <a:schemeClr val="tx1"/>
+                </a:solidFill>
+                <a:latin typeface="+mn-lt"/>
+                <a:ea typeface="+mn-ea"/>
+                <a:cs typeface="+mn-cs"/>
+              </a:defRPr>
+            </a:lvl3pPr>
+            <a:lvl4pPr marL="1600200" indent="-228600" algn="l" defTabSz="914400" rtl="0" eaLnBrk="1" latinLnBrk="0" hangingPunct="1">
+              <a:lnSpc>
+                <a:spcPct val="90000"/>
+              </a:lnSpc>
+              <a:spcBef>
+                <a:spcPts val="500"/>
+              </a:spcBef>
+              <a:buFont typeface="Arial" panose="020B0604020202020204" pitchFamily="34" charset="0"/>
+              <a:buChar char="•"/>
+              <a:defRPr sz="1800" kern="1200">
+                <a:solidFill>
+                  <a:schemeClr val="tx1"/>
+                </a:solidFill>
+                <a:latin typeface="+mn-lt"/>
+                <a:ea typeface="+mn-ea"/>
+                <a:cs typeface="+mn-cs"/>
+              </a:defRPr>
+            </a:lvl4pPr>
+            <a:lvl5pPr marL="2057400" indent="-228600" algn="l" defTabSz="914400" rtl="0" eaLnBrk="1" latinLnBrk="0" hangingPunct="1">
+              <a:lnSpc>
+                <a:spcPct val="90000"/>
+              </a:lnSpc>
+              <a:spcBef>
+                <a:spcPts val="500"/>
+              </a:spcBef>
+              <a:buFont typeface="Arial" panose="020B0604020202020204" pitchFamily="34" charset="0"/>
+              <a:buChar char="•"/>
+              <a:defRPr sz="1800" kern="1200">
+                <a:solidFill>
+                  <a:schemeClr val="tx1"/>
+                </a:solidFill>
+                <a:latin typeface="+mn-lt"/>
+                <a:ea typeface="+mn-ea"/>
+                <a:cs typeface="+mn-cs"/>
+              </a:defRPr>
+            </a:lvl5pPr>
+            <a:lvl6pPr marL="2514600" indent="-228600" algn="l" defTabSz="914400" rtl="0" eaLnBrk="1" latinLnBrk="0" hangingPunct="1">
+              <a:lnSpc>
+                <a:spcPct val="90000"/>
+              </a:lnSpc>
+              <a:spcBef>
+                <a:spcPts val="500"/>
+              </a:spcBef>
+              <a:buFont typeface="Arial" panose="020B0604020202020204" pitchFamily="34" charset="0"/>
+              <a:buChar char="•"/>
+              <a:defRPr sz="1800" kern="1200">
+                <a:solidFill>
+                  <a:schemeClr val="tx1"/>
+                </a:solidFill>
+                <a:latin typeface="+mn-lt"/>
+                <a:ea typeface="+mn-ea"/>
+                <a:cs typeface="+mn-cs"/>
+              </a:defRPr>
+            </a:lvl6pPr>
+            <a:lvl7pPr marL="2971800" indent="-228600" algn="l" defTabSz="914400" rtl="0" eaLnBrk="1" latinLnBrk="0" hangingPunct="1">
+              <a:lnSpc>
+                <a:spcPct val="90000"/>
+              </a:lnSpc>
+              <a:spcBef>
+                <a:spcPts val="500"/>
+              </a:spcBef>
+              <a:buFont typeface="Arial" panose="020B0604020202020204" pitchFamily="34" charset="0"/>
+              <a:buChar char="•"/>
+              <a:defRPr sz="1800" kern="1200">
+                <a:solidFill>
+                  <a:schemeClr val="tx1"/>
+                </a:solidFill>
+                <a:latin typeface="+mn-lt"/>
+                <a:ea typeface="+mn-ea"/>
+                <a:cs typeface="+mn-cs"/>
+              </a:defRPr>
+            </a:lvl7pPr>
+            <a:lvl8pPr marL="3429000" indent="-228600" algn="l" defTabSz="914400" rtl="0" eaLnBrk="1" latinLnBrk="0" hangingPunct="1">
+              <a:lnSpc>
+                <a:spcPct val="90000"/>
+              </a:lnSpc>
+              <a:spcBef>
+                <a:spcPts val="500"/>
+              </a:spcBef>
+              <a:buFont typeface="Arial" panose="020B0604020202020204" pitchFamily="34" charset="0"/>
+              <a:buChar char="•"/>
+              <a:defRPr sz="1800" kern="1200">
+                <a:solidFill>
+                  <a:schemeClr val="tx1"/>
+                </a:solidFill>
+                <a:latin typeface="+mn-lt"/>
+                <a:ea typeface="+mn-ea"/>
+                <a:cs typeface="+mn-cs"/>
+              </a:defRPr>
+            </a:lvl8pPr>
+            <a:lvl9pPr marL="3886200" indent="-228600" algn="l" defTabSz="914400" rtl="0" eaLnBrk="1" latinLnBrk="0" hangingPunct="1">
+              <a:lnSpc>
+                <a:spcPct val="90000"/>
+              </a:lnSpc>
+              <a:spcBef>
+                <a:spcPts val="500"/>
+              </a:spcBef>
+              <a:buFont typeface="Arial" panose="020B0604020202020204" pitchFamily="34" charset="0"/>
+              <a:buChar char="•"/>
+              <a:defRPr sz="1800" kern="1200">
+                <a:solidFill>
+                  <a:schemeClr val="tx1"/>
+                </a:solidFill>
+                <a:latin typeface="+mn-lt"/>
+                <a:ea typeface="+mn-ea"/>
+                <a:cs typeface="+mn-cs"/>
+              </a:defRPr>
+            </a:lvl9pPr>
+          </a:lstStyle>
+          <a:p>
+            <a:pPr marL="0" indent="0">
+              <a:buNone/>
+            </a:pPr>
+            <a:r>
+              <a:rPr lang="en-US" b="1" dirty="0"/>
+              <a:t>Target 4</a:t>
+            </a:r>
+          </a:p>
+          <a:p>
+            <a:pPr marL="0" indent="0">
+              <a:buNone/>
+            </a:pPr>
+            <a:r>
+              <a:rPr lang="en-US" dirty="0"/>
+              <a:t>Halt species extinction, protect genetic diversity, and manage human–wildlife conflicts.</a:t>
+            </a:r>
+          </a:p>
+        </p:txBody>
+      </p:sp>
+      <p:sp>
+        <p:nvSpPr>
+          <p:cNvPr id="5" name="Content Placeholder 2">
+            <a:extLst>
+              <a:ext uri="{FF2B5EF4-FFF2-40B4-BE49-F238E27FC236}">
+                <a16:creationId xmlns:a16="http://schemas.microsoft.com/office/drawing/2014/main" id="{99DAEE22-2DAD-0D8E-26D5-BFCED38678FF}"/>
+              </a:ext>
+            </a:extLst>
+          </p:cNvPr>
+          <p:cNvSpPr txBox="1">
+            <a:spLocks/>
+          </p:cNvSpPr>
+          <p:nvPr/>
+        </p:nvSpPr>
+        <p:spPr>
+          <a:xfrm>
+            <a:off x="838200" y="4768644"/>
+            <a:ext cx="5257800" cy="1421158"/>
+          </a:xfrm>
+          <a:prstGeom prst="rect">
+            <a:avLst/>
+          </a:prstGeom>
+        </p:spPr>
+        <p:style>
+          <a:lnRef idx="3">
+            <a:schemeClr val="lt1"/>
+          </a:lnRef>
+          <a:fillRef idx="1">
+            <a:schemeClr val="accent6"/>
+          </a:fillRef>
+          <a:effectRef idx="1">
+            <a:schemeClr val="accent6"/>
+          </a:effectRef>
+          <a:fontRef idx="minor">
+            <a:schemeClr val="lt1"/>
+          </a:fontRef>
+        </p:style>
+        <p:txBody>
+          <a:bodyPr vert="horz" lIns="91440" tIns="45720" rIns="91440" bIns="45720" rtlCol="0">
+            <a:normAutofit/>
+          </a:bodyPr>
+          <a:lstStyle>
+            <a:lvl1pPr marL="228600" indent="-228600" algn="l" defTabSz="914400" rtl="0" eaLnBrk="1" latinLnBrk="0" hangingPunct="1">
+              <a:lnSpc>
+                <a:spcPct val="90000"/>
+              </a:lnSpc>
+              <a:spcBef>
+                <a:spcPts val="1000"/>
+              </a:spcBef>
+              <a:buFont typeface="Arial" panose="020B0604020202020204" pitchFamily="34" charset="0"/>
+              <a:buChar char="•"/>
+              <a:defRPr sz="2800" kern="1200">
+                <a:solidFill>
+                  <a:schemeClr val="tx1"/>
+                </a:solidFill>
+                <a:latin typeface="+mn-lt"/>
+                <a:ea typeface="+mn-ea"/>
+                <a:cs typeface="+mn-cs"/>
+              </a:defRPr>
+            </a:lvl1pPr>
+            <a:lvl2pPr marL="685800" indent="-228600" algn="l" defTabSz="914400" rtl="0" eaLnBrk="1" latinLnBrk="0" hangingPunct="1">
+              <a:lnSpc>
+                <a:spcPct val="90000"/>
+              </a:lnSpc>
+              <a:spcBef>
+                <a:spcPts val="500"/>
+              </a:spcBef>
+              <a:buFont typeface="Arial" panose="020B0604020202020204" pitchFamily="34" charset="0"/>
+              <a:buChar char="•"/>
+              <a:defRPr sz="2400" kern="1200">
+                <a:solidFill>
+                  <a:schemeClr val="tx1"/>
+                </a:solidFill>
+                <a:latin typeface="+mn-lt"/>
+                <a:ea typeface="+mn-ea"/>
+                <a:cs typeface="+mn-cs"/>
+              </a:defRPr>
+            </a:lvl2pPr>
+            <a:lvl3pPr marL="1143000" indent="-228600" algn="l" defTabSz="914400" rtl="0" eaLnBrk="1" latinLnBrk="0" hangingPunct="1">
+              <a:lnSpc>
+                <a:spcPct val="90000"/>
+              </a:lnSpc>
+              <a:spcBef>
+                <a:spcPts val="500"/>
+              </a:spcBef>
+              <a:buFont typeface="Arial" panose="020B0604020202020204" pitchFamily="34" charset="0"/>
+              <a:buChar char="•"/>
+              <a:defRPr sz="2000" kern="1200">
+                <a:solidFill>
+                  <a:schemeClr val="tx1"/>
+                </a:solidFill>
+                <a:latin typeface="+mn-lt"/>
+                <a:ea typeface="+mn-ea"/>
+                <a:cs typeface="+mn-cs"/>
+              </a:defRPr>
+            </a:lvl3pPr>
+            <a:lvl4pPr marL="1600200" indent="-228600" algn="l" defTabSz="914400" rtl="0" eaLnBrk="1" latinLnBrk="0" hangingPunct="1">
+              <a:lnSpc>
+                <a:spcPct val="90000"/>
+              </a:lnSpc>
+              <a:spcBef>
+                <a:spcPts val="500"/>
+              </a:spcBef>
+              <a:buFont typeface="Arial" panose="020B0604020202020204" pitchFamily="34" charset="0"/>
+              <a:buChar char="•"/>
+              <a:defRPr sz="1800" kern="1200">
+                <a:solidFill>
+                  <a:schemeClr val="tx1"/>
+                </a:solidFill>
+                <a:latin typeface="+mn-lt"/>
+                <a:ea typeface="+mn-ea"/>
+                <a:cs typeface="+mn-cs"/>
+              </a:defRPr>
+            </a:lvl4pPr>
+            <a:lvl5pPr marL="2057400" indent="-228600" algn="l" defTabSz="914400" rtl="0" eaLnBrk="1" latinLnBrk="0" hangingPunct="1">
+              <a:lnSpc>
+                <a:spcPct val="90000"/>
+              </a:lnSpc>
+              <a:spcBef>
+                <a:spcPts val="500"/>
+              </a:spcBef>
+              <a:buFont typeface="Arial" panose="020B0604020202020204" pitchFamily="34" charset="0"/>
+              <a:buChar char="•"/>
+              <a:defRPr sz="1800" kern="1200">
+                <a:solidFill>
+                  <a:schemeClr val="tx1"/>
+                </a:solidFill>
+                <a:latin typeface="+mn-lt"/>
+                <a:ea typeface="+mn-ea"/>
+                <a:cs typeface="+mn-cs"/>
+              </a:defRPr>
+            </a:lvl5pPr>
+            <a:lvl6pPr marL="2514600" indent="-228600" algn="l" defTabSz="914400" rtl="0" eaLnBrk="1" latinLnBrk="0" hangingPunct="1">
+              <a:lnSpc>
+                <a:spcPct val="90000"/>
+              </a:lnSpc>
+              <a:spcBef>
+                <a:spcPts val="500"/>
+              </a:spcBef>
+              <a:buFont typeface="Arial" panose="020B0604020202020204" pitchFamily="34" charset="0"/>
+              <a:buChar char="•"/>
+              <a:defRPr sz="1800" kern="1200">
+                <a:solidFill>
+                  <a:schemeClr val="tx1"/>
+                </a:solidFill>
+                <a:latin typeface="+mn-lt"/>
+                <a:ea typeface="+mn-ea"/>
+                <a:cs typeface="+mn-cs"/>
+              </a:defRPr>
+            </a:lvl6pPr>
+            <a:lvl7pPr marL="2971800" indent="-228600" algn="l" defTabSz="914400" rtl="0" eaLnBrk="1" latinLnBrk="0" hangingPunct="1">
+              <a:lnSpc>
+                <a:spcPct val="90000"/>
+              </a:lnSpc>
+              <a:spcBef>
+                <a:spcPts val="500"/>
+              </a:spcBef>
+              <a:buFont typeface="Arial" panose="020B0604020202020204" pitchFamily="34" charset="0"/>
+              <a:buChar char="•"/>
+              <a:defRPr sz="1800" kern="1200">
+                <a:solidFill>
+                  <a:schemeClr val="tx1"/>
+                </a:solidFill>
+                <a:latin typeface="+mn-lt"/>
+                <a:ea typeface="+mn-ea"/>
+                <a:cs typeface="+mn-cs"/>
+              </a:defRPr>
+            </a:lvl7pPr>
+            <a:lvl8pPr marL="3429000" indent="-228600" algn="l" defTabSz="914400" rtl="0" eaLnBrk="1" latinLnBrk="0" hangingPunct="1">
+              <a:lnSpc>
+                <a:spcPct val="90000"/>
+              </a:lnSpc>
+              <a:spcBef>
+                <a:spcPts val="500"/>
+              </a:spcBef>
+              <a:buFont typeface="Arial" panose="020B0604020202020204" pitchFamily="34" charset="0"/>
+              <a:buChar char="•"/>
+              <a:defRPr sz="1800" kern="1200">
+                <a:solidFill>
+                  <a:schemeClr val="tx1"/>
+                </a:solidFill>
+                <a:latin typeface="+mn-lt"/>
+                <a:ea typeface="+mn-ea"/>
+                <a:cs typeface="+mn-cs"/>
+              </a:defRPr>
+            </a:lvl8pPr>
+            <a:lvl9pPr marL="3886200" indent="-228600" algn="l" defTabSz="914400" rtl="0" eaLnBrk="1" latinLnBrk="0" hangingPunct="1">
+              <a:lnSpc>
+                <a:spcPct val="90000"/>
+              </a:lnSpc>
+              <a:spcBef>
+                <a:spcPts val="500"/>
+              </a:spcBef>
+              <a:buFont typeface="Arial" panose="020B0604020202020204" pitchFamily="34" charset="0"/>
+              <a:buChar char="•"/>
+              <a:defRPr sz="1800" kern="1200">
+                <a:solidFill>
+                  <a:schemeClr val="tx1"/>
+                </a:solidFill>
+                <a:latin typeface="+mn-lt"/>
+                <a:ea typeface="+mn-ea"/>
+                <a:cs typeface="+mn-cs"/>
+              </a:defRPr>
+            </a:lvl9pPr>
+          </a:lstStyle>
+          <a:p>
+            <a:pPr marL="0" indent="0">
+              <a:buNone/>
+            </a:pPr>
+            <a:r>
+              <a:rPr lang="en-US" b="1" dirty="0"/>
+              <a:t>A.3 — Red List Index</a:t>
+            </a:r>
+            <a:br>
+              <a:rPr lang="en-US" dirty="0"/>
+            </a:br>
+            <a:r>
+              <a:rPr lang="en-US" i="1" dirty="0"/>
+              <a:t>Are extinction risks across species improving or worsening?</a:t>
+            </a:r>
+            <a:endParaRPr lang="en-US" dirty="0"/>
+          </a:p>
+        </p:txBody>
+      </p:sp>
+    </p:spTree>
+    <p:extLst>
+      <p:ext uri="{BB962C8B-B14F-4D97-AF65-F5344CB8AC3E}">
+        <p14:creationId xmlns:p14="http://schemas.microsoft.com/office/powerpoint/2010/main" val="4262027375"/>
+      </p:ext>
+    </p:extLst>
+  </p:cSld>
+  <p:clrMapOvr>
+    <a:masterClrMapping/>
+  </p:clrMapOvr>
+</p:sld>
+</file>
+
+<file path=ppt/slides/slide6.xml><?xml version="1.0" encoding="utf-8"?>
 <p:sld xmlns:a="http://schemas.openxmlformats.org/drawingml/2006/main" xmlns:r="http://schemas.openxmlformats.org/officeDocument/2006/relationships" xmlns:p="http://schemas.openxmlformats.org/presentationml/2006/main">
   <p:cSld>
     <p:spTree>
@@ -3752,7 +7256,7 @@
 </p:sld>
 </file>
 
-<file path=ppt/slides/slide3.xml><?xml version="1.0" encoding="utf-8"?>
+<file path=ppt/slides/slide7.xml><?xml version="1.0" encoding="utf-8"?>
 <p:sld xmlns:a="http://schemas.openxmlformats.org/drawingml/2006/main" xmlns:r="http://schemas.openxmlformats.org/officeDocument/2006/relationships" xmlns:p="http://schemas.openxmlformats.org/presentationml/2006/main">
   <p:cSld>
     <p:spTree>
@@ -4626,7 +8130,7 @@
 </p:sld>
 </file>
 
-<file path=ppt/slides/slide4.xml><?xml version="1.0" encoding="utf-8"?>
+<file path=ppt/slides/slide8.xml><?xml version="1.0" encoding="utf-8"?>
 <p:sld xmlns:a="http://schemas.openxmlformats.org/drawingml/2006/main" xmlns:r="http://schemas.openxmlformats.org/officeDocument/2006/relationships" xmlns:p="http://schemas.openxmlformats.org/presentationml/2006/main">
   <p:cSld>
     <p:spTree>
@@ -5212,7 +8716,7 @@
 </p:sld>
 </file>
 
-<file path=ppt/slides/slide5.xml><?xml version="1.0" encoding="utf-8"?>
+<file path=ppt/slides/slide9.xml><?xml version="1.0" encoding="utf-8"?>
 <p:sld xmlns:a="http://schemas.openxmlformats.org/drawingml/2006/main" xmlns:r="http://schemas.openxmlformats.org/officeDocument/2006/relationships" xmlns:p="http://schemas.openxmlformats.org/presentationml/2006/main">
   <p:cSld>
     <p:spTree>
@@ -5355,1243 +8859,6 @@
     <p:extLst>
       <p:ext uri="{BB962C8B-B14F-4D97-AF65-F5344CB8AC3E}">
         <p14:creationId xmlns:p14="http://schemas.microsoft.com/office/powerpoint/2010/main" val="1976748286"/>
-      </p:ext>
-    </p:extLst>
-  </p:cSld>
-  <p:clrMapOvr>
-    <a:masterClrMapping/>
-  </p:clrMapOvr>
-</p:sld>
-</file>
-
-<file path=ppt/slides/slide6.xml><?xml version="1.0" encoding="utf-8"?>
-<p:sld xmlns:a="http://schemas.openxmlformats.org/drawingml/2006/main" xmlns:r="http://schemas.openxmlformats.org/officeDocument/2006/relationships" xmlns:p="http://schemas.openxmlformats.org/presentationml/2006/main">
-  <p:cSld>
-    <p:spTree>
-      <p:nvGrpSpPr>
-        <p:cNvPr id="1" name=""/>
-        <p:cNvGrpSpPr/>
-        <p:nvPr/>
-      </p:nvGrpSpPr>
-      <p:grpSpPr>
-        <a:xfrm>
-          <a:off x="0" y="0"/>
-          <a:ext cx="0" cy="0"/>
-          <a:chOff x="0" y="0"/>
-          <a:chExt cx="0" cy="0"/>
-        </a:xfrm>
-      </p:grpSpPr>
-      <p:sp>
-        <p:nvSpPr>
-          <p:cNvPr id="2" name="Title 1">
-            <a:extLst>
-              <a:ext uri="{FF2B5EF4-FFF2-40B4-BE49-F238E27FC236}">
-                <a16:creationId xmlns:a16="http://schemas.microsoft.com/office/drawing/2014/main" id="{29296119-A7C4-99A7-A152-8D6A852E5A23}"/>
-              </a:ext>
-            </a:extLst>
-          </p:cNvPr>
-          <p:cNvSpPr>
-            <a:spLocks noGrp="1"/>
-          </p:cNvSpPr>
-          <p:nvPr>
-            <p:ph type="title"/>
-          </p:nvPr>
-        </p:nvSpPr>
-        <p:spPr/>
-        <p:txBody>
-          <a:bodyPr/>
-          <a:lstStyle/>
-          <a:p>
-            <a:r>
-              <a:rPr lang="en-US" dirty="0"/>
-              <a:t>Global Biodiversity Framework</a:t>
-            </a:r>
-          </a:p>
-        </p:txBody>
-      </p:sp>
-      <p:sp>
-        <p:nvSpPr>
-          <p:cNvPr id="3" name="Content Placeholder 2">
-            <a:extLst>
-              <a:ext uri="{FF2B5EF4-FFF2-40B4-BE49-F238E27FC236}">
-                <a16:creationId xmlns:a16="http://schemas.microsoft.com/office/drawing/2014/main" id="{19ECED6E-AD0F-183C-8713-5228DA99E921}"/>
-              </a:ext>
-            </a:extLst>
-          </p:cNvPr>
-          <p:cNvSpPr>
-            <a:spLocks noGrp="1"/>
-          </p:cNvSpPr>
-          <p:nvPr>
-            <p:ph idx="1"/>
-          </p:nvPr>
-        </p:nvSpPr>
-        <p:spPr>
-          <a:xfrm>
-            <a:off x="5817704" y="2675544"/>
-            <a:ext cx="5536096" cy="2259605"/>
-          </a:xfrm>
-        </p:spPr>
-        <p:txBody>
-          <a:bodyPr/>
-          <a:lstStyle/>
-          <a:p>
-            <a:pPr marL="0" indent="0">
-              <a:buNone/>
-            </a:pPr>
-            <a:r>
-              <a:rPr lang="en-US" dirty="0"/>
-              <a:t>The GBF needs measurable indicators to determine whether countries and the international community are actually making progress toward these goals.</a:t>
-            </a:r>
-          </a:p>
-        </p:txBody>
-      </p:sp>
-      <p:sp>
-        <p:nvSpPr>
-          <p:cNvPr id="4" name="Rectangle 3">
-            <a:extLst>
-              <a:ext uri="{FF2B5EF4-FFF2-40B4-BE49-F238E27FC236}">
-                <a16:creationId xmlns:a16="http://schemas.microsoft.com/office/drawing/2014/main" id="{C4D5E6A6-E12B-4AAB-68AD-507B05FA6AC0}"/>
-              </a:ext>
-            </a:extLst>
-          </p:cNvPr>
-          <p:cNvSpPr/>
-          <p:nvPr/>
-        </p:nvSpPr>
-        <p:spPr>
-          <a:xfrm>
-            <a:off x="1262273" y="2655196"/>
-            <a:ext cx="3482009" cy="559766"/>
-          </a:xfrm>
-          <a:prstGeom prst="rect">
-            <a:avLst/>
-          </a:prstGeom>
-        </p:spPr>
-        <p:style>
-          <a:lnRef idx="2">
-            <a:schemeClr val="accent5">
-              <a:shade val="15000"/>
-            </a:schemeClr>
-          </a:lnRef>
-          <a:fillRef idx="1">
-            <a:schemeClr val="accent5"/>
-          </a:fillRef>
-          <a:effectRef idx="0">
-            <a:schemeClr val="accent5"/>
-          </a:effectRef>
-          <a:fontRef idx="minor">
-            <a:schemeClr val="lt1"/>
-          </a:fontRef>
-        </p:style>
-        <p:txBody>
-          <a:bodyPr rtlCol="0" anchor="ctr"/>
-          <a:lstStyle/>
-          <a:p>
-            <a:pPr algn="ctr"/>
-            <a:r>
-              <a:rPr lang="en-US" dirty="0"/>
-              <a:t>4 Goals for 2025</a:t>
-            </a:r>
-          </a:p>
-        </p:txBody>
-      </p:sp>
-      <p:sp>
-        <p:nvSpPr>
-          <p:cNvPr id="5" name="Rectangle 4">
-            <a:extLst>
-              <a:ext uri="{FF2B5EF4-FFF2-40B4-BE49-F238E27FC236}">
-                <a16:creationId xmlns:a16="http://schemas.microsoft.com/office/drawing/2014/main" id="{DBF6A0F0-5481-336C-E849-0345305FC5CA}"/>
-              </a:ext>
-            </a:extLst>
-          </p:cNvPr>
-          <p:cNvSpPr/>
-          <p:nvPr/>
-        </p:nvSpPr>
-        <p:spPr>
-          <a:xfrm>
-            <a:off x="1262273" y="3525464"/>
-            <a:ext cx="3482009" cy="559766"/>
-          </a:xfrm>
-          <a:prstGeom prst="rect">
-            <a:avLst/>
-          </a:prstGeom>
-        </p:spPr>
-        <p:style>
-          <a:lnRef idx="2">
-            <a:schemeClr val="accent5">
-              <a:shade val="15000"/>
-            </a:schemeClr>
-          </a:lnRef>
-          <a:fillRef idx="1">
-            <a:schemeClr val="accent5"/>
-          </a:fillRef>
-          <a:effectRef idx="0">
-            <a:schemeClr val="accent5"/>
-          </a:effectRef>
-          <a:fontRef idx="minor">
-            <a:schemeClr val="lt1"/>
-          </a:fontRef>
-        </p:style>
-        <p:txBody>
-          <a:bodyPr rtlCol="0" anchor="ctr"/>
-          <a:lstStyle/>
-          <a:p>
-            <a:pPr algn="ctr"/>
-            <a:r>
-              <a:rPr lang="en-US" dirty="0"/>
-              <a:t>23 Targets for 2030</a:t>
-            </a:r>
-          </a:p>
-        </p:txBody>
-      </p:sp>
-      <p:sp>
-        <p:nvSpPr>
-          <p:cNvPr id="6" name="Rectangle 5">
-            <a:extLst>
-              <a:ext uri="{FF2B5EF4-FFF2-40B4-BE49-F238E27FC236}">
-                <a16:creationId xmlns:a16="http://schemas.microsoft.com/office/drawing/2014/main" id="{5EDA11CE-0E44-F912-F486-FC90FF195966}"/>
-              </a:ext>
-            </a:extLst>
-          </p:cNvPr>
-          <p:cNvSpPr/>
-          <p:nvPr/>
-        </p:nvSpPr>
-        <p:spPr>
-          <a:xfrm>
-            <a:off x="1262272" y="4395732"/>
-            <a:ext cx="3482009" cy="559766"/>
-          </a:xfrm>
-          <a:prstGeom prst="rect">
-            <a:avLst/>
-          </a:prstGeom>
-        </p:spPr>
-        <p:style>
-          <a:lnRef idx="2">
-            <a:schemeClr val="accent5">
-              <a:shade val="15000"/>
-            </a:schemeClr>
-          </a:lnRef>
-          <a:fillRef idx="1">
-            <a:schemeClr val="accent5"/>
-          </a:fillRef>
-          <a:effectRef idx="0">
-            <a:schemeClr val="accent5"/>
-          </a:effectRef>
-          <a:fontRef idx="minor">
-            <a:schemeClr val="lt1"/>
-          </a:fontRef>
-        </p:style>
-        <p:txBody>
-          <a:bodyPr rtlCol="0" anchor="ctr"/>
-          <a:lstStyle/>
-          <a:p>
-            <a:pPr algn="ctr"/>
-            <a:r>
-              <a:rPr lang="en-US" dirty="0"/>
-              <a:t>Headline + component + complementary indicators</a:t>
-            </a:r>
-          </a:p>
-        </p:txBody>
-      </p:sp>
-      <p:cxnSp>
-        <p:nvCxnSpPr>
-          <p:cNvPr id="8" name="Straight Arrow Connector 7">
-            <a:extLst>
-              <a:ext uri="{FF2B5EF4-FFF2-40B4-BE49-F238E27FC236}">
-                <a16:creationId xmlns:a16="http://schemas.microsoft.com/office/drawing/2014/main" id="{7CDAC8E0-3D1B-4915-26A8-7501566BB8D3}"/>
-              </a:ext>
-            </a:extLst>
-          </p:cNvPr>
-          <p:cNvCxnSpPr>
-            <a:stCxn id="4" idx="2"/>
-            <a:endCxn id="5" idx="0"/>
-          </p:cNvCxnSpPr>
-          <p:nvPr/>
-        </p:nvCxnSpPr>
-        <p:spPr>
-          <a:xfrm>
-            <a:off x="3003278" y="3214962"/>
-            <a:ext cx="0" cy="310502"/>
-          </a:xfrm>
-          <a:prstGeom prst="straightConnector1">
-            <a:avLst/>
-          </a:prstGeom>
-          <a:ln w="57150">
-            <a:tailEnd type="triangle"/>
-          </a:ln>
-        </p:spPr>
-        <p:style>
-          <a:lnRef idx="1">
-            <a:schemeClr val="accent1"/>
-          </a:lnRef>
-          <a:fillRef idx="0">
-            <a:schemeClr val="accent1"/>
-          </a:fillRef>
-          <a:effectRef idx="0">
-            <a:schemeClr val="accent1"/>
-          </a:effectRef>
-          <a:fontRef idx="minor">
-            <a:schemeClr val="tx1"/>
-          </a:fontRef>
-        </p:style>
-      </p:cxnSp>
-      <p:cxnSp>
-        <p:nvCxnSpPr>
-          <p:cNvPr id="9" name="Straight Arrow Connector 8">
-            <a:extLst>
-              <a:ext uri="{FF2B5EF4-FFF2-40B4-BE49-F238E27FC236}">
-                <a16:creationId xmlns:a16="http://schemas.microsoft.com/office/drawing/2014/main" id="{A4CDEBC1-6BC4-885B-E60F-C3C0300EB7EF}"/>
-              </a:ext>
-            </a:extLst>
-          </p:cNvPr>
-          <p:cNvCxnSpPr>
-            <a:cxnSpLocks/>
-          </p:cNvCxnSpPr>
-          <p:nvPr/>
-        </p:nvCxnSpPr>
-        <p:spPr>
-          <a:xfrm>
-            <a:off x="3003275" y="4085230"/>
-            <a:ext cx="0" cy="310502"/>
-          </a:xfrm>
-          <a:prstGeom prst="straightConnector1">
-            <a:avLst/>
-          </a:prstGeom>
-          <a:ln w="57150">
-            <a:tailEnd type="triangle"/>
-          </a:ln>
-        </p:spPr>
-        <p:style>
-          <a:lnRef idx="1">
-            <a:schemeClr val="accent1"/>
-          </a:lnRef>
-          <a:fillRef idx="0">
-            <a:schemeClr val="accent1"/>
-          </a:fillRef>
-          <a:effectRef idx="0">
-            <a:schemeClr val="accent1"/>
-          </a:effectRef>
-          <a:fontRef idx="minor">
-            <a:schemeClr val="tx1"/>
-          </a:fontRef>
-        </p:style>
-      </p:cxnSp>
-    </p:spTree>
-    <p:extLst>
-      <p:ext uri="{BB962C8B-B14F-4D97-AF65-F5344CB8AC3E}">
-        <p14:creationId xmlns:p14="http://schemas.microsoft.com/office/powerpoint/2010/main" val="3132944180"/>
-      </p:ext>
-    </p:extLst>
-  </p:cSld>
-  <p:clrMapOvr>
-    <a:masterClrMapping/>
-  </p:clrMapOvr>
-</p:sld>
-</file>
-
-<file path=ppt/slides/slide7.xml><?xml version="1.0" encoding="utf-8"?>
-<p:sld xmlns:a="http://schemas.openxmlformats.org/drawingml/2006/main" xmlns:r="http://schemas.openxmlformats.org/officeDocument/2006/relationships" xmlns:p="http://schemas.openxmlformats.org/presentationml/2006/main">
-  <p:cSld>
-    <p:spTree>
-      <p:nvGrpSpPr>
-        <p:cNvPr id="1" name=""/>
-        <p:cNvGrpSpPr/>
-        <p:nvPr/>
-      </p:nvGrpSpPr>
-      <p:grpSpPr>
-        <a:xfrm>
-          <a:off x="0" y="0"/>
-          <a:ext cx="0" cy="0"/>
-          <a:chOff x="0" y="0"/>
-          <a:chExt cx="0" cy="0"/>
-        </a:xfrm>
-      </p:grpSpPr>
-      <p:sp>
-        <p:nvSpPr>
-          <p:cNvPr id="2" name="Title 1">
-            <a:extLst>
-              <a:ext uri="{FF2B5EF4-FFF2-40B4-BE49-F238E27FC236}">
-                <a16:creationId xmlns:a16="http://schemas.microsoft.com/office/drawing/2014/main" id="{E936D5E1-1388-D964-7350-20AC58B4E97B}"/>
-              </a:ext>
-            </a:extLst>
-          </p:cNvPr>
-          <p:cNvSpPr>
-            <a:spLocks noGrp="1"/>
-          </p:cNvSpPr>
-          <p:nvPr>
-            <p:ph type="title"/>
-          </p:nvPr>
-        </p:nvSpPr>
-        <p:spPr/>
-        <p:txBody>
-          <a:bodyPr/>
-          <a:lstStyle/>
-          <a:p>
-            <a:r>
-              <a:rPr lang="en-US" dirty="0"/>
-              <a:t>Global Biodiversity Framework</a:t>
-            </a:r>
-          </a:p>
-        </p:txBody>
-      </p:sp>
-      <p:pic>
-        <p:nvPicPr>
-          <p:cNvPr id="5122" name="Picture 2" descr="Cheat sheet to the Kunming-Montréal Global Biodiversity Framework | Centre  for Sustainable Area Management (CeSAM) | UiB">
-            <a:extLst>
-              <a:ext uri="{FF2B5EF4-FFF2-40B4-BE49-F238E27FC236}">
-                <a16:creationId xmlns:a16="http://schemas.microsoft.com/office/drawing/2014/main" id="{EFC6FBDC-C025-0197-1688-BA6A1C655CFE}"/>
-              </a:ext>
-            </a:extLst>
-          </p:cNvPr>
-          <p:cNvPicPr>
-            <a:picLocks noChangeAspect="1" noChangeArrowheads="1"/>
-          </p:cNvPicPr>
-          <p:nvPr/>
-        </p:nvPicPr>
-        <p:blipFill>
-          <a:blip r:embed="rId2">
-            <a:extLst>
-              <a:ext uri="{28A0092B-C50C-407E-A947-70E740481C1C}">
-                <a14:useLocalDpi xmlns:a14="http://schemas.microsoft.com/office/drawing/2010/main" val="0"/>
-              </a:ext>
-            </a:extLst>
-          </a:blip>
-          <a:srcRect/>
-          <a:stretch>
-            <a:fillRect/>
-          </a:stretch>
-        </p:blipFill>
-        <p:spPr bwMode="auto">
-          <a:xfrm>
-            <a:off x="0" y="0"/>
-            <a:ext cx="12192000" cy="6858000"/>
-          </a:xfrm>
-          <a:prstGeom prst="rect">
-            <a:avLst/>
-          </a:prstGeom>
-          <a:noFill/>
-          <a:extLst>
-            <a:ext uri="{909E8E84-426E-40DD-AFC4-6F175D3DCCD1}">
-              <a14:hiddenFill xmlns:a14="http://schemas.microsoft.com/office/drawing/2010/main">
-                <a:solidFill>
-                  <a:srgbClr val="FFFFFF"/>
-                </a:solidFill>
-              </a14:hiddenFill>
-            </a:ext>
-          </a:extLst>
-        </p:spPr>
-      </p:pic>
-    </p:spTree>
-    <p:extLst>
-      <p:ext uri="{BB962C8B-B14F-4D97-AF65-F5344CB8AC3E}">
-        <p14:creationId xmlns:p14="http://schemas.microsoft.com/office/powerpoint/2010/main" val="2964159776"/>
-      </p:ext>
-    </p:extLst>
-  </p:cSld>
-  <p:clrMapOvr>
-    <a:masterClrMapping/>
-  </p:clrMapOvr>
-</p:sld>
-</file>
-
-<file path=ppt/slides/slide8.xml><?xml version="1.0" encoding="utf-8"?>
-<p:sld xmlns:a="http://schemas.openxmlformats.org/drawingml/2006/main" xmlns:r="http://schemas.openxmlformats.org/officeDocument/2006/relationships" xmlns:p="http://schemas.openxmlformats.org/presentationml/2006/main">
-  <p:cSld>
-    <p:spTree>
-      <p:nvGrpSpPr>
-        <p:cNvPr id="1" name=""/>
-        <p:cNvGrpSpPr/>
-        <p:nvPr/>
-      </p:nvGrpSpPr>
-      <p:grpSpPr>
-        <a:xfrm>
-          <a:off x="0" y="0"/>
-          <a:ext cx="0" cy="0"/>
-          <a:chOff x="0" y="0"/>
-          <a:chExt cx="0" cy="0"/>
-        </a:xfrm>
-      </p:grpSpPr>
-      <p:sp>
-        <p:nvSpPr>
-          <p:cNvPr id="2" name="Title 1">
-            <a:extLst>
-              <a:ext uri="{FF2B5EF4-FFF2-40B4-BE49-F238E27FC236}">
-                <a16:creationId xmlns:a16="http://schemas.microsoft.com/office/drawing/2014/main" id="{5B19DED2-2A9D-5D00-1C7B-27CD1D5EF0BD}"/>
-              </a:ext>
-            </a:extLst>
-          </p:cNvPr>
-          <p:cNvSpPr>
-            <a:spLocks noGrp="1"/>
-          </p:cNvSpPr>
-          <p:nvPr>
-            <p:ph type="title"/>
-          </p:nvPr>
-        </p:nvSpPr>
-        <p:spPr/>
-        <p:txBody>
-          <a:bodyPr/>
-          <a:lstStyle/>
-          <a:p>
-            <a:r>
-              <a:rPr lang="en-US" dirty="0"/>
-              <a:t>Where the Red List fits</a:t>
-            </a:r>
-          </a:p>
-        </p:txBody>
-      </p:sp>
-      <p:sp>
-        <p:nvSpPr>
-          <p:cNvPr id="3" name="Content Placeholder 2">
-            <a:extLst>
-              <a:ext uri="{FF2B5EF4-FFF2-40B4-BE49-F238E27FC236}">
-                <a16:creationId xmlns:a16="http://schemas.microsoft.com/office/drawing/2014/main" id="{2D682009-65F0-E849-0BC8-CD0C12929B44}"/>
-              </a:ext>
-            </a:extLst>
-          </p:cNvPr>
-          <p:cNvSpPr>
-            <a:spLocks noGrp="1"/>
-          </p:cNvSpPr>
-          <p:nvPr>
-            <p:ph idx="1"/>
-          </p:nvPr>
-        </p:nvSpPr>
-        <p:spPr>
-          <a:xfrm>
-            <a:off x="838200" y="1573833"/>
-            <a:ext cx="10515600" cy="1421158"/>
-          </a:xfrm>
-        </p:spPr>
-        <p:style>
-          <a:lnRef idx="3">
-            <a:schemeClr val="lt1"/>
-          </a:lnRef>
-          <a:fillRef idx="1">
-            <a:schemeClr val="accent4"/>
-          </a:fillRef>
-          <a:effectRef idx="1">
-            <a:schemeClr val="accent4"/>
-          </a:effectRef>
-          <a:fontRef idx="minor">
-            <a:schemeClr val="lt1"/>
-          </a:fontRef>
-        </p:style>
-        <p:txBody>
-          <a:bodyPr/>
-          <a:lstStyle/>
-          <a:p>
-            <a:pPr marL="0" indent="0">
-              <a:buNone/>
-            </a:pPr>
-            <a:r>
-              <a:rPr lang="en-US" b="1" dirty="0">
-                <a:solidFill>
-                  <a:sysClr val="windowText" lastClr="000000"/>
-                </a:solidFill>
-              </a:rPr>
-              <a:t>Goal A</a:t>
-            </a:r>
-          </a:p>
-          <a:p>
-            <a:pPr marL="0" indent="0">
-              <a:buNone/>
-            </a:pPr>
-            <a:r>
-              <a:rPr lang="en-US" dirty="0">
-                <a:solidFill>
-                  <a:sysClr val="windowText" lastClr="000000"/>
-                </a:solidFill>
-              </a:rPr>
-              <a:t>Maintain ecosystem integrity, reduce extinction risk, increase abundance of native species, and maintain genetic diversity.</a:t>
-            </a:r>
-          </a:p>
-          <a:p>
-            <a:pPr marL="0" indent="0">
-              <a:buNone/>
-            </a:pPr>
-            <a:endParaRPr lang="en-US" dirty="0">
-              <a:solidFill>
-                <a:sysClr val="windowText" lastClr="000000"/>
-              </a:solidFill>
-            </a:endParaRPr>
-          </a:p>
-        </p:txBody>
-      </p:sp>
-      <p:sp>
-        <p:nvSpPr>
-          <p:cNvPr id="4" name="Content Placeholder 2">
-            <a:extLst>
-              <a:ext uri="{FF2B5EF4-FFF2-40B4-BE49-F238E27FC236}">
-                <a16:creationId xmlns:a16="http://schemas.microsoft.com/office/drawing/2014/main" id="{17DF8EEC-22E8-91C4-B909-A72B95C6EBDA}"/>
-              </a:ext>
-            </a:extLst>
-          </p:cNvPr>
-          <p:cNvSpPr txBox="1">
-            <a:spLocks/>
-          </p:cNvSpPr>
-          <p:nvPr/>
-        </p:nvSpPr>
-        <p:spPr>
-          <a:xfrm>
-            <a:off x="838200" y="3152431"/>
-            <a:ext cx="10515600" cy="1421158"/>
-          </a:xfrm>
-          <a:prstGeom prst="rect">
-            <a:avLst/>
-          </a:prstGeom>
-        </p:spPr>
-        <p:style>
-          <a:lnRef idx="3">
-            <a:schemeClr val="lt1"/>
-          </a:lnRef>
-          <a:fillRef idx="1">
-            <a:schemeClr val="accent5"/>
-          </a:fillRef>
-          <a:effectRef idx="1">
-            <a:schemeClr val="accent5"/>
-          </a:effectRef>
-          <a:fontRef idx="minor">
-            <a:schemeClr val="lt1"/>
-          </a:fontRef>
-        </p:style>
-        <p:txBody>
-          <a:bodyPr vert="horz" lIns="91440" tIns="45720" rIns="91440" bIns="45720" rtlCol="0">
-            <a:normAutofit/>
-          </a:bodyPr>
-          <a:lstStyle>
-            <a:lvl1pPr marL="228600" indent="-228600" algn="l" defTabSz="914400" rtl="0" eaLnBrk="1" latinLnBrk="0" hangingPunct="1">
-              <a:lnSpc>
-                <a:spcPct val="90000"/>
-              </a:lnSpc>
-              <a:spcBef>
-                <a:spcPts val="1000"/>
-              </a:spcBef>
-              <a:buFont typeface="Arial" panose="020B0604020202020204" pitchFamily="34" charset="0"/>
-              <a:buChar char="•"/>
-              <a:defRPr sz="2800" kern="1200">
-                <a:solidFill>
-                  <a:schemeClr val="tx1"/>
-                </a:solidFill>
-                <a:latin typeface="+mn-lt"/>
-                <a:ea typeface="+mn-ea"/>
-                <a:cs typeface="+mn-cs"/>
-              </a:defRPr>
-            </a:lvl1pPr>
-            <a:lvl2pPr marL="685800" indent="-228600" algn="l" defTabSz="914400" rtl="0" eaLnBrk="1" latinLnBrk="0" hangingPunct="1">
-              <a:lnSpc>
-                <a:spcPct val="90000"/>
-              </a:lnSpc>
-              <a:spcBef>
-                <a:spcPts val="500"/>
-              </a:spcBef>
-              <a:buFont typeface="Arial" panose="020B0604020202020204" pitchFamily="34" charset="0"/>
-              <a:buChar char="•"/>
-              <a:defRPr sz="2400" kern="1200">
-                <a:solidFill>
-                  <a:schemeClr val="tx1"/>
-                </a:solidFill>
-                <a:latin typeface="+mn-lt"/>
-                <a:ea typeface="+mn-ea"/>
-                <a:cs typeface="+mn-cs"/>
-              </a:defRPr>
-            </a:lvl2pPr>
-            <a:lvl3pPr marL="1143000" indent="-228600" algn="l" defTabSz="914400" rtl="0" eaLnBrk="1" latinLnBrk="0" hangingPunct="1">
-              <a:lnSpc>
-                <a:spcPct val="90000"/>
-              </a:lnSpc>
-              <a:spcBef>
-                <a:spcPts val="500"/>
-              </a:spcBef>
-              <a:buFont typeface="Arial" panose="020B0604020202020204" pitchFamily="34" charset="0"/>
-              <a:buChar char="•"/>
-              <a:defRPr sz="2000" kern="1200">
-                <a:solidFill>
-                  <a:schemeClr val="tx1"/>
-                </a:solidFill>
-                <a:latin typeface="+mn-lt"/>
-                <a:ea typeface="+mn-ea"/>
-                <a:cs typeface="+mn-cs"/>
-              </a:defRPr>
-            </a:lvl3pPr>
-            <a:lvl4pPr marL="1600200" indent="-228600" algn="l" defTabSz="914400" rtl="0" eaLnBrk="1" latinLnBrk="0" hangingPunct="1">
-              <a:lnSpc>
-                <a:spcPct val="90000"/>
-              </a:lnSpc>
-              <a:spcBef>
-                <a:spcPts val="500"/>
-              </a:spcBef>
-              <a:buFont typeface="Arial" panose="020B0604020202020204" pitchFamily="34" charset="0"/>
-              <a:buChar char="•"/>
-              <a:defRPr sz="1800" kern="1200">
-                <a:solidFill>
-                  <a:schemeClr val="tx1"/>
-                </a:solidFill>
-                <a:latin typeface="+mn-lt"/>
-                <a:ea typeface="+mn-ea"/>
-                <a:cs typeface="+mn-cs"/>
-              </a:defRPr>
-            </a:lvl4pPr>
-            <a:lvl5pPr marL="2057400" indent="-228600" algn="l" defTabSz="914400" rtl="0" eaLnBrk="1" latinLnBrk="0" hangingPunct="1">
-              <a:lnSpc>
-                <a:spcPct val="90000"/>
-              </a:lnSpc>
-              <a:spcBef>
-                <a:spcPts val="500"/>
-              </a:spcBef>
-              <a:buFont typeface="Arial" panose="020B0604020202020204" pitchFamily="34" charset="0"/>
-              <a:buChar char="•"/>
-              <a:defRPr sz="1800" kern="1200">
-                <a:solidFill>
-                  <a:schemeClr val="tx1"/>
-                </a:solidFill>
-                <a:latin typeface="+mn-lt"/>
-                <a:ea typeface="+mn-ea"/>
-                <a:cs typeface="+mn-cs"/>
-              </a:defRPr>
-            </a:lvl5pPr>
-            <a:lvl6pPr marL="2514600" indent="-228600" algn="l" defTabSz="914400" rtl="0" eaLnBrk="1" latinLnBrk="0" hangingPunct="1">
-              <a:lnSpc>
-                <a:spcPct val="90000"/>
-              </a:lnSpc>
-              <a:spcBef>
-                <a:spcPts val="500"/>
-              </a:spcBef>
-              <a:buFont typeface="Arial" panose="020B0604020202020204" pitchFamily="34" charset="0"/>
-              <a:buChar char="•"/>
-              <a:defRPr sz="1800" kern="1200">
-                <a:solidFill>
-                  <a:schemeClr val="tx1"/>
-                </a:solidFill>
-                <a:latin typeface="+mn-lt"/>
-                <a:ea typeface="+mn-ea"/>
-                <a:cs typeface="+mn-cs"/>
-              </a:defRPr>
-            </a:lvl6pPr>
-            <a:lvl7pPr marL="2971800" indent="-228600" algn="l" defTabSz="914400" rtl="0" eaLnBrk="1" latinLnBrk="0" hangingPunct="1">
-              <a:lnSpc>
-                <a:spcPct val="90000"/>
-              </a:lnSpc>
-              <a:spcBef>
-                <a:spcPts val="500"/>
-              </a:spcBef>
-              <a:buFont typeface="Arial" panose="020B0604020202020204" pitchFamily="34" charset="0"/>
-              <a:buChar char="•"/>
-              <a:defRPr sz="1800" kern="1200">
-                <a:solidFill>
-                  <a:schemeClr val="tx1"/>
-                </a:solidFill>
-                <a:latin typeface="+mn-lt"/>
-                <a:ea typeface="+mn-ea"/>
-                <a:cs typeface="+mn-cs"/>
-              </a:defRPr>
-            </a:lvl7pPr>
-            <a:lvl8pPr marL="3429000" indent="-228600" algn="l" defTabSz="914400" rtl="0" eaLnBrk="1" latinLnBrk="0" hangingPunct="1">
-              <a:lnSpc>
-                <a:spcPct val="90000"/>
-              </a:lnSpc>
-              <a:spcBef>
-                <a:spcPts val="500"/>
-              </a:spcBef>
-              <a:buFont typeface="Arial" panose="020B0604020202020204" pitchFamily="34" charset="0"/>
-              <a:buChar char="•"/>
-              <a:defRPr sz="1800" kern="1200">
-                <a:solidFill>
-                  <a:schemeClr val="tx1"/>
-                </a:solidFill>
-                <a:latin typeface="+mn-lt"/>
-                <a:ea typeface="+mn-ea"/>
-                <a:cs typeface="+mn-cs"/>
-              </a:defRPr>
-            </a:lvl8pPr>
-            <a:lvl9pPr marL="3886200" indent="-228600" algn="l" defTabSz="914400" rtl="0" eaLnBrk="1" latinLnBrk="0" hangingPunct="1">
-              <a:lnSpc>
-                <a:spcPct val="90000"/>
-              </a:lnSpc>
-              <a:spcBef>
-                <a:spcPts val="500"/>
-              </a:spcBef>
-              <a:buFont typeface="Arial" panose="020B0604020202020204" pitchFamily="34" charset="0"/>
-              <a:buChar char="•"/>
-              <a:defRPr sz="1800" kern="1200">
-                <a:solidFill>
-                  <a:schemeClr val="tx1"/>
-                </a:solidFill>
-                <a:latin typeface="+mn-lt"/>
-                <a:ea typeface="+mn-ea"/>
-                <a:cs typeface="+mn-cs"/>
-              </a:defRPr>
-            </a:lvl9pPr>
-          </a:lstStyle>
-          <a:p>
-            <a:pPr marL="0" indent="0">
-              <a:buNone/>
-            </a:pPr>
-            <a:r>
-              <a:rPr lang="en-US" b="1" dirty="0"/>
-              <a:t>Target 4</a:t>
-            </a:r>
-          </a:p>
-          <a:p>
-            <a:pPr marL="0" indent="0">
-              <a:buNone/>
-            </a:pPr>
-            <a:r>
-              <a:rPr lang="en-US" dirty="0"/>
-              <a:t>Halt species extinction, protect genetic diversity, and manage human–wildlife conflicts.</a:t>
-            </a:r>
-          </a:p>
-        </p:txBody>
-      </p:sp>
-      <p:sp>
-        <p:nvSpPr>
-          <p:cNvPr id="5" name="Content Placeholder 2">
-            <a:extLst>
-              <a:ext uri="{FF2B5EF4-FFF2-40B4-BE49-F238E27FC236}">
-                <a16:creationId xmlns:a16="http://schemas.microsoft.com/office/drawing/2014/main" id="{99DAEE22-2DAD-0D8E-26D5-BFCED38678FF}"/>
-              </a:ext>
-            </a:extLst>
-          </p:cNvPr>
-          <p:cNvSpPr txBox="1">
-            <a:spLocks/>
-          </p:cNvSpPr>
-          <p:nvPr/>
-        </p:nvSpPr>
-        <p:spPr>
-          <a:xfrm>
-            <a:off x="838200" y="4768644"/>
-            <a:ext cx="5257800" cy="1421158"/>
-          </a:xfrm>
-          <a:prstGeom prst="rect">
-            <a:avLst/>
-          </a:prstGeom>
-        </p:spPr>
-        <p:style>
-          <a:lnRef idx="3">
-            <a:schemeClr val="lt1"/>
-          </a:lnRef>
-          <a:fillRef idx="1">
-            <a:schemeClr val="accent6"/>
-          </a:fillRef>
-          <a:effectRef idx="1">
-            <a:schemeClr val="accent6"/>
-          </a:effectRef>
-          <a:fontRef idx="minor">
-            <a:schemeClr val="lt1"/>
-          </a:fontRef>
-        </p:style>
-        <p:txBody>
-          <a:bodyPr vert="horz" lIns="91440" tIns="45720" rIns="91440" bIns="45720" rtlCol="0">
-            <a:normAutofit/>
-          </a:bodyPr>
-          <a:lstStyle>
-            <a:lvl1pPr marL="228600" indent="-228600" algn="l" defTabSz="914400" rtl="0" eaLnBrk="1" latinLnBrk="0" hangingPunct="1">
-              <a:lnSpc>
-                <a:spcPct val="90000"/>
-              </a:lnSpc>
-              <a:spcBef>
-                <a:spcPts val="1000"/>
-              </a:spcBef>
-              <a:buFont typeface="Arial" panose="020B0604020202020204" pitchFamily="34" charset="0"/>
-              <a:buChar char="•"/>
-              <a:defRPr sz="2800" kern="1200">
-                <a:solidFill>
-                  <a:schemeClr val="tx1"/>
-                </a:solidFill>
-                <a:latin typeface="+mn-lt"/>
-                <a:ea typeface="+mn-ea"/>
-                <a:cs typeface="+mn-cs"/>
-              </a:defRPr>
-            </a:lvl1pPr>
-            <a:lvl2pPr marL="685800" indent="-228600" algn="l" defTabSz="914400" rtl="0" eaLnBrk="1" latinLnBrk="0" hangingPunct="1">
-              <a:lnSpc>
-                <a:spcPct val="90000"/>
-              </a:lnSpc>
-              <a:spcBef>
-                <a:spcPts val="500"/>
-              </a:spcBef>
-              <a:buFont typeface="Arial" panose="020B0604020202020204" pitchFamily="34" charset="0"/>
-              <a:buChar char="•"/>
-              <a:defRPr sz="2400" kern="1200">
-                <a:solidFill>
-                  <a:schemeClr val="tx1"/>
-                </a:solidFill>
-                <a:latin typeface="+mn-lt"/>
-                <a:ea typeface="+mn-ea"/>
-                <a:cs typeface="+mn-cs"/>
-              </a:defRPr>
-            </a:lvl2pPr>
-            <a:lvl3pPr marL="1143000" indent="-228600" algn="l" defTabSz="914400" rtl="0" eaLnBrk="1" latinLnBrk="0" hangingPunct="1">
-              <a:lnSpc>
-                <a:spcPct val="90000"/>
-              </a:lnSpc>
-              <a:spcBef>
-                <a:spcPts val="500"/>
-              </a:spcBef>
-              <a:buFont typeface="Arial" panose="020B0604020202020204" pitchFamily="34" charset="0"/>
-              <a:buChar char="•"/>
-              <a:defRPr sz="2000" kern="1200">
-                <a:solidFill>
-                  <a:schemeClr val="tx1"/>
-                </a:solidFill>
-                <a:latin typeface="+mn-lt"/>
-                <a:ea typeface="+mn-ea"/>
-                <a:cs typeface="+mn-cs"/>
-              </a:defRPr>
-            </a:lvl3pPr>
-            <a:lvl4pPr marL="1600200" indent="-228600" algn="l" defTabSz="914400" rtl="0" eaLnBrk="1" latinLnBrk="0" hangingPunct="1">
-              <a:lnSpc>
-                <a:spcPct val="90000"/>
-              </a:lnSpc>
-              <a:spcBef>
-                <a:spcPts val="500"/>
-              </a:spcBef>
-              <a:buFont typeface="Arial" panose="020B0604020202020204" pitchFamily="34" charset="0"/>
-              <a:buChar char="•"/>
-              <a:defRPr sz="1800" kern="1200">
-                <a:solidFill>
-                  <a:schemeClr val="tx1"/>
-                </a:solidFill>
-                <a:latin typeface="+mn-lt"/>
-                <a:ea typeface="+mn-ea"/>
-                <a:cs typeface="+mn-cs"/>
-              </a:defRPr>
-            </a:lvl4pPr>
-            <a:lvl5pPr marL="2057400" indent="-228600" algn="l" defTabSz="914400" rtl="0" eaLnBrk="1" latinLnBrk="0" hangingPunct="1">
-              <a:lnSpc>
-                <a:spcPct val="90000"/>
-              </a:lnSpc>
-              <a:spcBef>
-                <a:spcPts val="500"/>
-              </a:spcBef>
-              <a:buFont typeface="Arial" panose="020B0604020202020204" pitchFamily="34" charset="0"/>
-              <a:buChar char="•"/>
-              <a:defRPr sz="1800" kern="1200">
-                <a:solidFill>
-                  <a:schemeClr val="tx1"/>
-                </a:solidFill>
-                <a:latin typeface="+mn-lt"/>
-                <a:ea typeface="+mn-ea"/>
-                <a:cs typeface="+mn-cs"/>
-              </a:defRPr>
-            </a:lvl5pPr>
-            <a:lvl6pPr marL="2514600" indent="-228600" algn="l" defTabSz="914400" rtl="0" eaLnBrk="1" latinLnBrk="0" hangingPunct="1">
-              <a:lnSpc>
-                <a:spcPct val="90000"/>
-              </a:lnSpc>
-              <a:spcBef>
-                <a:spcPts val="500"/>
-              </a:spcBef>
-              <a:buFont typeface="Arial" panose="020B0604020202020204" pitchFamily="34" charset="0"/>
-              <a:buChar char="•"/>
-              <a:defRPr sz="1800" kern="1200">
-                <a:solidFill>
-                  <a:schemeClr val="tx1"/>
-                </a:solidFill>
-                <a:latin typeface="+mn-lt"/>
-                <a:ea typeface="+mn-ea"/>
-                <a:cs typeface="+mn-cs"/>
-              </a:defRPr>
-            </a:lvl6pPr>
-            <a:lvl7pPr marL="2971800" indent="-228600" algn="l" defTabSz="914400" rtl="0" eaLnBrk="1" latinLnBrk="0" hangingPunct="1">
-              <a:lnSpc>
-                <a:spcPct val="90000"/>
-              </a:lnSpc>
-              <a:spcBef>
-                <a:spcPts val="500"/>
-              </a:spcBef>
-              <a:buFont typeface="Arial" panose="020B0604020202020204" pitchFamily="34" charset="0"/>
-              <a:buChar char="•"/>
-              <a:defRPr sz="1800" kern="1200">
-                <a:solidFill>
-                  <a:schemeClr val="tx1"/>
-                </a:solidFill>
-                <a:latin typeface="+mn-lt"/>
-                <a:ea typeface="+mn-ea"/>
-                <a:cs typeface="+mn-cs"/>
-              </a:defRPr>
-            </a:lvl7pPr>
-            <a:lvl8pPr marL="3429000" indent="-228600" algn="l" defTabSz="914400" rtl="0" eaLnBrk="1" latinLnBrk="0" hangingPunct="1">
-              <a:lnSpc>
-                <a:spcPct val="90000"/>
-              </a:lnSpc>
-              <a:spcBef>
-                <a:spcPts val="500"/>
-              </a:spcBef>
-              <a:buFont typeface="Arial" panose="020B0604020202020204" pitchFamily="34" charset="0"/>
-              <a:buChar char="•"/>
-              <a:defRPr sz="1800" kern="1200">
-                <a:solidFill>
-                  <a:schemeClr val="tx1"/>
-                </a:solidFill>
-                <a:latin typeface="+mn-lt"/>
-                <a:ea typeface="+mn-ea"/>
-                <a:cs typeface="+mn-cs"/>
-              </a:defRPr>
-            </a:lvl8pPr>
-            <a:lvl9pPr marL="3886200" indent="-228600" algn="l" defTabSz="914400" rtl="0" eaLnBrk="1" latinLnBrk="0" hangingPunct="1">
-              <a:lnSpc>
-                <a:spcPct val="90000"/>
-              </a:lnSpc>
-              <a:spcBef>
-                <a:spcPts val="500"/>
-              </a:spcBef>
-              <a:buFont typeface="Arial" panose="020B0604020202020204" pitchFamily="34" charset="0"/>
-              <a:buChar char="•"/>
-              <a:defRPr sz="1800" kern="1200">
-                <a:solidFill>
-                  <a:schemeClr val="tx1"/>
-                </a:solidFill>
-                <a:latin typeface="+mn-lt"/>
-                <a:ea typeface="+mn-ea"/>
-                <a:cs typeface="+mn-cs"/>
-              </a:defRPr>
-            </a:lvl9pPr>
-          </a:lstStyle>
-          <a:p>
-            <a:pPr marL="0" indent="0">
-              <a:buNone/>
-            </a:pPr>
-            <a:r>
-              <a:rPr lang="en-US" b="1" dirty="0"/>
-              <a:t>A.3 — Red List Index</a:t>
-            </a:r>
-            <a:br>
-              <a:rPr lang="en-US" dirty="0"/>
-            </a:br>
-            <a:r>
-              <a:rPr lang="en-US" i="1" dirty="0"/>
-              <a:t>Are extinction risks across species improving or worsening?</a:t>
-            </a:r>
-            <a:endParaRPr lang="en-US" dirty="0"/>
-          </a:p>
-        </p:txBody>
-      </p:sp>
-      <p:sp>
-        <p:nvSpPr>
-          <p:cNvPr id="6" name="Content Placeholder 2">
-            <a:extLst>
-              <a:ext uri="{FF2B5EF4-FFF2-40B4-BE49-F238E27FC236}">
-                <a16:creationId xmlns:a16="http://schemas.microsoft.com/office/drawing/2014/main" id="{98CB4C8E-CAEF-59BA-A039-7E19B2062A90}"/>
-              </a:ext>
-            </a:extLst>
-          </p:cNvPr>
-          <p:cNvSpPr txBox="1">
-            <a:spLocks/>
-          </p:cNvSpPr>
-          <p:nvPr/>
-        </p:nvSpPr>
-        <p:spPr>
-          <a:xfrm>
-            <a:off x="6281530" y="4763536"/>
-            <a:ext cx="5257800" cy="1421158"/>
-          </a:xfrm>
-          <a:prstGeom prst="rect">
-            <a:avLst/>
-          </a:prstGeom>
-        </p:spPr>
-        <p:style>
-          <a:lnRef idx="3">
-            <a:schemeClr val="lt1"/>
-          </a:lnRef>
-          <a:fillRef idx="1">
-            <a:schemeClr val="accent6"/>
-          </a:fillRef>
-          <a:effectRef idx="1">
-            <a:schemeClr val="accent6"/>
-          </a:effectRef>
-          <a:fontRef idx="minor">
-            <a:schemeClr val="lt1"/>
-          </a:fontRef>
-        </p:style>
-        <p:txBody>
-          <a:bodyPr vert="horz" lIns="91440" tIns="45720" rIns="91440" bIns="45720" rtlCol="0">
-            <a:normAutofit fontScale="92500" lnSpcReduction="10000"/>
-          </a:bodyPr>
-          <a:lstStyle>
-            <a:lvl1pPr marL="228600" indent="-228600" algn="l" defTabSz="914400" rtl="0" eaLnBrk="1" latinLnBrk="0" hangingPunct="1">
-              <a:lnSpc>
-                <a:spcPct val="90000"/>
-              </a:lnSpc>
-              <a:spcBef>
-                <a:spcPts val="1000"/>
-              </a:spcBef>
-              <a:buFont typeface="Arial" panose="020B0604020202020204" pitchFamily="34" charset="0"/>
-              <a:buChar char="•"/>
-              <a:defRPr sz="2800" kern="1200">
-                <a:solidFill>
-                  <a:schemeClr val="tx1"/>
-                </a:solidFill>
-                <a:latin typeface="+mn-lt"/>
-                <a:ea typeface="+mn-ea"/>
-                <a:cs typeface="+mn-cs"/>
-              </a:defRPr>
-            </a:lvl1pPr>
-            <a:lvl2pPr marL="685800" indent="-228600" algn="l" defTabSz="914400" rtl="0" eaLnBrk="1" latinLnBrk="0" hangingPunct="1">
-              <a:lnSpc>
-                <a:spcPct val="90000"/>
-              </a:lnSpc>
-              <a:spcBef>
-                <a:spcPts val="500"/>
-              </a:spcBef>
-              <a:buFont typeface="Arial" panose="020B0604020202020204" pitchFamily="34" charset="0"/>
-              <a:buChar char="•"/>
-              <a:defRPr sz="2400" kern="1200">
-                <a:solidFill>
-                  <a:schemeClr val="tx1"/>
-                </a:solidFill>
-                <a:latin typeface="+mn-lt"/>
-                <a:ea typeface="+mn-ea"/>
-                <a:cs typeface="+mn-cs"/>
-              </a:defRPr>
-            </a:lvl2pPr>
-            <a:lvl3pPr marL="1143000" indent="-228600" algn="l" defTabSz="914400" rtl="0" eaLnBrk="1" latinLnBrk="0" hangingPunct="1">
-              <a:lnSpc>
-                <a:spcPct val="90000"/>
-              </a:lnSpc>
-              <a:spcBef>
-                <a:spcPts val="500"/>
-              </a:spcBef>
-              <a:buFont typeface="Arial" panose="020B0604020202020204" pitchFamily="34" charset="0"/>
-              <a:buChar char="•"/>
-              <a:defRPr sz="2000" kern="1200">
-                <a:solidFill>
-                  <a:schemeClr val="tx1"/>
-                </a:solidFill>
-                <a:latin typeface="+mn-lt"/>
-                <a:ea typeface="+mn-ea"/>
-                <a:cs typeface="+mn-cs"/>
-              </a:defRPr>
-            </a:lvl3pPr>
-            <a:lvl4pPr marL="1600200" indent="-228600" algn="l" defTabSz="914400" rtl="0" eaLnBrk="1" latinLnBrk="0" hangingPunct="1">
-              <a:lnSpc>
-                <a:spcPct val="90000"/>
-              </a:lnSpc>
-              <a:spcBef>
-                <a:spcPts val="500"/>
-              </a:spcBef>
-              <a:buFont typeface="Arial" panose="020B0604020202020204" pitchFamily="34" charset="0"/>
-              <a:buChar char="•"/>
-              <a:defRPr sz="1800" kern="1200">
-                <a:solidFill>
-                  <a:schemeClr val="tx1"/>
-                </a:solidFill>
-                <a:latin typeface="+mn-lt"/>
-                <a:ea typeface="+mn-ea"/>
-                <a:cs typeface="+mn-cs"/>
-              </a:defRPr>
-            </a:lvl4pPr>
-            <a:lvl5pPr marL="2057400" indent="-228600" algn="l" defTabSz="914400" rtl="0" eaLnBrk="1" latinLnBrk="0" hangingPunct="1">
-              <a:lnSpc>
-                <a:spcPct val="90000"/>
-              </a:lnSpc>
-              <a:spcBef>
-                <a:spcPts val="500"/>
-              </a:spcBef>
-              <a:buFont typeface="Arial" panose="020B0604020202020204" pitchFamily="34" charset="0"/>
-              <a:buChar char="•"/>
-              <a:defRPr sz="1800" kern="1200">
-                <a:solidFill>
-                  <a:schemeClr val="tx1"/>
-                </a:solidFill>
-                <a:latin typeface="+mn-lt"/>
-                <a:ea typeface="+mn-ea"/>
-                <a:cs typeface="+mn-cs"/>
-              </a:defRPr>
-            </a:lvl5pPr>
-            <a:lvl6pPr marL="2514600" indent="-228600" algn="l" defTabSz="914400" rtl="0" eaLnBrk="1" latinLnBrk="0" hangingPunct="1">
-              <a:lnSpc>
-                <a:spcPct val="90000"/>
-              </a:lnSpc>
-              <a:spcBef>
-                <a:spcPts val="500"/>
-              </a:spcBef>
-              <a:buFont typeface="Arial" panose="020B0604020202020204" pitchFamily="34" charset="0"/>
-              <a:buChar char="•"/>
-              <a:defRPr sz="1800" kern="1200">
-                <a:solidFill>
-                  <a:schemeClr val="tx1"/>
-                </a:solidFill>
-                <a:latin typeface="+mn-lt"/>
-                <a:ea typeface="+mn-ea"/>
-                <a:cs typeface="+mn-cs"/>
-              </a:defRPr>
-            </a:lvl6pPr>
-            <a:lvl7pPr marL="2971800" indent="-228600" algn="l" defTabSz="914400" rtl="0" eaLnBrk="1" latinLnBrk="0" hangingPunct="1">
-              <a:lnSpc>
-                <a:spcPct val="90000"/>
-              </a:lnSpc>
-              <a:spcBef>
-                <a:spcPts val="500"/>
-              </a:spcBef>
-              <a:buFont typeface="Arial" panose="020B0604020202020204" pitchFamily="34" charset="0"/>
-              <a:buChar char="•"/>
-              <a:defRPr sz="1800" kern="1200">
-                <a:solidFill>
-                  <a:schemeClr val="tx1"/>
-                </a:solidFill>
-                <a:latin typeface="+mn-lt"/>
-                <a:ea typeface="+mn-ea"/>
-                <a:cs typeface="+mn-cs"/>
-              </a:defRPr>
-            </a:lvl7pPr>
-            <a:lvl8pPr marL="3429000" indent="-228600" algn="l" defTabSz="914400" rtl="0" eaLnBrk="1" latinLnBrk="0" hangingPunct="1">
-              <a:lnSpc>
-                <a:spcPct val="90000"/>
-              </a:lnSpc>
-              <a:spcBef>
-                <a:spcPts val="500"/>
-              </a:spcBef>
-              <a:buFont typeface="Arial" panose="020B0604020202020204" pitchFamily="34" charset="0"/>
-              <a:buChar char="•"/>
-              <a:defRPr sz="1800" kern="1200">
-                <a:solidFill>
-                  <a:schemeClr val="tx1"/>
-                </a:solidFill>
-                <a:latin typeface="+mn-lt"/>
-                <a:ea typeface="+mn-ea"/>
-                <a:cs typeface="+mn-cs"/>
-              </a:defRPr>
-            </a:lvl8pPr>
-            <a:lvl9pPr marL="3886200" indent="-228600" algn="l" defTabSz="914400" rtl="0" eaLnBrk="1" latinLnBrk="0" hangingPunct="1">
-              <a:lnSpc>
-                <a:spcPct val="90000"/>
-              </a:lnSpc>
-              <a:spcBef>
-                <a:spcPts val="500"/>
-              </a:spcBef>
-              <a:buFont typeface="Arial" panose="020B0604020202020204" pitchFamily="34" charset="0"/>
-              <a:buChar char="•"/>
-              <a:defRPr sz="1800" kern="1200">
-                <a:solidFill>
-                  <a:schemeClr val="tx1"/>
-                </a:solidFill>
-                <a:latin typeface="+mn-lt"/>
-                <a:ea typeface="+mn-ea"/>
-                <a:cs typeface="+mn-cs"/>
-              </a:defRPr>
-            </a:lvl9pPr>
-          </a:lstStyle>
-          <a:p>
-            <a:pPr marL="0" indent="0">
-              <a:buNone/>
-            </a:pPr>
-            <a:r>
-              <a:rPr lang="en-US" b="1" dirty="0"/>
-              <a:t>A.4 — Proportion of populations with Ne &gt; 500</a:t>
-            </a:r>
-            <a:br>
-              <a:rPr lang="en-US" dirty="0"/>
-            </a:br>
-            <a:r>
-              <a:rPr lang="en-US" i="1" dirty="0"/>
-              <a:t>Are populations maintaining sufficient effective population sizes?</a:t>
-            </a:r>
-            <a:endParaRPr lang="en-US" dirty="0"/>
-          </a:p>
-        </p:txBody>
-      </p:sp>
-    </p:spTree>
-    <p:extLst>
-      <p:ext uri="{BB962C8B-B14F-4D97-AF65-F5344CB8AC3E}">
-        <p14:creationId xmlns:p14="http://schemas.microsoft.com/office/powerpoint/2010/main" val="778563962"/>
       </p:ext>
     </p:extLst>
   </p:cSld>

--- a/teaching/ECOL592-007-Species_Listing/resources/IUCN_GBF_intro.pptx
+++ b/teaching/ECOL592-007-Species_Listing/resources/IUCN_GBF_intro.pptx
@@ -5,24 +5,25 @@
     <p:sldMasterId id="2147483660" r:id="rId1"/>
   </p:sldMasterIdLst>
   <p:notesMasterIdLst>
-    <p:notesMasterId r:id="rId17"/>
+    <p:notesMasterId r:id="rId18"/>
   </p:notesMasterIdLst>
   <p:sldIdLst>
     <p:sldId id="256" r:id="rId2"/>
-    <p:sldId id="264" r:id="rId3"/>
-    <p:sldId id="265" r:id="rId4"/>
-    <p:sldId id="268" r:id="rId5"/>
-    <p:sldId id="266" r:id="rId6"/>
-    <p:sldId id="257" r:id="rId7"/>
-    <p:sldId id="259" r:id="rId8"/>
-    <p:sldId id="261" r:id="rId9"/>
-    <p:sldId id="262" r:id="rId10"/>
-    <p:sldId id="269" r:id="rId11"/>
-    <p:sldId id="260" r:id="rId12"/>
-    <p:sldId id="270" r:id="rId13"/>
-    <p:sldId id="281" r:id="rId14"/>
-    <p:sldId id="282" r:id="rId15"/>
-    <p:sldId id="283" r:id="rId16"/>
+    <p:sldId id="284" r:id="rId3"/>
+    <p:sldId id="264" r:id="rId4"/>
+    <p:sldId id="265" r:id="rId5"/>
+    <p:sldId id="268" r:id="rId6"/>
+    <p:sldId id="266" r:id="rId7"/>
+    <p:sldId id="257" r:id="rId8"/>
+    <p:sldId id="259" r:id="rId9"/>
+    <p:sldId id="261" r:id="rId10"/>
+    <p:sldId id="262" r:id="rId11"/>
+    <p:sldId id="269" r:id="rId12"/>
+    <p:sldId id="260" r:id="rId13"/>
+    <p:sldId id="270" r:id="rId14"/>
+    <p:sldId id="281" r:id="rId15"/>
+    <p:sldId id="282" r:id="rId16"/>
+    <p:sldId id="283" r:id="rId17"/>
   </p:sldIdLst>
   <p:sldSz cx="12192000" cy="6858000"/>
   <p:notesSz cx="6858000" cy="9144000"/>
@@ -522,17 +523,6 @@
           <a:bodyPr/>
           <a:lstStyle/>
           <a:p>
-            <a:r>
-              <a:rPr lang="en-US" b="1" dirty="0"/>
-              <a:t>A.3 looks primarily at species-level extinction risk.</a:t>
-            </a:r>
-            <a:br>
-              <a:rPr lang="en-US" dirty="0"/>
-            </a:br>
-            <a:r>
-              <a:rPr lang="en-US" b="1" dirty="0"/>
-              <a:t>A.4 looks below the species level at population genetic vulnerability.</a:t>
-            </a:r>
             <a:endParaRPr lang="en-US" dirty="0"/>
           </a:p>
         </p:txBody>
@@ -554,7 +544,7 @@
           <a:p>
             <a:fld id="{971840B8-E582-6E44-9E68-439566DD72E5}" type="slidenum">
               <a:rPr lang="en-US" smtClean="0"/>
-              <a:t>5</a:t>
+              <a:t>1</a:t>
             </a:fld>
             <a:endParaRPr lang="en-US"/>
           </a:p>
@@ -563,7 +553,7 @@
     </p:spTree>
     <p:extLst>
       <p:ext uri="{BB962C8B-B14F-4D97-AF65-F5344CB8AC3E}">
-        <p14:creationId xmlns:p14="http://schemas.microsoft.com/office/powerpoint/2010/main" val="1750729475"/>
+        <p14:creationId xmlns:p14="http://schemas.microsoft.com/office/powerpoint/2010/main" val="3957734324"/>
       </p:ext>
     </p:extLst>
   </p:cSld>
@@ -617,6 +607,532 @@
           <a:bodyPr/>
           <a:lstStyle/>
           <a:p>
+            <a:pPr marL="0" marR="0" lvl="0" indent="0" algn="l" defTabSz="914400" rtl="0" eaLnBrk="1" fontAlgn="auto" latinLnBrk="0" hangingPunct="1">
+              <a:lnSpc>
+                <a:spcPct val="100000"/>
+              </a:lnSpc>
+              <a:spcBef>
+                <a:spcPts val="0"/>
+              </a:spcBef>
+              <a:spcAft>
+                <a:spcPts val="0"/>
+              </a:spcAft>
+              <a:buClrTx/>
+              <a:buSzTx/>
+              <a:buFontTx/>
+              <a:buNone/>
+              <a:tabLst/>
+              <a:defRPr/>
+            </a:pPr>
+            <a:r>
+              <a:rPr lang="en-US" sz="1200" b="0" i="0" kern="1200" dirty="0">
+                <a:solidFill>
+                  <a:schemeClr val="tx1"/>
+                </a:solidFill>
+                <a:effectLst/>
+                <a:latin typeface="+mn-lt"/>
+                <a:ea typeface="+mn-ea"/>
+                <a:cs typeface="+mn-cs"/>
+              </a:rPr>
+              <a:t>Contracting Parties are required to create and enforce national strategies and action plans to conserve, protect and enhance biological diversity. They are also required to undertake action to implement the thematic work </a:t>
+            </a:r>
+            <a:r>
+              <a:rPr lang="en-US" sz="1200" b="0" i="0" kern="1200" dirty="0" err="1">
+                <a:solidFill>
+                  <a:schemeClr val="tx1"/>
+                </a:solidFill>
+                <a:effectLst/>
+                <a:latin typeface="+mn-lt"/>
+                <a:ea typeface="+mn-ea"/>
+                <a:cs typeface="+mn-cs"/>
+              </a:rPr>
+              <a:t>programmes</a:t>
+            </a:r>
+            <a:r>
+              <a:rPr lang="en-US" sz="1200" b="0" i="0" kern="1200" dirty="0">
+                <a:solidFill>
+                  <a:schemeClr val="tx1"/>
+                </a:solidFill>
+                <a:effectLst/>
+                <a:latin typeface="+mn-lt"/>
+                <a:ea typeface="+mn-ea"/>
+                <a:cs typeface="+mn-cs"/>
+              </a:rPr>
+              <a:t> on ecosystems and a range of cross-cutting issues which have been established to take forward the provisions of the Convention.</a:t>
+            </a:r>
+          </a:p>
+          <a:p>
+            <a:pPr marL="0" marR="0" lvl="0" indent="0" algn="l" defTabSz="914400" rtl="0" eaLnBrk="1" fontAlgn="auto" latinLnBrk="0" hangingPunct="1">
+              <a:lnSpc>
+                <a:spcPct val="100000"/>
+              </a:lnSpc>
+              <a:spcBef>
+                <a:spcPts val="0"/>
+              </a:spcBef>
+              <a:spcAft>
+                <a:spcPts val="0"/>
+              </a:spcAft>
+              <a:buClrTx/>
+              <a:buSzTx/>
+              <a:buFontTx/>
+              <a:buNone/>
+              <a:tabLst/>
+              <a:defRPr/>
+            </a:pPr>
+            <a:endParaRPr lang="en-US" sz="1200" b="0" i="0" kern="1200" dirty="0">
+              <a:solidFill>
+                <a:schemeClr val="tx1"/>
+              </a:solidFill>
+              <a:effectLst/>
+              <a:latin typeface="+mn-lt"/>
+              <a:ea typeface="+mn-ea"/>
+              <a:cs typeface="+mn-cs"/>
+            </a:endParaRPr>
+          </a:p>
+          <a:p>
+            <a:pPr marL="0" marR="0" lvl="0" indent="0" algn="l" defTabSz="914400" rtl="0" eaLnBrk="1" fontAlgn="auto" latinLnBrk="0" hangingPunct="1">
+              <a:lnSpc>
+                <a:spcPct val="100000"/>
+              </a:lnSpc>
+              <a:spcBef>
+                <a:spcPts val="0"/>
+              </a:spcBef>
+              <a:spcAft>
+                <a:spcPts val="0"/>
+              </a:spcAft>
+              <a:buClrTx/>
+              <a:buSzTx/>
+              <a:buFontTx/>
+              <a:buNone/>
+              <a:tabLst/>
+              <a:defRPr/>
+            </a:pPr>
+            <a:r>
+              <a:rPr lang="en-US" sz="1200" b="0" i="0" kern="1200" dirty="0">
+                <a:solidFill>
+                  <a:schemeClr val="tx1"/>
+                </a:solidFill>
+                <a:effectLst/>
+                <a:latin typeface="+mn-lt"/>
+                <a:ea typeface="+mn-ea"/>
+                <a:cs typeface="+mn-cs"/>
+              </a:rPr>
+              <a:t>The Kunming-Montreal Global Biodiversity Framework (GBF) was adopted during the (2022) </a:t>
+            </a:r>
+            <a:r>
+              <a:rPr lang="en-US" sz="1200" b="0" i="0" u="none" strike="noStrike" kern="1200" dirty="0">
+                <a:solidFill>
+                  <a:schemeClr val="tx1"/>
+                </a:solidFill>
+                <a:effectLst/>
+                <a:latin typeface="+mn-lt"/>
+                <a:ea typeface="+mn-ea"/>
+                <a:cs typeface="+mn-cs"/>
+                <a:hlinkClick r:id="rId3"/>
+              </a:rPr>
+              <a:t>fifteenth meeting of the Conference of the Parties (COP 15)</a:t>
+            </a:r>
+            <a:r>
+              <a:rPr lang="en-US" sz="1200" b="0" i="0" kern="1200" dirty="0">
+                <a:solidFill>
+                  <a:schemeClr val="tx1"/>
+                </a:solidFill>
+                <a:effectLst/>
+                <a:latin typeface="+mn-lt"/>
+                <a:ea typeface="+mn-ea"/>
+                <a:cs typeface="+mn-cs"/>
+              </a:rPr>
+              <a:t> following a four year </a:t>
+            </a:r>
+            <a:r>
+              <a:rPr lang="en-US" sz="1200" b="0" i="0" u="none" strike="noStrike" kern="1200" dirty="0">
+                <a:solidFill>
+                  <a:schemeClr val="tx1"/>
+                </a:solidFill>
+                <a:effectLst/>
+                <a:latin typeface="+mn-lt"/>
+                <a:ea typeface="+mn-ea"/>
+                <a:cs typeface="+mn-cs"/>
+                <a:hlinkClick r:id="rId4"/>
+              </a:rPr>
+              <a:t>consultation and negotiation process</a:t>
+            </a:r>
+            <a:r>
+              <a:rPr lang="en-US" sz="1200" b="0" i="0" kern="1200" dirty="0">
+                <a:solidFill>
+                  <a:schemeClr val="tx1"/>
+                </a:solidFill>
+                <a:effectLst/>
+                <a:latin typeface="+mn-lt"/>
+                <a:ea typeface="+mn-ea"/>
+                <a:cs typeface="+mn-cs"/>
+              </a:rPr>
+              <a:t>. </a:t>
+            </a:r>
+          </a:p>
+          <a:p>
+            <a:pPr marL="0" marR="0" lvl="0" indent="0" algn="l" defTabSz="914400" rtl="0" eaLnBrk="1" fontAlgn="auto" latinLnBrk="0" hangingPunct="1">
+              <a:lnSpc>
+                <a:spcPct val="100000"/>
+              </a:lnSpc>
+              <a:spcBef>
+                <a:spcPts val="0"/>
+              </a:spcBef>
+              <a:spcAft>
+                <a:spcPts val="0"/>
+              </a:spcAft>
+              <a:buClrTx/>
+              <a:buSzTx/>
+              <a:buFontTx/>
+              <a:buNone/>
+              <a:tabLst/>
+              <a:defRPr/>
+            </a:pPr>
+            <a:endParaRPr lang="en-US" sz="1200" b="0" i="0" kern="1200" dirty="0">
+              <a:solidFill>
+                <a:schemeClr val="tx1"/>
+              </a:solidFill>
+              <a:effectLst/>
+              <a:latin typeface="+mn-lt"/>
+              <a:ea typeface="+mn-ea"/>
+              <a:cs typeface="+mn-cs"/>
+            </a:endParaRPr>
+          </a:p>
+          <a:p>
+            <a:pPr marL="0" marR="0" lvl="0" indent="0" algn="l" defTabSz="914400" rtl="0" eaLnBrk="1" fontAlgn="auto" latinLnBrk="0" hangingPunct="1">
+              <a:lnSpc>
+                <a:spcPct val="100000"/>
+              </a:lnSpc>
+              <a:spcBef>
+                <a:spcPts val="0"/>
+              </a:spcBef>
+              <a:spcAft>
+                <a:spcPts val="0"/>
+              </a:spcAft>
+              <a:buClrTx/>
+              <a:buSzTx/>
+              <a:buFontTx/>
+              <a:buNone/>
+              <a:tabLst/>
+              <a:defRPr/>
+            </a:pPr>
+            <a:r>
+              <a:rPr lang="en-US" sz="1200" b="0" i="0" kern="1200" dirty="0" err="1">
+                <a:solidFill>
+                  <a:schemeClr val="tx1"/>
+                </a:solidFill>
+                <a:effectLst/>
+                <a:latin typeface="+mn-lt"/>
+                <a:ea typeface="+mn-ea"/>
+                <a:cs typeface="+mn-cs"/>
+              </a:rPr>
+              <a:t>ets</a:t>
+            </a:r>
+            <a:r>
+              <a:rPr lang="en-US" sz="1200" b="0" i="0" kern="1200" dirty="0">
+                <a:solidFill>
+                  <a:schemeClr val="tx1"/>
+                </a:solidFill>
+                <a:effectLst/>
+                <a:latin typeface="+mn-lt"/>
+                <a:ea typeface="+mn-ea"/>
+                <a:cs typeface="+mn-cs"/>
+              </a:rPr>
+              <a:t> out an ambitious pathway to reach the global vision of a world living in harmony with nature by 2050. Among the Framework’s key elements are 4 goals for 2050 and 23 targets for 2030. </a:t>
+            </a:r>
+          </a:p>
+          <a:p>
+            <a:pPr marL="0" marR="0" lvl="0" indent="0" algn="l" defTabSz="914400" rtl="0" eaLnBrk="1" fontAlgn="auto" latinLnBrk="0" hangingPunct="1">
+              <a:lnSpc>
+                <a:spcPct val="100000"/>
+              </a:lnSpc>
+              <a:spcBef>
+                <a:spcPts val="0"/>
+              </a:spcBef>
+              <a:spcAft>
+                <a:spcPts val="0"/>
+              </a:spcAft>
+              <a:buClrTx/>
+              <a:buSzTx/>
+              <a:buFontTx/>
+              <a:buNone/>
+              <a:tabLst/>
+              <a:defRPr/>
+            </a:pPr>
+            <a:endParaRPr lang="en-US" sz="1200" b="0" i="0" kern="1200" dirty="0">
+              <a:solidFill>
+                <a:schemeClr val="tx1"/>
+              </a:solidFill>
+              <a:effectLst/>
+              <a:latin typeface="+mn-lt"/>
+              <a:ea typeface="+mn-ea"/>
+              <a:cs typeface="+mn-cs"/>
+            </a:endParaRPr>
+          </a:p>
+          <a:p>
+            <a:endParaRPr lang="en-US" dirty="0"/>
+          </a:p>
+        </p:txBody>
+      </p:sp>
+      <p:sp>
+        <p:nvSpPr>
+          <p:cNvPr id="4" name="Slide Number Placeholder 3"/>
+          <p:cNvSpPr>
+            <a:spLocks noGrp="1"/>
+          </p:cNvSpPr>
+          <p:nvPr>
+            <p:ph type="sldNum" sz="quarter" idx="5"/>
+          </p:nvPr>
+        </p:nvSpPr>
+        <p:spPr/>
+        <p:txBody>
+          <a:bodyPr/>
+          <a:lstStyle/>
+          <a:p>
+            <a:fld id="{971840B8-E582-6E44-9E68-439566DD72E5}" type="slidenum">
+              <a:rPr lang="en-US" smtClean="0"/>
+              <a:t>2</a:t>
+            </a:fld>
+            <a:endParaRPr lang="en-US"/>
+          </a:p>
+        </p:txBody>
+      </p:sp>
+    </p:spTree>
+    <p:extLst>
+      <p:ext uri="{BB962C8B-B14F-4D97-AF65-F5344CB8AC3E}">
+        <p14:creationId xmlns:p14="http://schemas.microsoft.com/office/powerpoint/2010/main" val="2219405265"/>
+      </p:ext>
+    </p:extLst>
+  </p:cSld>
+  <p:clrMapOvr>
+    <a:masterClrMapping/>
+  </p:clrMapOvr>
+</p:notes>
+</file>
+
+<file path=ppt/notesSlides/notesSlide3.xml><?xml version="1.0" encoding="utf-8"?>
+<p:notes xmlns:a="http://schemas.openxmlformats.org/drawingml/2006/main" xmlns:r="http://schemas.openxmlformats.org/officeDocument/2006/relationships" xmlns:p="http://schemas.openxmlformats.org/presentationml/2006/main">
+  <p:cSld>
+    <p:spTree>
+      <p:nvGrpSpPr>
+        <p:cNvPr id="1" name=""/>
+        <p:cNvGrpSpPr/>
+        <p:nvPr/>
+      </p:nvGrpSpPr>
+      <p:grpSpPr>
+        <a:xfrm>
+          <a:off x="0" y="0"/>
+          <a:ext cx="0" cy="0"/>
+          <a:chOff x="0" y="0"/>
+          <a:chExt cx="0" cy="0"/>
+        </a:xfrm>
+      </p:grpSpPr>
+      <p:sp>
+        <p:nvSpPr>
+          <p:cNvPr id="2" name="Slide Image Placeholder 1"/>
+          <p:cNvSpPr>
+            <a:spLocks noGrp="1" noRot="1" noChangeAspect="1"/>
+          </p:cNvSpPr>
+          <p:nvPr>
+            <p:ph type="sldImg"/>
+          </p:nvPr>
+        </p:nvSpPr>
+        <p:spPr/>
+      </p:sp>
+      <p:sp>
+        <p:nvSpPr>
+          <p:cNvPr id="3" name="Notes Placeholder 2"/>
+          <p:cNvSpPr>
+            <a:spLocks noGrp="1"/>
+          </p:cNvSpPr>
+          <p:nvPr>
+            <p:ph type="body" idx="1"/>
+          </p:nvPr>
+        </p:nvSpPr>
+        <p:spPr/>
+        <p:txBody>
+          <a:bodyPr/>
+          <a:lstStyle/>
+          <a:p>
+            <a:endParaRPr lang="en-US" dirty="0"/>
+          </a:p>
+        </p:txBody>
+      </p:sp>
+      <p:sp>
+        <p:nvSpPr>
+          <p:cNvPr id="4" name="Slide Number Placeholder 3"/>
+          <p:cNvSpPr>
+            <a:spLocks noGrp="1"/>
+          </p:cNvSpPr>
+          <p:nvPr>
+            <p:ph type="sldNum" sz="quarter" idx="5"/>
+          </p:nvPr>
+        </p:nvSpPr>
+        <p:spPr/>
+        <p:txBody>
+          <a:bodyPr/>
+          <a:lstStyle/>
+          <a:p>
+            <a:fld id="{971840B8-E582-6E44-9E68-439566DD72E5}" type="slidenum">
+              <a:rPr lang="en-US" smtClean="0"/>
+              <a:t>3</a:t>
+            </a:fld>
+            <a:endParaRPr lang="en-US"/>
+          </a:p>
+        </p:txBody>
+      </p:sp>
+    </p:spTree>
+    <p:extLst>
+      <p:ext uri="{BB962C8B-B14F-4D97-AF65-F5344CB8AC3E}">
+        <p14:creationId xmlns:p14="http://schemas.microsoft.com/office/powerpoint/2010/main" val="1922473599"/>
+      </p:ext>
+    </p:extLst>
+  </p:cSld>
+  <p:clrMapOvr>
+    <a:masterClrMapping/>
+  </p:clrMapOvr>
+</p:notes>
+</file>
+
+<file path=ppt/notesSlides/notesSlide4.xml><?xml version="1.0" encoding="utf-8"?>
+<p:notes xmlns:a="http://schemas.openxmlformats.org/drawingml/2006/main" xmlns:r="http://schemas.openxmlformats.org/officeDocument/2006/relationships" xmlns:p="http://schemas.openxmlformats.org/presentationml/2006/main">
+  <p:cSld>
+    <p:spTree>
+      <p:nvGrpSpPr>
+        <p:cNvPr id="1" name=""/>
+        <p:cNvGrpSpPr/>
+        <p:nvPr/>
+      </p:nvGrpSpPr>
+      <p:grpSpPr>
+        <a:xfrm>
+          <a:off x="0" y="0"/>
+          <a:ext cx="0" cy="0"/>
+          <a:chOff x="0" y="0"/>
+          <a:chExt cx="0" cy="0"/>
+        </a:xfrm>
+      </p:grpSpPr>
+      <p:sp>
+        <p:nvSpPr>
+          <p:cNvPr id="2" name="Slide Image Placeholder 1"/>
+          <p:cNvSpPr>
+            <a:spLocks noGrp="1" noRot="1" noChangeAspect="1"/>
+          </p:cNvSpPr>
+          <p:nvPr>
+            <p:ph type="sldImg"/>
+          </p:nvPr>
+        </p:nvSpPr>
+        <p:spPr/>
+      </p:sp>
+      <p:sp>
+        <p:nvSpPr>
+          <p:cNvPr id="3" name="Notes Placeholder 2"/>
+          <p:cNvSpPr>
+            <a:spLocks noGrp="1"/>
+          </p:cNvSpPr>
+          <p:nvPr>
+            <p:ph type="body" idx="1"/>
+          </p:nvPr>
+        </p:nvSpPr>
+        <p:spPr/>
+        <p:txBody>
+          <a:bodyPr/>
+          <a:lstStyle/>
+          <a:p>
+            <a:r>
+              <a:rPr lang="en-US" b="1" dirty="0"/>
+              <a:t>A.3 looks primarily at species-level extinction risk.</a:t>
+            </a:r>
+            <a:br>
+              <a:rPr lang="en-US" dirty="0"/>
+            </a:br>
+            <a:r>
+              <a:rPr lang="en-US" b="1" dirty="0"/>
+              <a:t>A.4 looks below the species level at population genetic vulnerability.</a:t>
+            </a:r>
+            <a:endParaRPr lang="en-US" dirty="0"/>
+          </a:p>
+        </p:txBody>
+      </p:sp>
+      <p:sp>
+        <p:nvSpPr>
+          <p:cNvPr id="4" name="Slide Number Placeholder 3"/>
+          <p:cNvSpPr>
+            <a:spLocks noGrp="1"/>
+          </p:cNvSpPr>
+          <p:nvPr>
+            <p:ph type="sldNum" sz="quarter" idx="5"/>
+          </p:nvPr>
+        </p:nvSpPr>
+        <p:spPr/>
+        <p:txBody>
+          <a:bodyPr/>
+          <a:lstStyle/>
+          <a:p>
+            <a:fld id="{971840B8-E582-6E44-9E68-439566DD72E5}" type="slidenum">
+              <a:rPr lang="en-US" smtClean="0"/>
+              <a:t>6</a:t>
+            </a:fld>
+            <a:endParaRPr lang="en-US"/>
+          </a:p>
+        </p:txBody>
+      </p:sp>
+    </p:spTree>
+    <p:extLst>
+      <p:ext uri="{BB962C8B-B14F-4D97-AF65-F5344CB8AC3E}">
+        <p14:creationId xmlns:p14="http://schemas.microsoft.com/office/powerpoint/2010/main" val="1750729475"/>
+      </p:ext>
+    </p:extLst>
+  </p:cSld>
+  <p:clrMapOvr>
+    <a:masterClrMapping/>
+  </p:clrMapOvr>
+</p:notes>
+</file>
+
+<file path=ppt/notesSlides/notesSlide5.xml><?xml version="1.0" encoding="utf-8"?>
+<p:notes xmlns:a="http://schemas.openxmlformats.org/drawingml/2006/main" xmlns:r="http://schemas.openxmlformats.org/officeDocument/2006/relationships" xmlns:p="http://schemas.openxmlformats.org/presentationml/2006/main">
+  <p:cSld>
+    <p:spTree>
+      <p:nvGrpSpPr>
+        <p:cNvPr id="1" name=""/>
+        <p:cNvGrpSpPr/>
+        <p:nvPr/>
+      </p:nvGrpSpPr>
+      <p:grpSpPr>
+        <a:xfrm>
+          <a:off x="0" y="0"/>
+          <a:ext cx="0" cy="0"/>
+          <a:chOff x="0" y="0"/>
+          <a:chExt cx="0" cy="0"/>
+        </a:xfrm>
+      </p:grpSpPr>
+      <p:sp>
+        <p:nvSpPr>
+          <p:cNvPr id="2" name="Slide Image Placeholder 1"/>
+          <p:cNvSpPr>
+            <a:spLocks noGrp="1" noRot="1" noChangeAspect="1"/>
+          </p:cNvSpPr>
+          <p:nvPr>
+            <p:ph type="sldImg"/>
+          </p:nvPr>
+        </p:nvSpPr>
+        <p:spPr/>
+      </p:sp>
+      <p:sp>
+        <p:nvSpPr>
+          <p:cNvPr id="3" name="Notes Placeholder 2"/>
+          <p:cNvSpPr>
+            <a:spLocks noGrp="1"/>
+          </p:cNvSpPr>
+          <p:nvPr>
+            <p:ph type="body" idx="1"/>
+          </p:nvPr>
+        </p:nvSpPr>
+        <p:spPr/>
+        <p:txBody>
+          <a:bodyPr/>
+          <a:lstStyle/>
+          <a:p>
             <a:r>
               <a:rPr lang="en-US" dirty="0"/>
               <a:t>CITES: Convention on International Trade in Endangered Species of Wild Fauna and Flora</a:t>
@@ -656,7 +1172,7 @@
           <a:p>
             <a:fld id="{971840B8-E582-6E44-9E68-439566DD72E5}" type="slidenum">
               <a:rPr lang="en-US" smtClean="0"/>
-              <a:t>9</a:t>
+              <a:t>10</a:t>
             </a:fld>
             <a:endParaRPr lang="en-US"/>
           </a:p>
@@ -675,7 +1191,7 @@
 </p:notes>
 </file>
 
-<file path=ppt/notesSlides/notesSlide3.xml><?xml version="1.0" encoding="utf-8"?>
+<file path=ppt/notesSlides/notesSlide6.xml><?xml version="1.0" encoding="utf-8"?>
 <p:notes xmlns:a="http://schemas.openxmlformats.org/drawingml/2006/main" xmlns:r="http://schemas.openxmlformats.org/officeDocument/2006/relationships" xmlns:p="http://schemas.openxmlformats.org/presentationml/2006/main">
   <p:cSld>
     <p:spTree>
@@ -775,7 +1291,7 @@
           <a:p>
             <a:fld id="{971840B8-E582-6E44-9E68-439566DD72E5}" type="slidenum">
               <a:rPr lang="en-US" smtClean="0"/>
-              <a:t>10</a:t>
+              <a:t>11</a:t>
             </a:fld>
             <a:endParaRPr lang="en-US"/>
           </a:p>
@@ -3726,6 +4242,158 @@
   <p:cSld>
     <p:spTree>
       <p:nvGrpSpPr>
+        <p:cNvPr id="1" name=""/>
+        <p:cNvGrpSpPr/>
+        <p:nvPr/>
+      </p:nvGrpSpPr>
+      <p:grpSpPr>
+        <a:xfrm>
+          <a:off x="0" y="0"/>
+          <a:ext cx="0" cy="0"/>
+          <a:chOff x="0" y="0"/>
+          <a:chExt cx="0" cy="0"/>
+        </a:xfrm>
+      </p:grpSpPr>
+      <p:sp>
+        <p:nvSpPr>
+          <p:cNvPr id="2" name="Title 1">
+            <a:extLst>
+              <a:ext uri="{FF2B5EF4-FFF2-40B4-BE49-F238E27FC236}">
+                <a16:creationId xmlns:a16="http://schemas.microsoft.com/office/drawing/2014/main" id="{23E41630-A727-9C1E-3720-27E1FE18E5D5}"/>
+              </a:ext>
+            </a:extLst>
+          </p:cNvPr>
+          <p:cNvSpPr>
+            <a:spLocks noGrp="1"/>
+          </p:cNvSpPr>
+          <p:nvPr>
+            <p:ph type="title"/>
+          </p:nvPr>
+        </p:nvSpPr>
+        <p:spPr/>
+        <p:txBody>
+          <a:bodyPr/>
+          <a:lstStyle/>
+          <a:p>
+            <a:r>
+              <a:rPr lang="en-US" dirty="0"/>
+              <a:t>The Red List is not law but it informs policy</a:t>
+            </a:r>
+          </a:p>
+        </p:txBody>
+      </p:sp>
+      <p:sp>
+        <p:nvSpPr>
+          <p:cNvPr id="3" name="Content Placeholder 2">
+            <a:extLst>
+              <a:ext uri="{FF2B5EF4-FFF2-40B4-BE49-F238E27FC236}">
+                <a16:creationId xmlns:a16="http://schemas.microsoft.com/office/drawing/2014/main" id="{E593D19F-0FAE-5390-C981-1405A225A063}"/>
+              </a:ext>
+            </a:extLst>
+          </p:cNvPr>
+          <p:cNvSpPr>
+            <a:spLocks noGrp="1"/>
+          </p:cNvSpPr>
+          <p:nvPr>
+            <p:ph idx="1"/>
+          </p:nvPr>
+        </p:nvSpPr>
+        <p:spPr/>
+        <p:txBody>
+          <a:bodyPr>
+            <a:normAutofit lnSpcReduction="10000"/>
+          </a:bodyPr>
+          <a:lstStyle/>
+          <a:p>
+            <a:r>
+              <a:rPr lang="en-US" dirty="0"/>
+              <a:t>IUCN Red List feeds into</a:t>
+            </a:r>
+          </a:p>
+          <a:p>
+            <a:pPr lvl="1"/>
+            <a:r>
+              <a:rPr lang="en-US" dirty="0"/>
+              <a:t>conservation planning</a:t>
+            </a:r>
+          </a:p>
+          <a:p>
+            <a:pPr lvl="1"/>
+            <a:r>
+              <a:rPr lang="en-US" dirty="0"/>
+              <a:t>national and regional conservation priorities</a:t>
+            </a:r>
+          </a:p>
+          <a:p>
+            <a:pPr lvl="1"/>
+            <a:r>
+              <a:rPr lang="en-US" dirty="0"/>
+              <a:t>international agreements</a:t>
+            </a:r>
+          </a:p>
+          <a:p>
+            <a:pPr lvl="1"/>
+            <a:r>
+              <a:rPr lang="en-US" dirty="0"/>
+              <a:t>global biodiversity indicators</a:t>
+            </a:r>
+          </a:p>
+          <a:p>
+            <a:r>
+              <a:rPr lang="en-US" dirty="0"/>
+              <a:t>Examples of international agreements</a:t>
+            </a:r>
+          </a:p>
+          <a:p>
+            <a:pPr marL="971550" lvl="1" indent="-514350">
+              <a:buFont typeface="+mj-lt"/>
+              <a:buAutoNum type="arabicPeriod"/>
+            </a:pPr>
+            <a:r>
+              <a:rPr lang="en-US" dirty="0"/>
+              <a:t>CITES - Red List information can inform decisions concerning international trade and revisions to CITES appendices</a:t>
+            </a:r>
+          </a:p>
+          <a:p>
+            <a:pPr marL="971550" lvl="1" indent="-514350">
+              <a:buFont typeface="+mj-lt"/>
+              <a:buAutoNum type="arabicPeriod"/>
+            </a:pPr>
+            <a:r>
+              <a:rPr lang="en-US" dirty="0"/>
+              <a:t>CMS - Red List information can inform decisions concerning migratory species and their conservation</a:t>
+            </a:r>
+          </a:p>
+          <a:p>
+            <a:pPr marL="971550" lvl="1" indent="-514350">
+              <a:buFont typeface="+mj-lt"/>
+              <a:buAutoNum type="arabicPeriod"/>
+            </a:pPr>
+            <a:r>
+              <a:rPr lang="en-US" dirty="0"/>
+              <a:t>GBF</a:t>
+            </a:r>
+          </a:p>
+        </p:txBody>
+      </p:sp>
+    </p:spTree>
+    <p:extLst>
+      <p:ext uri="{BB962C8B-B14F-4D97-AF65-F5344CB8AC3E}">
+        <p14:creationId xmlns:p14="http://schemas.microsoft.com/office/powerpoint/2010/main" val="1976748286"/>
+      </p:ext>
+    </p:extLst>
+  </p:cSld>
+  <p:clrMapOvr>
+    <a:masterClrMapping/>
+  </p:clrMapOvr>
+</p:sld>
+</file>
+
+<file path=ppt/slides/slide11.xml><?xml version="1.0" encoding="utf-8"?>
+<p:sld xmlns:a="http://schemas.openxmlformats.org/drawingml/2006/main" xmlns:r="http://schemas.openxmlformats.org/officeDocument/2006/relationships" xmlns:p="http://schemas.openxmlformats.org/presentationml/2006/main">
+  <p:cSld>
+    <p:spTree>
+      <p:nvGrpSpPr>
         <p:cNvPr id="1" name="">
           <a:extLst>
             <a:ext uri="{FF2B5EF4-FFF2-40B4-BE49-F238E27FC236}">
@@ -4613,7 +5281,7 @@
 </p:sld>
 </file>
 
-<file path=ppt/slides/slide11.xml><?xml version="1.0" encoding="utf-8"?>
+<file path=ppt/slides/slide12.xml><?xml version="1.0" encoding="utf-8"?>
 <p:sld xmlns:a="http://schemas.openxmlformats.org/drawingml/2006/main" xmlns:r="http://schemas.openxmlformats.org/officeDocument/2006/relationships" xmlns:p="http://schemas.openxmlformats.org/presentationml/2006/main">
   <p:cSld>
     <p:spTree>
@@ -5275,7 +5943,7 @@
 </p:sld>
 </file>
 
-<file path=ppt/slides/slide12.xml><?xml version="1.0" encoding="utf-8"?>
+<file path=ppt/slides/slide13.xml><?xml version="1.0" encoding="utf-8"?>
 <p:sld xmlns:a="http://schemas.openxmlformats.org/drawingml/2006/main" xmlns:r="http://schemas.openxmlformats.org/officeDocument/2006/relationships" xmlns:p="http://schemas.openxmlformats.org/presentationml/2006/main">
   <p:cSld>
     <p:spTree>
@@ -5380,7 +6048,7 @@
 </p:sld>
 </file>
 
-<file path=ppt/slides/slide13.xml><?xml version="1.0" encoding="utf-8"?>
+<file path=ppt/slides/slide14.xml><?xml version="1.0" encoding="utf-8"?>
 <p:sld xmlns:a="http://schemas.openxmlformats.org/drawingml/2006/main" xmlns:r="http://schemas.openxmlformats.org/officeDocument/2006/relationships" xmlns:p="http://schemas.openxmlformats.org/presentationml/2006/main">
   <p:cSld>
     <p:spTree>
@@ -5735,7 +6403,7 @@
 </p:sld>
 </file>
 
-<file path=ppt/slides/slide14.xml><?xml version="1.0" encoding="utf-8"?>
+<file path=ppt/slides/slide15.xml><?xml version="1.0" encoding="utf-8"?>
 <p:sld xmlns:a="http://schemas.openxmlformats.org/drawingml/2006/main" xmlns:r="http://schemas.openxmlformats.org/officeDocument/2006/relationships" xmlns:p="http://schemas.openxmlformats.org/presentationml/2006/main">
   <p:cSld>
     <p:spTree>
@@ -5865,7 +6533,7 @@
 </p:sld>
 </file>
 
-<file path=ppt/slides/slide15.xml><?xml version="1.0" encoding="utf-8"?>
+<file path=ppt/slides/slide16.xml><?xml version="1.0" encoding="utf-8"?>
 <p:sld xmlns:a="http://schemas.openxmlformats.org/drawingml/2006/main" xmlns:r="http://schemas.openxmlformats.org/officeDocument/2006/relationships" xmlns:p="http://schemas.openxmlformats.org/presentationml/2006/main">
   <p:cSld>
     <p:spTree>
@@ -6017,6 +6685,244 @@
           <p:cNvPr id="2" name="Title 1">
             <a:extLst>
               <a:ext uri="{FF2B5EF4-FFF2-40B4-BE49-F238E27FC236}">
+                <a16:creationId xmlns:a16="http://schemas.microsoft.com/office/drawing/2014/main" id="{22206359-CE42-6427-022C-3B7FF5DE7374}"/>
+              </a:ext>
+            </a:extLst>
+          </p:cNvPr>
+          <p:cNvSpPr>
+            <a:spLocks noGrp="1"/>
+          </p:cNvSpPr>
+          <p:nvPr>
+            <p:ph type="title"/>
+          </p:nvPr>
+        </p:nvSpPr>
+        <p:spPr/>
+        <p:txBody>
+          <a:bodyPr/>
+          <a:lstStyle/>
+          <a:p>
+            <a:r>
+              <a:rPr lang="en-US" dirty="0"/>
+              <a:t>Convention On Biodiversity</a:t>
+            </a:r>
+          </a:p>
+        </p:txBody>
+      </p:sp>
+      <p:sp>
+        <p:nvSpPr>
+          <p:cNvPr id="3" name="Content Placeholder 2">
+            <a:extLst>
+              <a:ext uri="{FF2B5EF4-FFF2-40B4-BE49-F238E27FC236}">
+                <a16:creationId xmlns:a16="http://schemas.microsoft.com/office/drawing/2014/main" id="{2A6B707E-E650-69BF-94A9-42205E31ECC8}"/>
+              </a:ext>
+            </a:extLst>
+          </p:cNvPr>
+          <p:cNvSpPr>
+            <a:spLocks noGrp="1"/>
+          </p:cNvSpPr>
+          <p:nvPr>
+            <p:ph idx="1"/>
+          </p:nvPr>
+        </p:nvSpPr>
+        <p:spPr/>
+        <p:txBody>
+          <a:bodyPr/>
+          <a:lstStyle/>
+          <a:p>
+            <a:r>
+              <a:rPr lang="en-US" dirty="0"/>
+              <a:t>international legal treaty from the United Nations created to protect Earth's plant, animal, and microbial life and promote sustainable development</a:t>
+            </a:r>
+          </a:p>
+          <a:p>
+            <a:r>
+              <a:rPr lang="en-US" dirty="0"/>
+              <a:t>three main goals:</a:t>
+            </a:r>
+          </a:p>
+          <a:p>
+            <a:pPr lvl="1"/>
+            <a:r>
+              <a:rPr lang="en-US" dirty="0"/>
+              <a:t>the conservation of biological diversity;</a:t>
+            </a:r>
+          </a:p>
+          <a:p>
+            <a:pPr lvl="1"/>
+            <a:r>
+              <a:rPr lang="en-US" dirty="0"/>
+              <a:t>the sustainable use of its components;</a:t>
+            </a:r>
+          </a:p>
+          <a:p>
+            <a:pPr lvl="1"/>
+            <a:r>
+              <a:rPr lang="en-US" dirty="0"/>
+              <a:t>the fair and equitable sharing of the benefits arising from the use of genetic resources.</a:t>
+            </a:r>
+          </a:p>
+          <a:p>
+            <a:endParaRPr lang="en-US" dirty="0"/>
+          </a:p>
+        </p:txBody>
+      </p:sp>
+      <p:pic>
+        <p:nvPicPr>
+          <p:cNvPr id="1026" name="Picture 2" descr="Kunming-Montreal Global Biodiversity Framework">
+            <a:extLst>
+              <a:ext uri="{FF2B5EF4-FFF2-40B4-BE49-F238E27FC236}">
+                <a16:creationId xmlns:a16="http://schemas.microsoft.com/office/drawing/2014/main" id="{33628141-8088-1E36-936B-59F5A2CDA15D}"/>
+              </a:ext>
+            </a:extLst>
+          </p:cNvPr>
+          <p:cNvPicPr>
+            <a:picLocks noChangeAspect="1" noChangeArrowheads="1"/>
+          </p:cNvPicPr>
+          <p:nvPr/>
+        </p:nvPicPr>
+        <p:blipFill>
+          <a:blip r:embed="rId3">
+            <a:extLst>
+              <a:ext uri="{28A0092B-C50C-407E-A947-70E740481C1C}">
+                <a14:useLocalDpi xmlns:a14="http://schemas.microsoft.com/office/drawing/2010/main" val="0"/>
+              </a:ext>
+            </a:extLst>
+          </a:blip>
+          <a:srcRect/>
+          <a:stretch>
+            <a:fillRect/>
+          </a:stretch>
+        </p:blipFill>
+        <p:spPr bwMode="auto">
+          <a:xfrm>
+            <a:off x="419100" y="3037141"/>
+            <a:ext cx="11353800" cy="2463800"/>
+          </a:xfrm>
+          <a:prstGeom prst="rect">
+            <a:avLst/>
+          </a:prstGeom>
+          <a:noFill/>
+          <a:extLst>
+            <a:ext uri="{909E8E84-426E-40DD-AFC4-6F175D3DCCD1}">
+              <a14:hiddenFill xmlns:a14="http://schemas.microsoft.com/office/drawing/2010/main">
+                <a:solidFill>
+                  <a:srgbClr val="FFFFFF"/>
+                </a:solidFill>
+              </a14:hiddenFill>
+            </a:ext>
+          </a:extLst>
+        </p:spPr>
+      </p:pic>
+    </p:spTree>
+    <p:extLst>
+      <p:ext uri="{BB962C8B-B14F-4D97-AF65-F5344CB8AC3E}">
+        <p14:creationId xmlns:p14="http://schemas.microsoft.com/office/powerpoint/2010/main" val="951099208"/>
+      </p:ext>
+    </p:extLst>
+  </p:cSld>
+  <p:clrMapOvr>
+    <a:masterClrMapping/>
+  </p:clrMapOvr>
+  <p:timing>
+    <p:tnLst>
+      <p:par>
+        <p:cTn id="1" dur="indefinite" restart="never" nodeType="tmRoot">
+          <p:childTnLst>
+            <p:seq concurrent="1" nextAc="seek">
+              <p:cTn id="2" dur="indefinite" nodeType="mainSeq">
+                <p:childTnLst>
+                  <p:par>
+                    <p:cTn id="3" fill="hold">
+                      <p:stCondLst>
+                        <p:cond delay="indefinite"/>
+                      </p:stCondLst>
+                      <p:childTnLst>
+                        <p:par>
+                          <p:cTn id="4" fill="hold">
+                            <p:stCondLst>
+                              <p:cond delay="0"/>
+                            </p:stCondLst>
+                            <p:childTnLst>
+                              <p:par>
+                                <p:cTn id="5" presetID="1" presetClass="entr" presetSubtype="0" fill="hold" nodeType="clickEffect">
+                                  <p:stCondLst>
+                                    <p:cond delay="0"/>
+                                  </p:stCondLst>
+                                  <p:childTnLst>
+                                    <p:set>
+                                      <p:cBhvr>
+                                        <p:cTn id="6" dur="1" fill="hold">
+                                          <p:stCondLst>
+                                            <p:cond delay="0"/>
+                                          </p:stCondLst>
+                                        </p:cTn>
+                                        <p:tgtEl>
+                                          <p:spTgt spid="1026"/>
+                                        </p:tgtEl>
+                                        <p:attrNameLst>
+                                          <p:attrName>style.visibility</p:attrName>
+                                        </p:attrNameLst>
+                                      </p:cBhvr>
+                                      <p:to>
+                                        <p:strVal val="visible"/>
+                                      </p:to>
+                                    </p:set>
+                                  </p:childTnLst>
+                                </p:cTn>
+                              </p:par>
+                            </p:childTnLst>
+                          </p:cTn>
+                        </p:par>
+                      </p:childTnLst>
+                    </p:cTn>
+                  </p:par>
+                </p:childTnLst>
+              </p:cTn>
+              <p:prevCondLst>
+                <p:cond evt="onPrev" delay="0">
+                  <p:tgtEl>
+                    <p:sldTgt/>
+                  </p:tgtEl>
+                </p:cond>
+              </p:prevCondLst>
+              <p:nextCondLst>
+                <p:cond evt="onNext" delay="0">
+                  <p:tgtEl>
+                    <p:sldTgt/>
+                  </p:tgtEl>
+                </p:cond>
+              </p:nextCondLst>
+            </p:seq>
+          </p:childTnLst>
+        </p:cTn>
+      </p:par>
+    </p:tnLst>
+  </p:timing>
+</p:sld>
+</file>
+
+<file path=ppt/slides/slide3.xml><?xml version="1.0" encoding="utf-8"?>
+<p:sld xmlns:a="http://schemas.openxmlformats.org/drawingml/2006/main" xmlns:r="http://schemas.openxmlformats.org/officeDocument/2006/relationships" xmlns:p="http://schemas.openxmlformats.org/presentationml/2006/main">
+  <p:cSld>
+    <p:spTree>
+      <p:nvGrpSpPr>
+        <p:cNvPr id="1" name=""/>
+        <p:cNvGrpSpPr/>
+        <p:nvPr/>
+      </p:nvGrpSpPr>
+      <p:grpSpPr>
+        <a:xfrm>
+          <a:off x="0" y="0"/>
+          <a:ext cx="0" cy="0"/>
+          <a:chOff x="0" y="0"/>
+          <a:chExt cx="0" cy="0"/>
+        </a:xfrm>
+      </p:grpSpPr>
+      <p:sp>
+        <p:nvSpPr>
+          <p:cNvPr id="2" name="Title 1">
+            <a:extLst>
+              <a:ext uri="{FF2B5EF4-FFF2-40B4-BE49-F238E27FC236}">
                 <a16:creationId xmlns:a16="http://schemas.microsoft.com/office/drawing/2014/main" id="{E936D5E1-1388-D964-7350-20AC58B4E97B}"/>
               </a:ext>
             </a:extLst>
@@ -6055,7 +6961,7 @@
           <p:nvPr/>
         </p:nvPicPr>
         <p:blipFill>
-          <a:blip r:embed="rId2">
+          <a:blip r:embed="rId3">
             <a:extLst>
               <a:ext uri="{28A0092B-C50C-407E-A947-70E740481C1C}">
                 <a14:useLocalDpi xmlns:a14="http://schemas.microsoft.com/office/drawing/2010/main" val="0"/>
@@ -6100,7 +7006,7 @@
 </p:sld>
 </file>
 
-<file path=ppt/slides/slide3.xml><?xml version="1.0" encoding="utf-8"?>
+<file path=ppt/slides/slide4.xml><?xml version="1.0" encoding="utf-8"?>
 <p:sld xmlns:a="http://schemas.openxmlformats.org/drawingml/2006/main" xmlns:r="http://schemas.openxmlformats.org/officeDocument/2006/relationships" xmlns:p="http://schemas.openxmlformats.org/presentationml/2006/main">
   <p:cSld>
     <p:spTree>
@@ -6225,7 +7131,7 @@
             <a:pPr algn="ctr"/>
             <a:r>
               <a:rPr lang="en-US" dirty="0"/>
-              <a:t>4 Goals for 2025</a:t>
+              <a:t>4 Goals for 2050</a:t>
             </a:r>
           </a:p>
         </p:txBody>
@@ -6424,7 +7330,7 @@
 </p:sld>
 </file>
 
-<file path=ppt/slides/slide4.xml><?xml version="1.0" encoding="utf-8"?>
+<file path=ppt/slides/slide5.xml><?xml version="1.0" encoding="utf-8"?>
 <p:sld xmlns:a="http://schemas.openxmlformats.org/drawingml/2006/main" xmlns:r="http://schemas.openxmlformats.org/officeDocument/2006/relationships" xmlns:p="http://schemas.openxmlformats.org/presentationml/2006/main">
   <p:cSld>
     <p:spTree>
@@ -6507,7 +7413,7 @@
 </p:sld>
 </file>
 
-<file path=ppt/slides/slide5.xml><?xml version="1.0" encoding="utf-8"?>
+<file path=ppt/slides/slide6.xml><?xml version="1.0" encoding="utf-8"?>
 <p:sld xmlns:a="http://schemas.openxmlformats.org/drawingml/2006/main" xmlns:r="http://schemas.openxmlformats.org/officeDocument/2006/relationships" xmlns:p="http://schemas.openxmlformats.org/presentationml/2006/main">
   <p:cSld>
     <p:spTree>
@@ -7091,7 +7997,7 @@
 </p:sld>
 </file>
 
-<file path=ppt/slides/slide6.xml><?xml version="1.0" encoding="utf-8"?>
+<file path=ppt/slides/slide7.xml><?xml version="1.0" encoding="utf-8"?>
 <p:sld xmlns:a="http://schemas.openxmlformats.org/drawingml/2006/main" xmlns:r="http://schemas.openxmlformats.org/officeDocument/2006/relationships" xmlns:p="http://schemas.openxmlformats.org/presentationml/2006/main">
   <p:cSld>
     <p:spTree>
@@ -7256,7 +8162,7 @@
 </p:sld>
 </file>
 
-<file path=ppt/slides/slide7.xml><?xml version="1.0" encoding="utf-8"?>
+<file path=ppt/slides/slide8.xml><?xml version="1.0" encoding="utf-8"?>
 <p:sld xmlns:a="http://schemas.openxmlformats.org/drawingml/2006/main" xmlns:r="http://schemas.openxmlformats.org/officeDocument/2006/relationships" xmlns:p="http://schemas.openxmlformats.org/presentationml/2006/main">
   <p:cSld>
     <p:spTree>
@@ -8130,7 +9036,7 @@
 </p:sld>
 </file>
 
-<file path=ppt/slides/slide8.xml><?xml version="1.0" encoding="utf-8"?>
+<file path=ppt/slides/slide9.xml><?xml version="1.0" encoding="utf-8"?>
 <p:sld xmlns:a="http://schemas.openxmlformats.org/drawingml/2006/main" xmlns:r="http://schemas.openxmlformats.org/officeDocument/2006/relationships" xmlns:p="http://schemas.openxmlformats.org/presentationml/2006/main">
   <p:cSld>
     <p:spTree>
@@ -8707,158 +9613,6 @@
     <p:extLst>
       <p:ext uri="{BB962C8B-B14F-4D97-AF65-F5344CB8AC3E}">
         <p14:creationId xmlns:p14="http://schemas.microsoft.com/office/powerpoint/2010/main" val="3308885022"/>
-      </p:ext>
-    </p:extLst>
-  </p:cSld>
-  <p:clrMapOvr>
-    <a:masterClrMapping/>
-  </p:clrMapOvr>
-</p:sld>
-</file>
-
-<file path=ppt/slides/slide9.xml><?xml version="1.0" encoding="utf-8"?>
-<p:sld xmlns:a="http://schemas.openxmlformats.org/drawingml/2006/main" xmlns:r="http://schemas.openxmlformats.org/officeDocument/2006/relationships" xmlns:p="http://schemas.openxmlformats.org/presentationml/2006/main">
-  <p:cSld>
-    <p:spTree>
-      <p:nvGrpSpPr>
-        <p:cNvPr id="1" name=""/>
-        <p:cNvGrpSpPr/>
-        <p:nvPr/>
-      </p:nvGrpSpPr>
-      <p:grpSpPr>
-        <a:xfrm>
-          <a:off x="0" y="0"/>
-          <a:ext cx="0" cy="0"/>
-          <a:chOff x="0" y="0"/>
-          <a:chExt cx="0" cy="0"/>
-        </a:xfrm>
-      </p:grpSpPr>
-      <p:sp>
-        <p:nvSpPr>
-          <p:cNvPr id="2" name="Title 1">
-            <a:extLst>
-              <a:ext uri="{FF2B5EF4-FFF2-40B4-BE49-F238E27FC236}">
-                <a16:creationId xmlns:a16="http://schemas.microsoft.com/office/drawing/2014/main" id="{23E41630-A727-9C1E-3720-27E1FE18E5D5}"/>
-              </a:ext>
-            </a:extLst>
-          </p:cNvPr>
-          <p:cNvSpPr>
-            <a:spLocks noGrp="1"/>
-          </p:cNvSpPr>
-          <p:nvPr>
-            <p:ph type="title"/>
-          </p:nvPr>
-        </p:nvSpPr>
-        <p:spPr/>
-        <p:txBody>
-          <a:bodyPr/>
-          <a:lstStyle/>
-          <a:p>
-            <a:r>
-              <a:rPr lang="en-US" dirty="0"/>
-              <a:t>The Red List is not law but it informs policy</a:t>
-            </a:r>
-          </a:p>
-        </p:txBody>
-      </p:sp>
-      <p:sp>
-        <p:nvSpPr>
-          <p:cNvPr id="3" name="Content Placeholder 2">
-            <a:extLst>
-              <a:ext uri="{FF2B5EF4-FFF2-40B4-BE49-F238E27FC236}">
-                <a16:creationId xmlns:a16="http://schemas.microsoft.com/office/drawing/2014/main" id="{E593D19F-0FAE-5390-C981-1405A225A063}"/>
-              </a:ext>
-            </a:extLst>
-          </p:cNvPr>
-          <p:cNvSpPr>
-            <a:spLocks noGrp="1"/>
-          </p:cNvSpPr>
-          <p:nvPr>
-            <p:ph idx="1"/>
-          </p:nvPr>
-        </p:nvSpPr>
-        <p:spPr/>
-        <p:txBody>
-          <a:bodyPr>
-            <a:normAutofit lnSpcReduction="10000"/>
-          </a:bodyPr>
-          <a:lstStyle/>
-          <a:p>
-            <a:r>
-              <a:rPr lang="en-US" dirty="0"/>
-              <a:t>IUCN Red List feeds into</a:t>
-            </a:r>
-          </a:p>
-          <a:p>
-            <a:pPr lvl="1"/>
-            <a:r>
-              <a:rPr lang="en-US" dirty="0"/>
-              <a:t>conservation planning</a:t>
-            </a:r>
-          </a:p>
-          <a:p>
-            <a:pPr lvl="1"/>
-            <a:r>
-              <a:rPr lang="en-US" dirty="0"/>
-              <a:t>national and regional conservation priorities</a:t>
-            </a:r>
-          </a:p>
-          <a:p>
-            <a:pPr lvl="1"/>
-            <a:r>
-              <a:rPr lang="en-US" dirty="0"/>
-              <a:t>international agreements</a:t>
-            </a:r>
-          </a:p>
-          <a:p>
-            <a:pPr lvl="1"/>
-            <a:r>
-              <a:rPr lang="en-US" dirty="0"/>
-              <a:t>global biodiversity indicators</a:t>
-            </a:r>
-          </a:p>
-          <a:p>
-            <a:r>
-              <a:rPr lang="en-US" dirty="0"/>
-              <a:t>Examples of international agreements</a:t>
-            </a:r>
-          </a:p>
-          <a:p>
-            <a:pPr marL="971550" lvl="1" indent="-514350">
-              <a:buFont typeface="+mj-lt"/>
-              <a:buAutoNum type="arabicPeriod"/>
-            </a:pPr>
-            <a:r>
-              <a:rPr lang="en-US" dirty="0"/>
-              <a:t>CITES - Red List information can inform decisions concerning international trade and revisions to CITES appendices</a:t>
-            </a:r>
-          </a:p>
-          <a:p>
-            <a:pPr marL="971550" lvl="1" indent="-514350">
-              <a:buFont typeface="+mj-lt"/>
-              <a:buAutoNum type="arabicPeriod"/>
-            </a:pPr>
-            <a:r>
-              <a:rPr lang="en-US" dirty="0"/>
-              <a:t>CMS - Red List information can inform decisions concerning migratory species and their conservation</a:t>
-            </a:r>
-          </a:p>
-          <a:p>
-            <a:pPr marL="971550" lvl="1" indent="-514350">
-              <a:buFont typeface="+mj-lt"/>
-              <a:buAutoNum type="arabicPeriod"/>
-            </a:pPr>
-            <a:r>
-              <a:rPr lang="en-US" dirty="0"/>
-              <a:t>GBF</a:t>
-            </a:r>
-          </a:p>
-        </p:txBody>
-      </p:sp>
-    </p:spTree>
-    <p:extLst>
-      <p:ext uri="{BB962C8B-B14F-4D97-AF65-F5344CB8AC3E}">
-        <p14:creationId xmlns:p14="http://schemas.microsoft.com/office/powerpoint/2010/main" val="1976748286"/>
       </p:ext>
     </p:extLst>
   </p:cSld>

--- a/teaching/ECOL592-007-Species_Listing/resources/IUCN_GBF_intro.pptx
+++ b/teaching/ECOL592-007-Species_Listing/resources/IUCN_GBF_intro.pptx
@@ -4220,7 +4220,7 @@
           <a:bodyPr/>
           <a:lstStyle/>
           <a:p>
-            <a:endParaRPr lang="en-US"/>
+            <a:endParaRPr lang="en-US" dirty="0"/>
           </a:p>
         </p:txBody>
       </p:sp>
